--- a/fuzzing.pptx
+++ b/fuzzing.pptx
@@ -7,11 +7,12 @@
   <p:sldIdLst>
     <p:sldId id="256" r:id="rId2"/>
     <p:sldId id="257" r:id="rId3"/>
-    <p:sldId id="262" r:id="rId4"/>
-    <p:sldId id="259" r:id="rId5"/>
-    <p:sldId id="258" r:id="rId6"/>
-    <p:sldId id="261" r:id="rId7"/>
-    <p:sldId id="260" r:id="rId8"/>
+    <p:sldId id="263" r:id="rId4"/>
+    <p:sldId id="262" r:id="rId5"/>
+    <p:sldId id="259" r:id="rId6"/>
+    <p:sldId id="258" r:id="rId7"/>
+    <p:sldId id="261" r:id="rId8"/>
+    <p:sldId id="260" r:id="rId9"/>
   </p:sldIdLst>
   <p:sldSz cx="12192000" cy="6858000"/>
   <p:notesSz cx="6858000" cy="9144000"/>
@@ -3665,7 +3666,7 @@
         </p:nvSpPr>
         <p:spPr>
           <a:xfrm>
-            <a:off x="235974" y="825910"/>
+            <a:off x="235974" y="766918"/>
             <a:ext cx="1120878" cy="923330"/>
           </a:xfrm>
           <a:prstGeom prst="rect">
@@ -3685,7 +3686,11 @@
           <a:lstStyle/>
           <a:p>
             <a:r>
-              <a:rPr lang="en-US" dirty="0" err="1"/>
+              <a:rPr lang="en-US" b="1" dirty="0" err="1">
+                <a:solidFill>
+                  <a:srgbClr val="FF0000"/>
+                </a:solidFill>
+              </a:rPr>
               <a:t>Fuzzer</a:t>
             </a:r>
             <a:br>
@@ -3718,8 +3723,8 @@
         </p:nvSpPr>
         <p:spPr>
           <a:xfrm>
-            <a:off x="1971911" y="884275"/>
-            <a:ext cx="1120878" cy="646331"/>
+            <a:off x="1971910" y="766291"/>
+            <a:ext cx="1364517" cy="923330"/>
           </a:xfrm>
           <a:prstGeom prst="rect">
             <a:avLst/>
@@ -3738,6 +3743,16 @@
           <a:lstStyle/>
           <a:p>
             <a:r>
+              <a:rPr lang="en-US" b="1" dirty="0">
+                <a:solidFill>
+                  <a:srgbClr val="FF0000"/>
+                </a:solidFill>
+              </a:rPr>
+              <a:t>SUT</a:t>
+            </a:r>
+          </a:p>
+          <a:p>
+            <a:r>
               <a:rPr lang="en-US" dirty="0"/>
               <a:t>System</a:t>
             </a:r>
@@ -3745,7 +3760,7 @@
           <a:p>
             <a:r>
               <a:rPr lang="en-US" dirty="0"/>
-              <a:t>test</a:t>
+              <a:t>Under Test</a:t>
             </a:r>
           </a:p>
         </p:txBody>
@@ -3764,11 +3779,17 @@
         </p:nvSpPr>
         <p:spPr>
           <a:xfrm rot="10800000">
-            <a:off x="505839" y="1551831"/>
-            <a:ext cx="2140085" cy="1035725"/>
+            <a:off x="564828" y="1724247"/>
+            <a:ext cx="2140085" cy="760071"/>
           </a:xfrm>
           <a:prstGeom prst="uturnArrow">
-            <a:avLst/>
+            <a:avLst>
+              <a:gd name="adj1" fmla="val 36097"/>
+              <a:gd name="adj2" fmla="val 25000"/>
+              <a:gd name="adj3" fmla="val 23060"/>
+              <a:gd name="adj4" fmla="val 43750"/>
+              <a:gd name="adj5" fmla="val 100000"/>
+            </a:avLst>
           </a:prstGeom>
           <a:solidFill>
             <a:schemeClr val="accent1">
@@ -3820,7 +3841,7 @@
         </p:nvSpPr>
         <p:spPr>
           <a:xfrm>
-            <a:off x="3131699" y="992222"/>
+            <a:off x="3382419" y="992222"/>
             <a:ext cx="547825" cy="441109"/>
           </a:xfrm>
           <a:prstGeom prst="rightArrow">
@@ -3872,7 +3893,7 @@
         </p:nvSpPr>
         <p:spPr>
           <a:xfrm>
-            <a:off x="3725515" y="1003319"/>
+            <a:off x="3976235" y="1003319"/>
             <a:ext cx="967966" cy="369332"/>
           </a:xfrm>
           <a:prstGeom prst="rect">
@@ -3892,7 +3913,11 @@
           <a:lstStyle/>
           <a:p>
             <a:r>
-              <a:rPr lang="en-US" dirty="0"/>
+              <a:rPr lang="en-US" b="1" dirty="0">
+                <a:solidFill>
+                  <a:srgbClr val="FF0000"/>
+                </a:solidFill>
+              </a:rPr>
               <a:t>Report</a:t>
             </a:r>
           </a:p>
@@ -3912,8 +3937,8 @@
         </p:nvSpPr>
         <p:spPr>
           <a:xfrm>
-            <a:off x="1382314" y="988170"/>
-            <a:ext cx="547825" cy="441109"/>
+            <a:off x="1382856" y="988170"/>
+            <a:ext cx="562032" cy="441109"/>
           </a:xfrm>
           <a:prstGeom prst="rightArrow">
             <a:avLst/>
@@ -3964,7 +3989,7 @@
         </p:nvSpPr>
         <p:spPr>
           <a:xfrm>
-            <a:off x="1110218" y="2276295"/>
+            <a:off x="1169210" y="2158311"/>
             <a:ext cx="1090105" cy="369332"/>
           </a:xfrm>
           <a:prstGeom prst="rect">
@@ -4514,7 +4539,7 @@
           <p:cNvPr id="4" name="TextBox 3">
             <a:extLst>
               <a:ext uri="{FF2B5EF4-FFF2-40B4-BE49-F238E27FC236}">
-                <a16:creationId xmlns:a16="http://schemas.microsoft.com/office/drawing/2014/main" id="{C2A4CC70-5A08-8445-A9C6-DED41086EAE6}"/>
+                <a16:creationId xmlns:a16="http://schemas.microsoft.com/office/drawing/2014/main" id="{ECA90AF5-F99B-D94F-B642-78E8B6D6476F}"/>
               </a:ext>
             </a:extLst>
           </p:cNvPr>
@@ -4523,8 +4548,8 @@
         </p:nvSpPr>
         <p:spPr>
           <a:xfrm>
-            <a:off x="-1" y="0"/>
-            <a:ext cx="7120647" cy="584775"/>
+            <a:off x="0" y="103236"/>
+            <a:ext cx="12192000" cy="6278642"/>
           </a:xfrm>
           <a:prstGeom prst="rect">
             <a:avLst/>
@@ -4538,143 +4563,32 @@
           <a:lstStyle/>
           <a:p>
             <a:r>
-              <a:rPr lang="en-US" sz="3200" b="1" dirty="0"/>
-              <a:t>Evolutionary Fuzzing:</a:t>
-            </a:r>
-          </a:p>
-        </p:txBody>
-      </p:sp>
-      <p:sp>
-        <p:nvSpPr>
-          <p:cNvPr id="5" name="TextBox 4">
-            <a:extLst>
-              <a:ext uri="{FF2B5EF4-FFF2-40B4-BE49-F238E27FC236}">
-                <a16:creationId xmlns:a16="http://schemas.microsoft.com/office/drawing/2014/main" id="{BFDF6F9A-AC0B-CD48-8201-02D7B8BE409D}"/>
-              </a:ext>
-            </a:extLst>
-          </p:cNvPr>
-          <p:cNvSpPr txBox="1"/>
-          <p:nvPr/>
-        </p:nvSpPr>
-        <p:spPr>
-          <a:xfrm>
-            <a:off x="117988" y="584775"/>
-            <a:ext cx="11931444" cy="5632311"/>
-          </a:xfrm>
-          <a:prstGeom prst="rect">
-            <a:avLst/>
-          </a:prstGeom>
-          <a:noFill/>
-        </p:spPr>
-        <p:txBody>
-          <a:bodyPr wrap="square" rtlCol="0">
-            <a:spAutoFit/>
-          </a:bodyPr>
-          <a:lstStyle/>
-          <a:p>
-            <a:r>
-              <a:rPr lang="en-US" dirty="0"/>
-              <a:t>Evolutionary fuzzing - converging towards the discovery of weaknesses. </a:t>
-            </a:r>
-          </a:p>
-          <a:p>
-            <a:r>
-              <a:rPr lang="en-US" dirty="0"/>
-              <a:t>It uses genetic algorithms in order to produce successive generations of test cases populations.</a:t>
-            </a:r>
-          </a:p>
-          <a:p>
-            <a:endParaRPr lang="en-US" dirty="0"/>
-          </a:p>
-          <a:p>
-            <a:r>
-              <a:rPr lang="en-US" dirty="0"/>
-              <a:t>Evolutionary fuzzing - use feedback from each test case to learn the format of the input over time. </a:t>
-            </a:r>
-            <a:br>
-              <a:rPr lang="en-US" dirty="0"/>
-            </a:br>
-            <a:r>
-              <a:rPr lang="en-US" dirty="0"/>
-              <a:t>For example, by measuring the code coverage of each test case, the </a:t>
-            </a:r>
-            <a:r>
-              <a:rPr lang="en-US" dirty="0" err="1"/>
-              <a:t>fuzzer</a:t>
-            </a:r>
-            <a:r>
-              <a:rPr lang="en-US" dirty="0"/>
-              <a:t> can work out which properties of the test case exercise a given area of code, and gradually evolve a set of test cases that cover the majority of the program code. </a:t>
-            </a:r>
-          </a:p>
-          <a:p>
-            <a:endParaRPr lang="en-US" dirty="0"/>
-          </a:p>
-          <a:p>
-            <a:r>
-              <a:rPr lang="en-US" dirty="0"/>
-              <a:t>Evolutionary fuzzing often relies on other techniques similar to genetic algorithms and may require some form of binary instrumentation to operate correctly.</a:t>
-            </a:r>
-          </a:p>
-          <a:p>
-            <a:endParaRPr lang="en-US" dirty="0"/>
-          </a:p>
-          <a:p>
-            <a:r>
-              <a:rPr lang="en-US" dirty="0" err="1"/>
+              <a:rPr lang="en-US" dirty="0"/>
+              <a:t>This page walks you through setting up coverage guided fuzzing using </a:t>
+            </a:r>
+            <a:r>
+              <a:rPr lang="en-US" b="1" dirty="0" err="1">
+                <a:solidFill>
+                  <a:srgbClr val="FF0000"/>
+                </a:solidFill>
+              </a:rPr>
               <a:t>libFuzzer</a:t>
             </a:r>
             <a:r>
               <a:rPr lang="en-US" dirty="0"/>
-              <a:t> – a library for coverage-guided fuzz testing. </a:t>
-            </a:r>
-            <a:r>
-              <a:rPr lang="en-US" dirty="0" err="1"/>
-              <a:t>LibFuzzer</a:t>
-            </a:r>
-            <a:r>
-              <a:rPr lang="en-US" dirty="0"/>
-              <a:t> is in-process, coverage-guided, evolutionary fuzzing engine. </a:t>
-            </a:r>
-            <a:r>
-              <a:rPr lang="en-US" dirty="0" err="1"/>
-              <a:t>LibFuzzer</a:t>
-            </a:r>
-            <a:r>
-              <a:rPr lang="en-US" dirty="0"/>
-              <a:t> is linked with the library under test, and feeds fuzzed inputs to the library via a specific fuzzing </a:t>
-            </a:r>
-            <a:r>
-              <a:rPr lang="en-US" dirty="0" err="1"/>
-              <a:t>entrypoint</a:t>
-            </a:r>
-            <a:r>
-              <a:rPr lang="en-US" dirty="0"/>
-              <a:t> (aka “target function”); the </a:t>
-            </a:r>
-            <a:r>
-              <a:rPr lang="en-US" dirty="0" err="1"/>
-              <a:t>fuzzer</a:t>
-            </a:r>
-            <a:r>
-              <a:rPr lang="en-US" dirty="0"/>
-              <a:t> then tracks which areas of the code are reached, and generates mutations on the corpus of input data in order to maximize the code coverage. The code coverage information for </a:t>
-            </a:r>
-            <a:r>
-              <a:rPr lang="en-US" dirty="0" err="1"/>
-              <a:t>libFuzzer</a:t>
-            </a:r>
-            <a:r>
-              <a:rPr lang="en-US" dirty="0"/>
-              <a:t> is provided by LLVM’s </a:t>
-            </a:r>
-            <a:r>
-              <a:rPr lang="en-US" dirty="0" err="1"/>
-              <a:t>SanitizerCoverage</a:t>
-            </a:r>
-            <a:r>
-              <a:rPr lang="en-US" dirty="0"/>
-              <a:t> instrumentation.</a:t>
+              <a:t> or </a:t>
+            </a:r>
+            <a:r>
+              <a:rPr lang="en-US" b="1" dirty="0">
+                <a:solidFill>
+                  <a:srgbClr val="FF0000"/>
+                </a:solidFill>
+              </a:rPr>
+              <a:t>AFL</a:t>
+            </a:r>
+            <a:r>
+              <a:rPr lang="en-US" dirty="0"/>
+              <a:t>:</a:t>
             </a:r>
           </a:p>
           <a:p>
@@ -4686,7 +4600,7 @@
               <a:rPr lang="en-US" dirty="0">
                 <a:hlinkClick r:id="rId2"/>
               </a:rPr>
-              <a:t>https://llvm.org/docs/LibFuzzer.html</a:t>
+              <a:t>https://google.github.io/clusterfuzz/setting-up-fuzzing/libfuzzer-and-afl/</a:t>
             </a:r>
             <a:endParaRPr lang="en-US" dirty="0"/>
           </a:p>
@@ -4695,82 +4609,211 @@
           </a:p>
           <a:p>
             <a:r>
-              <a:rPr lang="en-US" dirty="0"/>
-              <a:t>V-Fuzz: Vulnerability-Oriented Evolutionary Fuzzing</a:t>
-            </a:r>
-          </a:p>
-          <a:p>
-            <a:r>
-              <a:rPr lang="en-US" dirty="0" err="1"/>
-              <a:t>Yuwei</a:t>
-            </a:r>
-            <a:r>
-              <a:rPr lang="en-US" dirty="0"/>
-              <a:t> Li, </a:t>
-            </a:r>
-            <a:r>
-              <a:rPr lang="en-US" dirty="0" err="1"/>
-              <a:t>Shouling</a:t>
-            </a:r>
-            <a:r>
-              <a:rPr lang="en-US" dirty="0"/>
-              <a:t> Ji, </a:t>
-            </a:r>
-            <a:r>
-              <a:rPr lang="en-US" dirty="0" err="1"/>
-              <a:t>Chenyang</a:t>
-            </a:r>
-            <a:r>
-              <a:rPr lang="en-US" dirty="0"/>
-              <a:t> </a:t>
-            </a:r>
-            <a:r>
-              <a:rPr lang="en-US" dirty="0" err="1"/>
-              <a:t>Lv</a:t>
-            </a:r>
-            <a:r>
-              <a:rPr lang="en-US" dirty="0"/>
-              <a:t>, Yuan Chen, </a:t>
-            </a:r>
-            <a:r>
-              <a:rPr lang="en-US" dirty="0" err="1"/>
-              <a:t>Jianhai</a:t>
-            </a:r>
-            <a:r>
-              <a:rPr lang="en-US" dirty="0"/>
-              <a:t> Chen, </a:t>
-            </a:r>
-            <a:r>
-              <a:rPr lang="en-US" dirty="0" err="1"/>
-              <a:t>Qinchen</a:t>
-            </a:r>
-            <a:r>
-              <a:rPr lang="en-US" dirty="0"/>
-              <a:t> Gu, and </a:t>
-            </a:r>
-            <a:r>
-              <a:rPr lang="en-US" dirty="0" err="1"/>
-              <a:t>Chunming</a:t>
-            </a:r>
-            <a:r>
-              <a:rPr lang="en-US" dirty="0"/>
-              <a:t> Wu</a:t>
-            </a:r>
-          </a:p>
-          <a:p>
-            <a:r>
-              <a:rPr lang="en-US" dirty="0"/>
-              <a:t> - </a:t>
+              <a:rPr lang="en-US" sz="2800" b="1" dirty="0"/>
+              <a:t>AFL = American Fuzzy Lop </a:t>
+            </a:r>
+            <a:r>
+              <a:rPr lang="en-US" dirty="0"/>
+              <a:t>(lop := something that is lopped (cut-off), such as branches and twigs lopped off trees)</a:t>
+            </a:r>
+          </a:p>
+          <a:p>
+            <a:r>
+              <a:rPr lang="en-US" dirty="0"/>
+              <a:t>Read excellent intro here:    - </a:t>
             </a:r>
             <a:r>
               <a:rPr lang="en-US" dirty="0">
                 <a:hlinkClick r:id="rId3"/>
               </a:rPr>
-              <a:t>https://arxiv.org/pdf/1901.01142.pdf</a:t>
+              <a:t>https://github.com/google/AFL</a:t>
             </a:r>
             <a:r>
               <a:rPr lang="en-US" dirty="0"/>
               <a:t> </a:t>
+            </a:r>
+          </a:p>
+          <a:p>
+            <a:r>
+              <a:rPr lang="en-US" dirty="0"/>
+              <a:t>Also </a:t>
+            </a:r>
+            <a:r>
+              <a:rPr lang="en-US" dirty="0" err="1"/>
+              <a:t>QuickStartGuide</a:t>
+            </a:r>
+            <a:r>
+              <a:rPr lang="en-US" dirty="0"/>
+              <a:t> here:  - </a:t>
+            </a:r>
+            <a:r>
+              <a:rPr lang="en-US" dirty="0">
+                <a:hlinkClick r:id="rId4"/>
+              </a:rPr>
+              <a:t>https://github.com/google/AFL/blob/master/docs/QuickStartGuide.txt</a:t>
+            </a:r>
+            <a:endParaRPr lang="en-US" dirty="0"/>
+          </a:p>
+          <a:p>
+            <a:r>
+              <a:rPr lang="en-US" dirty="0"/>
+              <a:t>AFL is a security-oriented </a:t>
+            </a:r>
+            <a:r>
+              <a:rPr lang="en-US" dirty="0" err="1"/>
+              <a:t>fuzzer</a:t>
+            </a:r>
+            <a:r>
+              <a:rPr lang="en-US" dirty="0"/>
+              <a:t> originally developed at ~2013 by Michal </a:t>
+            </a:r>
+            <a:r>
+              <a:rPr lang="en-US" dirty="0" err="1"/>
+              <a:t>Zalewski</a:t>
+            </a:r>
+            <a:r>
+              <a:rPr lang="en-US" dirty="0"/>
+              <a:t> at Google:  </a:t>
+            </a:r>
+            <a:r>
+              <a:rPr lang="en-US" dirty="0">
+                <a:hlinkClick r:id="rId5"/>
+              </a:rPr>
+              <a:t>lcamtuf@google.com</a:t>
+            </a:r>
+            <a:r>
+              <a:rPr lang="en-US" dirty="0"/>
+              <a:t>.</a:t>
+            </a:r>
+          </a:p>
+          <a:p>
+            <a:r>
+              <a:rPr lang="en-US" dirty="0"/>
+              <a:t>Usage: compile source code of your system using AFL c-compiler (</a:t>
+            </a:r>
+            <a:r>
+              <a:rPr lang="en-US" dirty="0" err="1"/>
+              <a:t>gcc</a:t>
+            </a:r>
+            <a:r>
+              <a:rPr lang="en-US" dirty="0"/>
+              <a:t> of clang). This inserts hooks into the code, thus allowing  to detect place in the code where things happen, and to do adjustments using feedback.</a:t>
+            </a:r>
+          </a:p>
+          <a:p>
+            <a:endParaRPr lang="en-US" dirty="0"/>
+          </a:p>
+          <a:p>
+            <a:r>
+              <a:rPr lang="en-US" sz="3200" b="1" dirty="0" err="1"/>
+              <a:t>libFuzzer</a:t>
+            </a:r>
+            <a:endParaRPr lang="en-US" sz="3200" b="1" dirty="0"/>
+          </a:p>
+          <a:p>
+            <a:r>
+              <a:rPr lang="en-US" dirty="0"/>
+              <a:t> - </a:t>
+            </a:r>
+            <a:r>
+              <a:rPr lang="en-US" dirty="0">
+                <a:hlinkClick r:id="rId6"/>
+              </a:rPr>
+              <a:t>https://llvm.org/docs/LibFuzzer.html</a:t>
+            </a:r>
+            <a:endParaRPr lang="en-US" dirty="0"/>
+          </a:p>
+          <a:p>
+            <a:r>
+              <a:rPr lang="en-US" dirty="0" err="1"/>
+              <a:t>libFuzzer</a:t>
+            </a:r>
+            <a:r>
+              <a:rPr lang="en-US" dirty="0"/>
+              <a:t> is part of the LLVM compiler infrastructure project and comes built-in with the clang compiler. </a:t>
+            </a:r>
+          </a:p>
+          <a:p>
+            <a:r>
+              <a:rPr lang="en-US" dirty="0"/>
+              <a:t>So you compile your source code with it, for example:  </a:t>
+            </a:r>
+          </a:p>
+          <a:p>
+            <a:endParaRPr lang="en-US" dirty="0"/>
+          </a:p>
+          <a:p>
+            <a:r>
+              <a:rPr lang="en-US" dirty="0"/>
+              <a:t>     clang -g -O1 -</a:t>
+            </a:r>
+            <a:r>
+              <a:rPr lang="en-US" dirty="0" err="1"/>
+              <a:t>fsanitize</a:t>
+            </a:r>
+            <a:r>
+              <a:rPr lang="en-US" dirty="0"/>
+              <a:t>=</a:t>
+            </a:r>
+            <a:r>
+              <a:rPr lang="en-US" dirty="0" err="1"/>
+              <a:t>fuzzer</a:t>
+            </a:r>
+            <a:r>
+              <a:rPr lang="en-US" dirty="0"/>
+              <a:t> </a:t>
+            </a:r>
+            <a:r>
+              <a:rPr lang="en-US" dirty="0" err="1"/>
+              <a:t>mytarget.c</a:t>
+            </a:r>
+            <a:endParaRPr lang="en-US" dirty="0"/>
+          </a:p>
+          <a:p>
+            <a:endParaRPr lang="en-US" dirty="0"/>
+          </a:p>
+          <a:p>
+            <a:r>
+              <a:rPr lang="en-US" dirty="0" err="1"/>
+              <a:t>libFuzzer</a:t>
+            </a:r>
+            <a:r>
+              <a:rPr lang="en-US" dirty="0"/>
+              <a:t> requires a bit more work to setup (comparing with AFL), </a:t>
+            </a:r>
+          </a:p>
+          <a:p>
+            <a:r>
+              <a:rPr lang="en-US" dirty="0"/>
+              <a:t>but it is ideal when it comes to fuzzing specific API calls in a library </a:t>
+            </a:r>
+          </a:p>
+          <a:p>
+            <a:r>
+              <a:rPr lang="en-US" dirty="0"/>
+              <a:t>as well as it has better support for different </a:t>
+            </a:r>
+            <a:r>
+              <a:rPr lang="en-US" dirty="0" err="1"/>
+              <a:t>sanitisers</a:t>
+            </a:r>
+            <a:r>
+              <a:rPr lang="en-US" dirty="0"/>
+              <a:t>. </a:t>
+            </a:r>
+          </a:p>
+          <a:p>
+            <a:r>
+              <a:rPr lang="en-US" dirty="0"/>
+              <a:t>Also It is possible to use AFL engine while using a target function like in </a:t>
+            </a:r>
+            <a:r>
+              <a:rPr lang="en-US" dirty="0" err="1"/>
+              <a:t>libFuzzer</a:t>
+            </a:r>
+            <a:r>
+              <a:rPr lang="en-US" dirty="0"/>
+              <a:t>.</a:t>
             </a:r>
           </a:p>
         </p:txBody>
@@ -4778,7 +4821,7 @@
     </p:spTree>
     <p:extLst>
       <p:ext uri="{BB962C8B-B14F-4D97-AF65-F5344CB8AC3E}">
-        <p14:creationId xmlns:p14="http://schemas.microsoft.com/office/powerpoint/2010/main" val="4134792343"/>
+        <p14:creationId xmlns:p14="http://schemas.microsoft.com/office/powerpoint/2010/main" val="134219454"/>
       </p:ext>
     </p:extLst>
   </p:cSld>
@@ -4810,7 +4853,7 @@
           <p:cNvPr id="4" name="TextBox 3">
             <a:extLst>
               <a:ext uri="{FF2B5EF4-FFF2-40B4-BE49-F238E27FC236}">
-                <a16:creationId xmlns:a16="http://schemas.microsoft.com/office/drawing/2014/main" id="{BA908DDB-E503-6B4F-A20C-26E06F933931}"/>
+                <a16:creationId xmlns:a16="http://schemas.microsoft.com/office/drawing/2014/main" id="{C2A4CC70-5A08-8445-A9C6-DED41086EAE6}"/>
               </a:ext>
             </a:extLst>
           </p:cNvPr>
@@ -4819,8 +4862,8 @@
         </p:nvSpPr>
         <p:spPr>
           <a:xfrm>
-            <a:off x="0" y="0"/>
-            <a:ext cx="6420256" cy="2062103"/>
+            <a:off x="-1" y="0"/>
+            <a:ext cx="7120647" cy="584775"/>
           </a:xfrm>
           <a:prstGeom prst="rect">
             <a:avLst/>
@@ -4835,64 +4878,7 @@
           <a:p>
             <a:r>
               <a:rPr lang="en-US" sz="3200" b="1" dirty="0"/>
-              <a:t>Google Brain </a:t>
-            </a:r>
-            <a:r>
-              <a:rPr lang="en-US" sz="3200" b="1" dirty="0" err="1">
-                <a:solidFill>
-                  <a:srgbClr val="0070C0"/>
-                </a:solidFill>
-              </a:rPr>
-              <a:t>TensorFuzz</a:t>
-            </a:r>
-            <a:r>
-              <a:rPr lang="en-US" sz="3200" b="1" dirty="0"/>
-              <a:t> </a:t>
-            </a:r>
-            <a:br>
-              <a:rPr lang="en-US" sz="3200" b="1" dirty="0"/>
-            </a:br>
-            <a:r>
-              <a:rPr lang="en-US" sz="3200" b="1" dirty="0"/>
-              <a:t>Debugs Neural Networks </a:t>
-            </a:r>
-            <a:br>
-              <a:rPr lang="en-US" sz="3200" b="1" dirty="0"/>
-            </a:br>
-            <a:r>
-              <a:rPr lang="en-US" sz="3200" b="1" dirty="0"/>
-              <a:t>with </a:t>
-            </a:r>
-            <a:r>
-              <a:rPr lang="en-US" sz="3200" b="1" dirty="0">
-                <a:solidFill>
-                  <a:srgbClr val="0070C0"/>
-                </a:solidFill>
-              </a:rPr>
-              <a:t>Coverage-Guided Fuzzing (CGF) </a:t>
-            </a:r>
-            <a:br>
-              <a:rPr lang="en-US" sz="3200" b="1" dirty="0"/>
-            </a:br>
-            <a:r>
-              <a:rPr lang="en-US" sz="3200" b="1" dirty="0"/>
-              <a:t>(</a:t>
-            </a:r>
-            <a:r>
-              <a:rPr lang="en-US" sz="3200" b="1" dirty="0" err="1"/>
-              <a:t>Odena</a:t>
-            </a:r>
-            <a:r>
-              <a:rPr lang="en-US" sz="3200" b="1" dirty="0"/>
-              <a:t> &amp; </a:t>
-            </a:r>
-            <a:r>
-              <a:rPr lang="en-US" sz="3200" b="1" dirty="0" err="1"/>
-              <a:t>Goodfellow</a:t>
-            </a:r>
-            <a:r>
-              <a:rPr lang="en-US" sz="3200" b="1" dirty="0"/>
-              <a:t>, 2018)</a:t>
+              <a:t>Evolutionary Fuzzing:</a:t>
             </a:r>
           </a:p>
         </p:txBody>
@@ -4902,7 +4888,7 @@
           <p:cNvPr id="5" name="TextBox 4">
             <a:extLst>
               <a:ext uri="{FF2B5EF4-FFF2-40B4-BE49-F238E27FC236}">
-                <a16:creationId xmlns:a16="http://schemas.microsoft.com/office/drawing/2014/main" id="{03324731-D77F-494B-BCAC-A389F110E23D}"/>
+                <a16:creationId xmlns:a16="http://schemas.microsoft.com/office/drawing/2014/main" id="{BFDF6F9A-AC0B-CD48-8201-02D7B8BE409D}"/>
               </a:ext>
             </a:extLst>
           </p:cNvPr>
@@ -4911,8 +4897,8 @@
         </p:nvSpPr>
         <p:spPr>
           <a:xfrm>
-            <a:off x="29182" y="2169573"/>
-            <a:ext cx="7383296" cy="646331"/>
+            <a:off x="117988" y="584775"/>
+            <a:ext cx="11931444" cy="5632311"/>
           </a:xfrm>
           <a:prstGeom prst="rect">
             <a:avLst/>
@@ -4926,259 +4912,212 @@
           <a:lstStyle/>
           <a:p>
             <a:r>
+              <a:rPr lang="en-US" dirty="0"/>
+              <a:t>Evolutionary fuzzing - converging towards the discovery of weaknesses. </a:t>
+            </a:r>
+          </a:p>
+          <a:p>
+            <a:r>
+              <a:rPr lang="en-US" dirty="0"/>
+              <a:t>It uses genetic algorithms in order to produce successive generations of test cases populations.</a:t>
+            </a:r>
+          </a:p>
+          <a:p>
+            <a:endParaRPr lang="en-US" dirty="0"/>
+          </a:p>
+          <a:p>
+            <a:r>
+              <a:rPr lang="en-US" dirty="0"/>
+              <a:t>Evolutionary fuzzing - use feedback from each test case to learn the format of the input over time. </a:t>
+            </a:r>
+            <a:br>
+              <a:rPr lang="en-US" dirty="0"/>
+            </a:br>
+            <a:r>
+              <a:rPr lang="en-US" dirty="0"/>
+              <a:t>For example, by measuring the code coverage of each test case, the </a:t>
+            </a:r>
+            <a:r>
+              <a:rPr lang="en-US" dirty="0" err="1"/>
+              <a:t>fuzzer</a:t>
+            </a:r>
+            <a:r>
+              <a:rPr lang="en-US" dirty="0"/>
+              <a:t> can work out which properties of the test case exercise a given area of code, and gradually evolve a set of test cases that cover the majority of the program code. </a:t>
+            </a:r>
+          </a:p>
+          <a:p>
+            <a:endParaRPr lang="en-US" dirty="0"/>
+          </a:p>
+          <a:p>
+            <a:r>
+              <a:rPr lang="en-US" dirty="0"/>
+              <a:t>Evolutionary fuzzing often relies on other techniques similar to genetic algorithms and may require some form of binary instrumentation to operate correctly.</a:t>
+            </a:r>
+          </a:p>
+          <a:p>
+            <a:endParaRPr lang="en-US" dirty="0"/>
+          </a:p>
+          <a:p>
+            <a:r>
+              <a:rPr lang="en-US" dirty="0" err="1"/>
+              <a:t>libFuzzer</a:t>
+            </a:r>
+            <a:r>
+              <a:rPr lang="en-US" dirty="0"/>
+              <a:t> – a library for coverage-guided fuzz testing. </a:t>
+            </a:r>
+            <a:r>
+              <a:rPr lang="en-US" dirty="0" err="1"/>
+              <a:t>LibFuzzer</a:t>
+            </a:r>
+            <a:r>
+              <a:rPr lang="en-US" dirty="0"/>
+              <a:t> is in-process, coverage-guided, evolutionary fuzzing engine. </a:t>
+            </a:r>
+            <a:r>
+              <a:rPr lang="en-US" dirty="0" err="1"/>
+              <a:t>LibFuzzer</a:t>
+            </a:r>
+            <a:r>
+              <a:rPr lang="en-US" dirty="0"/>
+              <a:t> is linked with the library under test, and feeds fuzzed inputs to the library via a specific fuzzing </a:t>
+            </a:r>
+            <a:r>
+              <a:rPr lang="en-US" dirty="0" err="1"/>
+              <a:t>entrypoint</a:t>
+            </a:r>
+            <a:r>
+              <a:rPr lang="en-US" dirty="0"/>
+              <a:t> (aka “target function”); the </a:t>
+            </a:r>
+            <a:r>
+              <a:rPr lang="en-US" dirty="0" err="1"/>
+              <a:t>fuzzer</a:t>
+            </a:r>
+            <a:r>
+              <a:rPr lang="en-US" dirty="0"/>
+              <a:t> then tracks which areas of the code are reached, and generates mutations on the corpus of input data in order to maximize the code coverage. The code coverage information for </a:t>
+            </a:r>
+            <a:r>
+              <a:rPr lang="en-US" dirty="0" err="1"/>
+              <a:t>libFuzzer</a:t>
+            </a:r>
+            <a:r>
+              <a:rPr lang="en-US" dirty="0"/>
+              <a:t> is provided by LLVM’s </a:t>
+            </a:r>
+            <a:r>
+              <a:rPr lang="en-US" dirty="0" err="1"/>
+              <a:t>SanitizerCoverage</a:t>
+            </a:r>
+            <a:r>
+              <a:rPr lang="en-US" dirty="0"/>
+              <a:t> instrumentation.</a:t>
+            </a:r>
+          </a:p>
+          <a:p>
+            <a:r>
+              <a:rPr lang="en-US" dirty="0"/>
+              <a:t> - </a:t>
+            </a:r>
+            <a:r>
               <a:rPr lang="en-US" dirty="0">
                 <a:hlinkClick r:id="rId2"/>
               </a:rPr>
-              <a:t>https://medium.com/syncedreview/google-brain-tensorfuzz-debugs-neural-networks-with-coverage-guided-fuzzing-89843346fcda</a:t>
-            </a:r>
-            <a:r>
-              <a:rPr lang="en-US" dirty="0"/>
-              <a:t>  </a:t>
-            </a:r>
-          </a:p>
-        </p:txBody>
-      </p:sp>
-      <p:pic>
-        <p:nvPicPr>
-          <p:cNvPr id="2" name="Picture 1">
-            <a:extLst>
-              <a:ext uri="{FF2B5EF4-FFF2-40B4-BE49-F238E27FC236}">
-                <a16:creationId xmlns:a16="http://schemas.microsoft.com/office/drawing/2014/main" id="{56E224E0-E4AF-294D-8FE9-B92F262DFA73}"/>
-              </a:ext>
-            </a:extLst>
-          </p:cNvPr>
-          <p:cNvPicPr>
-            <a:picLocks noChangeAspect="1"/>
-          </p:cNvPicPr>
-          <p:nvPr/>
-        </p:nvPicPr>
-        <p:blipFill rotWithShape="1">
-          <a:blip r:embed="rId3" cstate="email">
-            <a:extLst>
-              <a:ext uri="{28A0092B-C50C-407E-A947-70E740481C1C}">
-                <a14:useLocalDpi xmlns:a14="http://schemas.microsoft.com/office/drawing/2010/main"/>
-              </a:ext>
-            </a:extLst>
-          </a:blip>
-          <a:srcRect/>
-          <a:stretch/>
-        </p:blipFill>
-        <p:spPr>
-          <a:xfrm>
-            <a:off x="8338794" y="2908237"/>
-            <a:ext cx="3832699" cy="3925198"/>
-          </a:xfrm>
-          <a:prstGeom prst="rect">
-            <a:avLst/>
-          </a:prstGeom>
-        </p:spPr>
-      </p:pic>
-      <p:pic>
-        <p:nvPicPr>
-          <p:cNvPr id="3" name="Picture 2">
-            <a:extLst>
-              <a:ext uri="{FF2B5EF4-FFF2-40B4-BE49-F238E27FC236}">
-                <a16:creationId xmlns:a16="http://schemas.microsoft.com/office/drawing/2014/main" id="{20391757-BA03-DD45-AD15-9B32B72A6F7A}"/>
-              </a:ext>
-            </a:extLst>
-          </p:cNvPr>
-          <p:cNvPicPr>
-            <a:picLocks noChangeAspect="1"/>
-          </p:cNvPicPr>
-          <p:nvPr/>
-        </p:nvPicPr>
-        <p:blipFill>
-          <a:blip r:embed="rId4"/>
-          <a:stretch>
-            <a:fillRect/>
-          </a:stretch>
-        </p:blipFill>
-        <p:spPr>
-          <a:xfrm>
-            <a:off x="8536286" y="260188"/>
-            <a:ext cx="3603829" cy="1801915"/>
-          </a:xfrm>
-          <a:prstGeom prst="rect">
-            <a:avLst/>
-          </a:prstGeom>
-        </p:spPr>
-      </p:pic>
-      <p:sp>
-        <p:nvSpPr>
-          <p:cNvPr id="6" name="TextBox 5">
-            <a:extLst>
-              <a:ext uri="{FF2B5EF4-FFF2-40B4-BE49-F238E27FC236}">
-                <a16:creationId xmlns:a16="http://schemas.microsoft.com/office/drawing/2014/main" id="{41F5609E-9B9B-214E-87DA-4C98A1276ED8}"/>
-              </a:ext>
-            </a:extLst>
-          </p:cNvPr>
-          <p:cNvSpPr txBox="1"/>
-          <p:nvPr/>
-        </p:nvSpPr>
-        <p:spPr>
-          <a:xfrm>
-            <a:off x="8536285" y="2094032"/>
-            <a:ext cx="3603829" cy="369332"/>
-          </a:xfrm>
-          <a:prstGeom prst="rect">
-            <a:avLst/>
-          </a:prstGeom>
-          <a:noFill/>
-        </p:spPr>
-        <p:txBody>
-          <a:bodyPr wrap="square" rtlCol="0">
-            <a:spAutoFit/>
-          </a:bodyPr>
-          <a:lstStyle/>
-          <a:p>
-            <a:r>
-              <a:rPr lang="en-US" dirty="0"/>
-              <a:t>Augustus </a:t>
-            </a:r>
+              <a:t>https://llvm.org/docs/LibFuzzer.html</a:t>
+            </a:r>
+            <a:endParaRPr lang="en-US" dirty="0"/>
+          </a:p>
+          <a:p>
+            <a:endParaRPr lang="en-US" dirty="0"/>
+          </a:p>
+          <a:p>
+            <a:r>
+              <a:rPr lang="en-US" dirty="0"/>
+              <a:t>V-Fuzz: Vulnerability-Oriented Evolutionary Fuzzing</a:t>
+            </a:r>
+          </a:p>
+          <a:p>
             <a:r>
               <a:rPr lang="en-US" dirty="0" err="1"/>
-              <a:t>Odena</a:t>
-            </a:r>
-            <a:r>
-              <a:rPr lang="en-US" dirty="0"/>
-              <a:t>   &amp;   Ian </a:t>
+              <a:t>Yuwei</a:t>
+            </a:r>
+            <a:r>
+              <a:rPr lang="en-US" dirty="0"/>
+              <a:t> Li, </a:t>
             </a:r>
             <a:r>
               <a:rPr lang="en-US" dirty="0" err="1"/>
-              <a:t>Goodfellow</a:t>
-            </a:r>
-            <a:endParaRPr lang="en-US" dirty="0"/>
-          </a:p>
-        </p:txBody>
-      </p:sp>
-      <p:sp>
-        <p:nvSpPr>
-          <p:cNvPr id="7" name="TextBox 6">
-            <a:extLst>
-              <a:ext uri="{FF2B5EF4-FFF2-40B4-BE49-F238E27FC236}">
-                <a16:creationId xmlns:a16="http://schemas.microsoft.com/office/drawing/2014/main" id="{5A42E94E-A869-F34F-85D2-7A3F6569FD46}"/>
-              </a:ext>
-            </a:extLst>
-          </p:cNvPr>
-          <p:cNvSpPr txBox="1"/>
-          <p:nvPr/>
-        </p:nvSpPr>
-        <p:spPr>
-          <a:xfrm>
-            <a:off x="29180" y="3882822"/>
-            <a:ext cx="7869679" cy="2308324"/>
-          </a:xfrm>
-          <a:prstGeom prst="rect">
-            <a:avLst/>
-          </a:prstGeom>
-          <a:noFill/>
-        </p:spPr>
-        <p:txBody>
-          <a:bodyPr wrap="square" rtlCol="0">
-            <a:spAutoFit/>
-          </a:bodyPr>
-          <a:lstStyle/>
-          <a:p>
-            <a:r>
-              <a:rPr lang="en-US" dirty="0"/>
-              <a:t>The </a:t>
-            </a:r>
-            <a:r>
-              <a:rPr lang="en-US" b="1" dirty="0" err="1">
-                <a:solidFill>
-                  <a:srgbClr val="0070C0"/>
-                </a:solidFill>
+              <a:t>Shouling</a:t>
+            </a:r>
+            <a:r>
+              <a:rPr lang="en-US" dirty="0"/>
+              <a:t> Ji, </a:t>
+            </a:r>
+            <a:r>
+              <a:rPr lang="en-US" dirty="0" err="1"/>
+              <a:t>Chenyang</a:t>
+            </a:r>
+            <a:r>
+              <a:rPr lang="en-US" dirty="0"/>
+              <a:t> </a:t>
+            </a:r>
+            <a:r>
+              <a:rPr lang="en-US" dirty="0" err="1"/>
+              <a:t>Lv</a:t>
+            </a:r>
+            <a:r>
+              <a:rPr lang="en-US" dirty="0"/>
+              <a:t>, Yuan Chen, </a:t>
+            </a:r>
+            <a:r>
+              <a:rPr lang="en-US" dirty="0" err="1"/>
+              <a:t>Jianhai</a:t>
+            </a:r>
+            <a:r>
+              <a:rPr lang="en-US" dirty="0"/>
+              <a:t> Chen, </a:t>
+            </a:r>
+            <a:r>
+              <a:rPr lang="en-US" dirty="0" err="1"/>
+              <a:t>Qinchen</a:t>
+            </a:r>
+            <a:r>
+              <a:rPr lang="en-US" dirty="0"/>
+              <a:t> Gu, and </a:t>
+            </a:r>
+            <a:r>
+              <a:rPr lang="en-US" dirty="0" err="1"/>
+              <a:t>Chunming</a:t>
+            </a:r>
+            <a:r>
+              <a:rPr lang="en-US" dirty="0"/>
+              <a:t> Wu</a:t>
+            </a:r>
+          </a:p>
+          <a:p>
+            <a:r>
+              <a:rPr lang="en-US" dirty="0"/>
+              <a:t> - </a:t>
+            </a:r>
+            <a:r>
+              <a:rPr lang="en-US" dirty="0">
+                <a:hlinkClick r:id="rId3"/>
               </a:rPr>
-              <a:t>TensorFuzz</a:t>
-            </a:r>
-            <a:r>
-              <a:rPr lang="en-US" dirty="0"/>
-              <a:t> tool </a:t>
-            </a:r>
-          </a:p>
-          <a:p>
-            <a:r>
-              <a:rPr lang="en-US" dirty="0"/>
-              <a:t>feeds inputs to an arbitrary TensorFlow graph </a:t>
-            </a:r>
-          </a:p>
-          <a:p>
-            <a:r>
-              <a:rPr lang="en-US" dirty="0"/>
-              <a:t>and measures coverage by looking at the “activations” of the computation graph.</a:t>
-            </a:r>
-          </a:p>
-          <a:p>
-            <a:endParaRPr lang="en-US" dirty="0"/>
-          </a:p>
-          <a:p>
-            <a:r>
-              <a:rPr lang="en-US" dirty="0"/>
-              <a:t>In coverage-guided fuzzing, </a:t>
-            </a:r>
-          </a:p>
-          <a:p>
-            <a:r>
-              <a:rPr lang="en-US" dirty="0"/>
-              <a:t>random mutations of inputs to a neural network </a:t>
-            </a:r>
-          </a:p>
-          <a:p>
-            <a:r>
-              <a:rPr lang="en-US" dirty="0"/>
-              <a:t>are guided by a coverage metric </a:t>
-            </a:r>
-          </a:p>
-          <a:p>
-            <a:r>
-              <a:rPr lang="en-US" dirty="0"/>
-              <a:t>toward the goal of satisfying user-specified constraints.</a:t>
-            </a:r>
-          </a:p>
-        </p:txBody>
-      </p:sp>
-      <p:sp>
-        <p:nvSpPr>
-          <p:cNvPr id="8" name="TextBox 7">
-            <a:extLst>
-              <a:ext uri="{FF2B5EF4-FFF2-40B4-BE49-F238E27FC236}">
-                <a16:creationId xmlns:a16="http://schemas.microsoft.com/office/drawing/2014/main" id="{BC75CE2D-A2C2-9A45-B27D-481CF184D1E3}"/>
-              </a:ext>
-            </a:extLst>
-          </p:cNvPr>
-          <p:cNvSpPr txBox="1"/>
-          <p:nvPr/>
-        </p:nvSpPr>
-        <p:spPr>
-          <a:xfrm>
-            <a:off x="29180" y="3070000"/>
-            <a:ext cx="5710218" cy="369332"/>
-          </a:xfrm>
-          <a:prstGeom prst="rect">
-            <a:avLst/>
-          </a:prstGeom>
-          <a:noFill/>
-        </p:spPr>
-        <p:txBody>
-          <a:bodyPr wrap="none" rtlCol="0">
-            <a:spAutoFit/>
-          </a:bodyPr>
-          <a:lstStyle/>
-          <a:p>
-            <a:r>
-              <a:rPr lang="en-US" dirty="0">
-                <a:hlinkClick r:id="rId5"/>
-              </a:rPr>
-              <a:t>http://proceedings.mlr.press/v97/odena19a/odena19a.pdf</a:t>
-            </a:r>
-            <a:endParaRPr lang="en-US" dirty="0"/>
+              <a:t>https://arxiv.org/pdf/1901.01142.pdf</a:t>
+            </a:r>
+            <a:r>
+              <a:rPr lang="en-US" dirty="0"/>
+              <a:t> </a:t>
+            </a:r>
           </a:p>
         </p:txBody>
       </p:sp>
     </p:spTree>
     <p:extLst>
       <p:ext uri="{BB962C8B-B14F-4D97-AF65-F5344CB8AC3E}">
-        <p14:creationId xmlns:p14="http://schemas.microsoft.com/office/powerpoint/2010/main" val="3803802340"/>
+        <p14:creationId xmlns:p14="http://schemas.microsoft.com/office/powerpoint/2010/main" val="4134792343"/>
       </p:ext>
     </p:extLst>
   </p:cSld>
@@ -5219,6 +5158,406 @@
         </p:nvSpPr>
         <p:spPr>
           <a:xfrm>
+            <a:off x="0" y="0"/>
+            <a:ext cx="6420256" cy="2062103"/>
+          </a:xfrm>
+          <a:prstGeom prst="rect">
+            <a:avLst/>
+          </a:prstGeom>
+          <a:noFill/>
+        </p:spPr>
+        <p:txBody>
+          <a:bodyPr wrap="square" rtlCol="0">
+            <a:spAutoFit/>
+          </a:bodyPr>
+          <a:lstStyle/>
+          <a:p>
+            <a:r>
+              <a:rPr lang="en-US" sz="3200" b="1" dirty="0"/>
+              <a:t>Google Brain </a:t>
+            </a:r>
+            <a:r>
+              <a:rPr lang="en-US" sz="3200" b="1" dirty="0" err="1">
+                <a:solidFill>
+                  <a:srgbClr val="0070C0"/>
+                </a:solidFill>
+              </a:rPr>
+              <a:t>TensorFuzz</a:t>
+            </a:r>
+            <a:r>
+              <a:rPr lang="en-US" sz="3200" b="1" dirty="0"/>
+              <a:t> </a:t>
+            </a:r>
+            <a:br>
+              <a:rPr lang="en-US" sz="3200" b="1" dirty="0"/>
+            </a:br>
+            <a:r>
+              <a:rPr lang="en-US" sz="3200" b="1" dirty="0"/>
+              <a:t>Debugs Neural Networks </a:t>
+            </a:r>
+            <a:br>
+              <a:rPr lang="en-US" sz="3200" b="1" dirty="0"/>
+            </a:br>
+            <a:r>
+              <a:rPr lang="en-US" sz="3200" b="1" dirty="0"/>
+              <a:t>with </a:t>
+            </a:r>
+            <a:r>
+              <a:rPr lang="en-US" sz="3200" b="1" dirty="0">
+                <a:solidFill>
+                  <a:srgbClr val="0070C0"/>
+                </a:solidFill>
+              </a:rPr>
+              <a:t>Coverage-Guided Fuzzing (CGF) </a:t>
+            </a:r>
+            <a:br>
+              <a:rPr lang="en-US" sz="3200" b="1" dirty="0"/>
+            </a:br>
+            <a:r>
+              <a:rPr lang="en-US" sz="3200" b="1" dirty="0"/>
+              <a:t>(</a:t>
+            </a:r>
+            <a:r>
+              <a:rPr lang="en-US" sz="3200" b="1" dirty="0" err="1"/>
+              <a:t>Odena</a:t>
+            </a:r>
+            <a:r>
+              <a:rPr lang="en-US" sz="3200" b="1" dirty="0"/>
+              <a:t> &amp; </a:t>
+            </a:r>
+            <a:r>
+              <a:rPr lang="en-US" sz="3200" b="1" dirty="0" err="1"/>
+              <a:t>Goodfellow</a:t>
+            </a:r>
+            <a:r>
+              <a:rPr lang="en-US" sz="3200" b="1" dirty="0"/>
+              <a:t>, 2018)</a:t>
+            </a:r>
+          </a:p>
+        </p:txBody>
+      </p:sp>
+      <p:sp>
+        <p:nvSpPr>
+          <p:cNvPr id="5" name="TextBox 4">
+            <a:extLst>
+              <a:ext uri="{FF2B5EF4-FFF2-40B4-BE49-F238E27FC236}">
+                <a16:creationId xmlns:a16="http://schemas.microsoft.com/office/drawing/2014/main" id="{03324731-D77F-494B-BCAC-A389F110E23D}"/>
+              </a:ext>
+            </a:extLst>
+          </p:cNvPr>
+          <p:cNvSpPr txBox="1"/>
+          <p:nvPr/>
+        </p:nvSpPr>
+        <p:spPr>
+          <a:xfrm>
+            <a:off x="29182" y="2169573"/>
+            <a:ext cx="7383296" cy="646331"/>
+          </a:xfrm>
+          <a:prstGeom prst="rect">
+            <a:avLst/>
+          </a:prstGeom>
+          <a:noFill/>
+        </p:spPr>
+        <p:txBody>
+          <a:bodyPr wrap="square" rtlCol="0">
+            <a:spAutoFit/>
+          </a:bodyPr>
+          <a:lstStyle/>
+          <a:p>
+            <a:r>
+              <a:rPr lang="en-US" dirty="0">
+                <a:hlinkClick r:id="rId2"/>
+              </a:rPr>
+              <a:t>https://medium.com/syncedreview/google-brain-tensorfuzz-debugs-neural-networks-with-coverage-guided-fuzzing-89843346fcda</a:t>
+            </a:r>
+            <a:r>
+              <a:rPr lang="en-US" dirty="0"/>
+              <a:t>  </a:t>
+            </a:r>
+          </a:p>
+        </p:txBody>
+      </p:sp>
+      <p:pic>
+        <p:nvPicPr>
+          <p:cNvPr id="2" name="Picture 1">
+            <a:extLst>
+              <a:ext uri="{FF2B5EF4-FFF2-40B4-BE49-F238E27FC236}">
+                <a16:creationId xmlns:a16="http://schemas.microsoft.com/office/drawing/2014/main" id="{56E224E0-E4AF-294D-8FE9-B92F262DFA73}"/>
+              </a:ext>
+            </a:extLst>
+          </p:cNvPr>
+          <p:cNvPicPr>
+            <a:picLocks noChangeAspect="1"/>
+          </p:cNvPicPr>
+          <p:nvPr/>
+        </p:nvPicPr>
+        <p:blipFill rotWithShape="1">
+          <a:blip r:embed="rId3" cstate="email">
+            <a:extLst>
+              <a:ext uri="{28A0092B-C50C-407E-A947-70E740481C1C}">
+                <a14:useLocalDpi xmlns:a14="http://schemas.microsoft.com/office/drawing/2010/main"/>
+              </a:ext>
+            </a:extLst>
+          </a:blip>
+          <a:srcRect/>
+          <a:stretch/>
+        </p:blipFill>
+        <p:spPr>
+          <a:xfrm>
+            <a:off x="8338794" y="2908237"/>
+            <a:ext cx="3832699" cy="3925198"/>
+          </a:xfrm>
+          <a:prstGeom prst="rect">
+            <a:avLst/>
+          </a:prstGeom>
+        </p:spPr>
+      </p:pic>
+      <p:pic>
+        <p:nvPicPr>
+          <p:cNvPr id="3" name="Picture 2">
+            <a:extLst>
+              <a:ext uri="{FF2B5EF4-FFF2-40B4-BE49-F238E27FC236}">
+                <a16:creationId xmlns:a16="http://schemas.microsoft.com/office/drawing/2014/main" id="{20391757-BA03-DD45-AD15-9B32B72A6F7A}"/>
+              </a:ext>
+            </a:extLst>
+          </p:cNvPr>
+          <p:cNvPicPr>
+            <a:picLocks noChangeAspect="1"/>
+          </p:cNvPicPr>
+          <p:nvPr/>
+        </p:nvPicPr>
+        <p:blipFill>
+          <a:blip r:embed="rId4"/>
+          <a:stretch>
+            <a:fillRect/>
+          </a:stretch>
+        </p:blipFill>
+        <p:spPr>
+          <a:xfrm>
+            <a:off x="8536286" y="260188"/>
+            <a:ext cx="3603829" cy="1801915"/>
+          </a:xfrm>
+          <a:prstGeom prst="rect">
+            <a:avLst/>
+          </a:prstGeom>
+        </p:spPr>
+      </p:pic>
+      <p:sp>
+        <p:nvSpPr>
+          <p:cNvPr id="6" name="TextBox 5">
+            <a:extLst>
+              <a:ext uri="{FF2B5EF4-FFF2-40B4-BE49-F238E27FC236}">
+                <a16:creationId xmlns:a16="http://schemas.microsoft.com/office/drawing/2014/main" id="{41F5609E-9B9B-214E-87DA-4C98A1276ED8}"/>
+              </a:ext>
+            </a:extLst>
+          </p:cNvPr>
+          <p:cNvSpPr txBox="1"/>
+          <p:nvPr/>
+        </p:nvSpPr>
+        <p:spPr>
+          <a:xfrm>
+            <a:off x="8536285" y="2094032"/>
+            <a:ext cx="3603829" cy="369332"/>
+          </a:xfrm>
+          <a:prstGeom prst="rect">
+            <a:avLst/>
+          </a:prstGeom>
+          <a:noFill/>
+        </p:spPr>
+        <p:txBody>
+          <a:bodyPr wrap="square" rtlCol="0">
+            <a:spAutoFit/>
+          </a:bodyPr>
+          <a:lstStyle/>
+          <a:p>
+            <a:r>
+              <a:rPr lang="en-US" dirty="0"/>
+              <a:t>Augustus </a:t>
+            </a:r>
+            <a:r>
+              <a:rPr lang="en-US" dirty="0" err="1"/>
+              <a:t>Odena</a:t>
+            </a:r>
+            <a:r>
+              <a:rPr lang="en-US" dirty="0"/>
+              <a:t>   &amp;   Ian </a:t>
+            </a:r>
+            <a:r>
+              <a:rPr lang="en-US" dirty="0" err="1"/>
+              <a:t>Goodfellow</a:t>
+            </a:r>
+            <a:endParaRPr lang="en-US" dirty="0"/>
+          </a:p>
+        </p:txBody>
+      </p:sp>
+      <p:sp>
+        <p:nvSpPr>
+          <p:cNvPr id="7" name="TextBox 6">
+            <a:extLst>
+              <a:ext uri="{FF2B5EF4-FFF2-40B4-BE49-F238E27FC236}">
+                <a16:creationId xmlns:a16="http://schemas.microsoft.com/office/drawing/2014/main" id="{5A42E94E-A869-F34F-85D2-7A3F6569FD46}"/>
+              </a:ext>
+            </a:extLst>
+          </p:cNvPr>
+          <p:cNvSpPr txBox="1"/>
+          <p:nvPr/>
+        </p:nvSpPr>
+        <p:spPr>
+          <a:xfrm>
+            <a:off x="29180" y="3882822"/>
+            <a:ext cx="7869679" cy="2308324"/>
+          </a:xfrm>
+          <a:prstGeom prst="rect">
+            <a:avLst/>
+          </a:prstGeom>
+          <a:noFill/>
+        </p:spPr>
+        <p:txBody>
+          <a:bodyPr wrap="square" rtlCol="0">
+            <a:spAutoFit/>
+          </a:bodyPr>
+          <a:lstStyle/>
+          <a:p>
+            <a:r>
+              <a:rPr lang="en-US" dirty="0"/>
+              <a:t>The </a:t>
+            </a:r>
+            <a:r>
+              <a:rPr lang="en-US" b="1" dirty="0" err="1">
+                <a:solidFill>
+                  <a:srgbClr val="0070C0"/>
+                </a:solidFill>
+              </a:rPr>
+              <a:t>TensorFuzz</a:t>
+            </a:r>
+            <a:r>
+              <a:rPr lang="en-US" dirty="0"/>
+              <a:t> tool </a:t>
+            </a:r>
+          </a:p>
+          <a:p>
+            <a:r>
+              <a:rPr lang="en-US" dirty="0"/>
+              <a:t>feeds inputs to an arbitrary TensorFlow graph </a:t>
+            </a:r>
+          </a:p>
+          <a:p>
+            <a:r>
+              <a:rPr lang="en-US" dirty="0"/>
+              <a:t>and measures coverage by looking at the “activations” of the computation graph.</a:t>
+            </a:r>
+          </a:p>
+          <a:p>
+            <a:endParaRPr lang="en-US" dirty="0"/>
+          </a:p>
+          <a:p>
+            <a:r>
+              <a:rPr lang="en-US" dirty="0"/>
+              <a:t>In coverage-guided fuzzing, </a:t>
+            </a:r>
+          </a:p>
+          <a:p>
+            <a:r>
+              <a:rPr lang="en-US" dirty="0"/>
+              <a:t>random mutations of inputs to a neural network </a:t>
+            </a:r>
+          </a:p>
+          <a:p>
+            <a:r>
+              <a:rPr lang="en-US" dirty="0"/>
+              <a:t>are guided by a coverage metric </a:t>
+            </a:r>
+          </a:p>
+          <a:p>
+            <a:r>
+              <a:rPr lang="en-US" dirty="0"/>
+              <a:t>toward the goal of satisfying user-specified constraints.</a:t>
+            </a:r>
+          </a:p>
+        </p:txBody>
+      </p:sp>
+      <p:sp>
+        <p:nvSpPr>
+          <p:cNvPr id="8" name="TextBox 7">
+            <a:extLst>
+              <a:ext uri="{FF2B5EF4-FFF2-40B4-BE49-F238E27FC236}">
+                <a16:creationId xmlns:a16="http://schemas.microsoft.com/office/drawing/2014/main" id="{BC75CE2D-A2C2-9A45-B27D-481CF184D1E3}"/>
+              </a:ext>
+            </a:extLst>
+          </p:cNvPr>
+          <p:cNvSpPr txBox="1"/>
+          <p:nvPr/>
+        </p:nvSpPr>
+        <p:spPr>
+          <a:xfrm>
+            <a:off x="29180" y="3070000"/>
+            <a:ext cx="5710218" cy="369332"/>
+          </a:xfrm>
+          <a:prstGeom prst="rect">
+            <a:avLst/>
+          </a:prstGeom>
+          <a:noFill/>
+        </p:spPr>
+        <p:txBody>
+          <a:bodyPr wrap="none" rtlCol="0">
+            <a:spAutoFit/>
+          </a:bodyPr>
+          <a:lstStyle/>
+          <a:p>
+            <a:r>
+              <a:rPr lang="en-US" dirty="0">
+                <a:hlinkClick r:id="rId5"/>
+              </a:rPr>
+              <a:t>http://proceedings.mlr.press/v97/odena19a/odena19a.pdf</a:t>
+            </a:r>
+            <a:endParaRPr lang="en-US" dirty="0"/>
+          </a:p>
+        </p:txBody>
+      </p:sp>
+    </p:spTree>
+    <p:extLst>
+      <p:ext uri="{BB962C8B-B14F-4D97-AF65-F5344CB8AC3E}">
+        <p14:creationId xmlns:p14="http://schemas.microsoft.com/office/powerpoint/2010/main" val="3803802340"/>
+      </p:ext>
+    </p:extLst>
+  </p:cSld>
+  <p:clrMapOvr>
+    <a:masterClrMapping/>
+  </p:clrMapOvr>
+</p:sld>
+</file>
+
+<file path=ppt/slides/slide6.xml><?xml version="1.0" encoding="utf-8"?>
+<p:sld xmlns:a="http://schemas.openxmlformats.org/drawingml/2006/main" xmlns:r="http://schemas.openxmlformats.org/officeDocument/2006/relationships" xmlns:p="http://schemas.openxmlformats.org/presentationml/2006/main">
+  <p:cSld>
+    <p:spTree>
+      <p:nvGrpSpPr>
+        <p:cNvPr id="1" name=""/>
+        <p:cNvGrpSpPr/>
+        <p:nvPr/>
+      </p:nvGrpSpPr>
+      <p:grpSpPr>
+        <a:xfrm>
+          <a:off x="0" y="0"/>
+          <a:ext cx="0" cy="0"/>
+          <a:chOff x="0" y="0"/>
+          <a:chExt cx="0" cy="0"/>
+        </a:xfrm>
+      </p:grpSpPr>
+      <p:sp>
+        <p:nvSpPr>
+          <p:cNvPr id="4" name="TextBox 3">
+            <a:extLst>
+              <a:ext uri="{FF2B5EF4-FFF2-40B4-BE49-F238E27FC236}">
+                <a16:creationId xmlns:a16="http://schemas.microsoft.com/office/drawing/2014/main" id="{BA908DDB-E503-6B4F-A20C-26E06F933931}"/>
+              </a:ext>
+            </a:extLst>
+          </p:cNvPr>
+          <p:cNvSpPr txBox="1"/>
+          <p:nvPr/>
+        </p:nvSpPr>
+        <p:spPr>
+          <a:xfrm>
             <a:off x="-1" y="0"/>
             <a:ext cx="7120647" cy="584775"/>
           </a:xfrm>
@@ -5408,7 +5747,7 @@
 </p:sld>
 </file>
 
-<file path=ppt/slides/slide6.xml><?xml version="1.0" encoding="utf-8"?>
+<file path=ppt/slides/slide7.xml><?xml version="1.0" encoding="utf-8"?>
 <p:sld xmlns:a="http://schemas.openxmlformats.org/drawingml/2006/main" xmlns:r="http://schemas.openxmlformats.org/officeDocument/2006/relationships" xmlns:p="http://schemas.openxmlformats.org/presentationml/2006/main">
   <p:cSld>
     <p:spTree>
@@ -5756,7 +6095,7 @@
 </p:sld>
 </file>
 
-<file path=ppt/slides/slide7.xml><?xml version="1.0" encoding="utf-8"?>
+<file path=ppt/slides/slide8.xml><?xml version="1.0" encoding="utf-8"?>
 <p:sld xmlns:a="http://schemas.openxmlformats.org/drawingml/2006/main" xmlns:r="http://schemas.openxmlformats.org/officeDocument/2006/relationships" xmlns:p="http://schemas.openxmlformats.org/presentationml/2006/main">
   <p:cSld>
     <p:spTree>

--- a/fuzzing.pptx
+++ b/fuzzing.pptx
@@ -8,11 +8,12 @@
     <p:sldId id="256" r:id="rId2"/>
     <p:sldId id="257" r:id="rId3"/>
     <p:sldId id="263" r:id="rId4"/>
-    <p:sldId id="262" r:id="rId5"/>
-    <p:sldId id="259" r:id="rId6"/>
-    <p:sldId id="258" r:id="rId7"/>
-    <p:sldId id="261" r:id="rId8"/>
-    <p:sldId id="260" r:id="rId9"/>
+    <p:sldId id="264" r:id="rId5"/>
+    <p:sldId id="262" r:id="rId6"/>
+    <p:sldId id="259" r:id="rId7"/>
+    <p:sldId id="258" r:id="rId8"/>
+    <p:sldId id="261" r:id="rId9"/>
+    <p:sldId id="260" r:id="rId10"/>
   </p:sldIdLst>
   <p:sldSz cx="12192000" cy="6858000"/>
   <p:notesSz cx="6858000" cy="9144000"/>
@@ -4549,7 +4550,7 @@
         <p:spPr>
           <a:xfrm>
             <a:off x="0" y="103236"/>
-            <a:ext cx="12192000" cy="6278642"/>
+            <a:ext cx="12192000" cy="6370975"/>
           </a:xfrm>
           <a:prstGeom prst="rect">
             <a:avLst/>
@@ -4563,11 +4564,11 @@
           <a:lstStyle/>
           <a:p>
             <a:r>
-              <a:rPr lang="en-US" dirty="0"/>
+              <a:rPr lang="en-US" sz="1600" dirty="0"/>
               <a:t>This page walks you through setting up coverage guided fuzzing using </a:t>
             </a:r>
             <a:r>
-              <a:rPr lang="en-US" b="1" dirty="0" err="1">
+              <a:rPr lang="en-US" sz="1600" b="1" dirty="0" err="1">
                 <a:solidFill>
                   <a:srgbClr val="FF0000"/>
                 </a:solidFill>
@@ -4575,11 +4576,11 @@
               <a:t>libFuzzer</a:t>
             </a:r>
             <a:r>
-              <a:rPr lang="en-US" dirty="0"/>
+              <a:rPr lang="en-US" sz="1600" dirty="0"/>
               <a:t> or </a:t>
             </a:r>
             <a:r>
-              <a:rPr lang="en-US" b="1" dirty="0">
+              <a:rPr lang="en-US" sz="1600" b="1" dirty="0">
                 <a:solidFill>
                   <a:srgbClr val="FF0000"/>
                 </a:solidFill>
@@ -4587,25 +4588,39 @@
               <a:t>AFL</a:t>
             </a:r>
             <a:r>
-              <a:rPr lang="en-US" dirty="0"/>
+              <a:rPr lang="en-US" sz="1600" dirty="0"/>
               <a:t>:</a:t>
             </a:r>
           </a:p>
           <a:p>
             <a:r>
-              <a:rPr lang="en-US" dirty="0"/>
+              <a:rPr lang="en-US" sz="1600" dirty="0"/>
               <a:t> - </a:t>
             </a:r>
             <a:r>
-              <a:rPr lang="en-US" dirty="0">
+              <a:rPr lang="en-US" sz="1600" dirty="0">
                 <a:hlinkClick r:id="rId2"/>
               </a:rPr>
               <a:t>https://google.github.io/clusterfuzz/setting-up-fuzzing/libfuzzer-and-afl/</a:t>
             </a:r>
-            <a:endParaRPr lang="en-US" dirty="0"/>
-          </a:p>
-          <a:p>
-            <a:endParaRPr lang="en-US" dirty="0"/>
+            <a:endParaRPr lang="en-US" sz="1600" dirty="0"/>
+          </a:p>
+          <a:p>
+            <a:r>
+              <a:rPr lang="en-US" sz="1600" dirty="0"/>
+              <a:t>The idea is to insert hooks into execution. Easiest method to achieve this is to compile source code using provided compiler to insert hooks. But it is also possible to decompile an executable file, or to target the LLVM </a:t>
+            </a:r>
+            <a:r>
+              <a:rPr lang="en-US" sz="1600" dirty="0" err="1"/>
+              <a:t>bitcode</a:t>
+            </a:r>
+            <a:r>
+              <a:rPr lang="en-US" sz="1600" dirty="0"/>
+              <a:t>.</a:t>
+            </a:r>
+          </a:p>
+          <a:p>
+            <a:endParaRPr lang="en-US" sz="1600" dirty="0"/>
           </a:p>
           <a:p>
             <a:r>
@@ -4613,206 +4628,219 @@
               <a:t>AFL = American Fuzzy Lop </a:t>
             </a:r>
             <a:r>
-              <a:rPr lang="en-US" dirty="0"/>
+              <a:rPr lang="en-US" sz="1600" dirty="0"/>
               <a:t>(lop := something that is lopped (cut-off), such as branches and twigs lopped off trees)</a:t>
             </a:r>
           </a:p>
           <a:p>
             <a:r>
-              <a:rPr lang="en-US" dirty="0"/>
+              <a:rPr lang="en-US" sz="1600" dirty="0"/>
               <a:t>Read excellent intro here:    - </a:t>
             </a:r>
             <a:r>
-              <a:rPr lang="en-US" dirty="0">
+              <a:rPr lang="en-US" sz="1600" dirty="0">
                 <a:hlinkClick r:id="rId3"/>
               </a:rPr>
               <a:t>https://github.com/google/AFL</a:t>
             </a:r>
             <a:r>
-              <a:rPr lang="en-US" dirty="0"/>
+              <a:rPr lang="en-US" sz="1600" dirty="0"/>
               <a:t> </a:t>
             </a:r>
           </a:p>
           <a:p>
             <a:r>
-              <a:rPr lang="en-US" dirty="0"/>
+              <a:rPr lang="en-US" sz="1600" dirty="0"/>
               <a:t>Also </a:t>
             </a:r>
             <a:r>
-              <a:rPr lang="en-US" dirty="0" err="1"/>
+              <a:rPr lang="en-US" sz="1600" dirty="0" err="1"/>
               <a:t>QuickStartGuide</a:t>
             </a:r>
             <a:r>
-              <a:rPr lang="en-US" dirty="0"/>
+              <a:rPr lang="en-US" sz="1600" dirty="0"/>
               <a:t> here:  - </a:t>
             </a:r>
             <a:r>
-              <a:rPr lang="en-US" dirty="0">
+              <a:rPr lang="en-US" sz="1600" dirty="0">
                 <a:hlinkClick r:id="rId4"/>
               </a:rPr>
               <a:t>https://github.com/google/AFL/blob/master/docs/QuickStartGuide.txt</a:t>
             </a:r>
-            <a:endParaRPr lang="en-US" dirty="0"/>
-          </a:p>
-          <a:p>
-            <a:r>
-              <a:rPr lang="en-US" dirty="0"/>
+            <a:endParaRPr lang="en-US" sz="1600" dirty="0"/>
+          </a:p>
+          <a:p>
+            <a:r>
+              <a:rPr lang="en-US" sz="1600" dirty="0"/>
               <a:t>AFL is a security-oriented </a:t>
             </a:r>
             <a:r>
-              <a:rPr lang="en-US" dirty="0" err="1"/>
+              <a:rPr lang="en-US" sz="1600" dirty="0" err="1"/>
               <a:t>fuzzer</a:t>
             </a:r>
             <a:r>
-              <a:rPr lang="en-US" dirty="0"/>
+              <a:rPr lang="en-US" sz="1600" dirty="0"/>
               <a:t> originally developed at ~2013 by Michal </a:t>
             </a:r>
             <a:r>
-              <a:rPr lang="en-US" dirty="0" err="1"/>
+              <a:rPr lang="en-US" sz="1600" dirty="0" err="1"/>
               <a:t>Zalewski</a:t>
             </a:r>
             <a:r>
-              <a:rPr lang="en-US" dirty="0"/>
+              <a:rPr lang="en-US" sz="1600" dirty="0"/>
               <a:t> at Google:  </a:t>
             </a:r>
             <a:r>
-              <a:rPr lang="en-US" dirty="0">
+              <a:rPr lang="en-US" sz="1600" dirty="0">
                 <a:hlinkClick r:id="rId5"/>
               </a:rPr>
               <a:t>lcamtuf@google.com</a:t>
             </a:r>
             <a:r>
-              <a:rPr lang="en-US" dirty="0"/>
+              <a:rPr lang="en-US" sz="1600" dirty="0"/>
               <a:t>.</a:t>
             </a:r>
           </a:p>
           <a:p>
             <a:r>
-              <a:rPr lang="en-US" dirty="0"/>
+              <a:rPr lang="en-US" sz="1600" dirty="0"/>
               <a:t>Usage: compile source code of your system using AFL c-compiler (</a:t>
             </a:r>
             <a:r>
-              <a:rPr lang="en-US" dirty="0" err="1"/>
+              <a:rPr lang="en-US" sz="1600" dirty="0" err="1"/>
               <a:t>gcc</a:t>
             </a:r>
             <a:r>
-              <a:rPr lang="en-US" dirty="0"/>
+              <a:rPr lang="en-US" sz="1600" dirty="0"/>
               <a:t> of clang). This inserts hooks into the code, thus allowing  to detect place in the code where things happen, and to do adjustments using feedback.</a:t>
             </a:r>
           </a:p>
           <a:p>
-            <a:endParaRPr lang="en-US" dirty="0"/>
-          </a:p>
-          <a:p>
-            <a:r>
-              <a:rPr lang="en-US" sz="3200" b="1" dirty="0" err="1"/>
+            <a:endParaRPr lang="en-US" sz="1600" dirty="0"/>
+          </a:p>
+          <a:p>
+            <a:r>
+              <a:rPr lang="en-US" sz="2800" b="1" dirty="0" err="1"/>
               <a:t>libFuzzer</a:t>
             </a:r>
-            <a:endParaRPr lang="en-US" sz="3200" b="1" dirty="0"/>
-          </a:p>
-          <a:p>
-            <a:r>
-              <a:rPr lang="en-US" dirty="0"/>
+            <a:endParaRPr lang="en-US" sz="2800" b="1" dirty="0"/>
+          </a:p>
+          <a:p>
+            <a:r>
+              <a:rPr lang="en-US" sz="1600" dirty="0"/>
               <a:t> - </a:t>
             </a:r>
             <a:r>
-              <a:rPr lang="en-US" dirty="0">
+              <a:rPr lang="en-US" sz="1600" dirty="0">
                 <a:hlinkClick r:id="rId6"/>
               </a:rPr>
               <a:t>https://llvm.org/docs/LibFuzzer.html</a:t>
             </a:r>
-            <a:endParaRPr lang="en-US" dirty="0"/>
-          </a:p>
-          <a:p>
-            <a:r>
-              <a:rPr lang="en-US" dirty="0" err="1"/>
+            <a:endParaRPr lang="en-US" sz="1600" dirty="0"/>
+          </a:p>
+          <a:p>
+            <a:r>
+              <a:rPr lang="en-US" sz="1600" dirty="0"/>
+              <a:t> - </a:t>
+            </a:r>
+            <a:r>
+              <a:rPr lang="en-US" sz="1600" dirty="0">
+                <a:hlinkClick r:id="rId7"/>
+              </a:rPr>
+              <a:t>https://github.com/google/fuzzing/blob/master/tutorial/libFuzzerTutorial.md</a:t>
+            </a:r>
+            <a:endParaRPr lang="en-US" sz="1600" dirty="0"/>
+          </a:p>
+          <a:p>
+            <a:r>
+              <a:rPr lang="en-US" sz="1600" dirty="0" err="1"/>
               <a:t>libFuzzer</a:t>
             </a:r>
             <a:r>
-              <a:rPr lang="en-US" dirty="0"/>
+              <a:rPr lang="en-US" sz="1600" dirty="0"/>
               <a:t> is part of the LLVM compiler infrastructure project and comes built-in with the clang compiler. </a:t>
             </a:r>
           </a:p>
           <a:p>
             <a:r>
-              <a:rPr lang="en-US" dirty="0"/>
+              <a:rPr lang="en-US" sz="1600" dirty="0"/>
               <a:t>So you compile your source code with it, for example:  </a:t>
             </a:r>
           </a:p>
           <a:p>
-            <a:endParaRPr lang="en-US" dirty="0"/>
-          </a:p>
-          <a:p>
-            <a:r>
-              <a:rPr lang="en-US" dirty="0"/>
+            <a:endParaRPr lang="en-US" sz="1600" dirty="0"/>
+          </a:p>
+          <a:p>
+            <a:r>
+              <a:rPr lang="en-US" sz="1600" dirty="0"/>
               <a:t>     clang -g -O1 -</a:t>
             </a:r>
             <a:r>
-              <a:rPr lang="en-US" dirty="0" err="1"/>
+              <a:rPr lang="en-US" sz="1600" dirty="0" err="1"/>
               <a:t>fsanitize</a:t>
             </a:r>
             <a:r>
-              <a:rPr lang="en-US" dirty="0"/>
+              <a:rPr lang="en-US" sz="1600" dirty="0"/>
               <a:t>=</a:t>
             </a:r>
             <a:r>
-              <a:rPr lang="en-US" dirty="0" err="1"/>
+              <a:rPr lang="en-US" sz="1600" dirty="0" err="1"/>
               <a:t>fuzzer</a:t>
             </a:r>
             <a:r>
-              <a:rPr lang="en-US" dirty="0"/>
+              <a:rPr lang="en-US" sz="1600" dirty="0"/>
               <a:t> </a:t>
             </a:r>
             <a:r>
-              <a:rPr lang="en-US" dirty="0" err="1"/>
+              <a:rPr lang="en-US" sz="1600" dirty="0" err="1"/>
               <a:t>mytarget.c</a:t>
             </a:r>
-            <a:endParaRPr lang="en-US" dirty="0"/>
-          </a:p>
-          <a:p>
-            <a:endParaRPr lang="en-US" dirty="0"/>
-          </a:p>
-          <a:p>
-            <a:r>
-              <a:rPr lang="en-US" dirty="0" err="1"/>
+            <a:endParaRPr lang="en-US" sz="1600" dirty="0"/>
+          </a:p>
+          <a:p>
+            <a:endParaRPr lang="en-US" sz="1600" dirty="0"/>
+          </a:p>
+          <a:p>
+            <a:r>
+              <a:rPr lang="en-US" sz="1600" dirty="0" err="1"/>
               <a:t>libFuzzer</a:t>
             </a:r>
             <a:r>
-              <a:rPr lang="en-US" dirty="0"/>
+              <a:rPr lang="en-US" sz="1600" dirty="0"/>
               <a:t> requires a bit more work to setup (comparing with AFL), </a:t>
             </a:r>
           </a:p>
           <a:p>
             <a:r>
-              <a:rPr lang="en-US" dirty="0"/>
+              <a:rPr lang="en-US" sz="1600" dirty="0"/>
               <a:t>but it is ideal when it comes to fuzzing specific API calls in a library </a:t>
             </a:r>
           </a:p>
           <a:p>
             <a:r>
-              <a:rPr lang="en-US" dirty="0"/>
+              <a:rPr lang="en-US" sz="1600" dirty="0"/>
               <a:t>as well as it has better support for different </a:t>
             </a:r>
             <a:r>
-              <a:rPr lang="en-US" dirty="0" err="1"/>
+              <a:rPr lang="en-US" sz="1600" dirty="0" err="1"/>
               <a:t>sanitisers</a:t>
             </a:r>
             <a:r>
-              <a:rPr lang="en-US" dirty="0"/>
+              <a:rPr lang="en-US" sz="1600" dirty="0"/>
               <a:t>. </a:t>
             </a:r>
           </a:p>
           <a:p>
             <a:r>
-              <a:rPr lang="en-US" dirty="0"/>
+              <a:rPr lang="en-US" sz="1600" dirty="0"/>
               <a:t>Also It is possible to use AFL engine while using a target function like in </a:t>
             </a:r>
             <a:r>
-              <a:rPr lang="en-US" dirty="0" err="1"/>
+              <a:rPr lang="en-US" sz="1600" dirty="0" err="1"/>
               <a:t>libFuzzer</a:t>
             </a:r>
             <a:r>
-              <a:rPr lang="en-US" dirty="0"/>
+              <a:rPr lang="en-US" sz="1600" dirty="0"/>
               <a:t>.</a:t>
             </a:r>
           </a:p>
@@ -4853,7 +4881,7 @@
           <p:cNvPr id="4" name="TextBox 3">
             <a:extLst>
               <a:ext uri="{FF2B5EF4-FFF2-40B4-BE49-F238E27FC236}">
-                <a16:creationId xmlns:a16="http://schemas.microsoft.com/office/drawing/2014/main" id="{C2A4CC70-5A08-8445-A9C6-DED41086EAE6}"/>
+                <a16:creationId xmlns:a16="http://schemas.microsoft.com/office/drawing/2014/main" id="{BE3EE57E-0B10-3541-B0D2-441230E34AB2}"/>
               </a:ext>
             </a:extLst>
           </p:cNvPr>
@@ -4862,8 +4890,8 @@
         </p:nvSpPr>
         <p:spPr>
           <a:xfrm>
-            <a:off x="-1" y="0"/>
-            <a:ext cx="7120647" cy="584775"/>
+            <a:off x="280219" y="176981"/>
+            <a:ext cx="7492181" cy="2031325"/>
           </a:xfrm>
           <a:prstGeom prst="rect">
             <a:avLst/>
@@ -4877,49 +4905,16 @@
           <a:lstStyle/>
           <a:p>
             <a:r>
-              <a:rPr lang="en-US" sz="3200" b="1" dirty="0"/>
-              <a:t>Evolutionary Fuzzing:</a:t>
-            </a:r>
-          </a:p>
-        </p:txBody>
-      </p:sp>
-      <p:sp>
-        <p:nvSpPr>
-          <p:cNvPr id="5" name="TextBox 4">
-            <a:extLst>
-              <a:ext uri="{FF2B5EF4-FFF2-40B4-BE49-F238E27FC236}">
-                <a16:creationId xmlns:a16="http://schemas.microsoft.com/office/drawing/2014/main" id="{BFDF6F9A-AC0B-CD48-8201-02D7B8BE409D}"/>
-              </a:ext>
-            </a:extLst>
-          </p:cNvPr>
-          <p:cNvSpPr txBox="1"/>
-          <p:nvPr/>
-        </p:nvSpPr>
-        <p:spPr>
-          <a:xfrm>
-            <a:off x="117988" y="584775"/>
-            <a:ext cx="11931444" cy="5632311"/>
-          </a:xfrm>
-          <a:prstGeom prst="rect">
-            <a:avLst/>
-          </a:prstGeom>
-          <a:noFill/>
-        </p:spPr>
-        <p:txBody>
-          <a:bodyPr wrap="square" rtlCol="0">
-            <a:spAutoFit/>
-          </a:bodyPr>
-          <a:lstStyle/>
-          <a:p>
-            <a:r>
-              <a:rPr lang="en-US" dirty="0"/>
-              <a:t>Evolutionary fuzzing - converging towards the discovery of weaknesses. </a:t>
-            </a:r>
-          </a:p>
-          <a:p>
-            <a:r>
-              <a:rPr lang="en-US" dirty="0"/>
-              <a:t>It uses genetic algorithms in order to produce successive generations of test cases populations.</a:t>
+              <a:rPr lang="en-US" dirty="0"/>
+              <a:t>KLUZZER: </a:t>
+            </a:r>
+            <a:r>
+              <a:rPr lang="en-US" dirty="0" err="1"/>
+              <a:t>Whitebox</a:t>
+            </a:r>
+            <a:r>
+              <a:rPr lang="en-US" dirty="0"/>
+              <a:t> Fuzzing on Top of LLVM </a:t>
             </a:r>
           </a:p>
           <a:p>
@@ -4928,196 +4923,56 @@
           <a:p>
             <a:r>
               <a:rPr lang="en-US" dirty="0"/>
-              <a:t>Evolutionary fuzzing - use feedback from each test case to learn the format of the input over time. </a:t>
-            </a:r>
-            <a:br>
-              <a:rPr lang="en-US" dirty="0"/>
-            </a:br>
-            <a:r>
-              <a:rPr lang="en-US" dirty="0"/>
-              <a:t>For example, by measuring the code coverage of each test case, the </a:t>
+              <a:t>Targeting LLVM </a:t>
             </a:r>
             <a:r>
               <a:rPr lang="en-US" dirty="0" err="1"/>
-              <a:t>fuzzer</a:t>
-            </a:r>
-            <a:r>
-              <a:rPr lang="en-US" dirty="0"/>
-              <a:t> can work out which properties of the test case exercise a given area of code, and gradually evolve a set of test cases that cover the majority of the program code. </a:t>
-            </a:r>
-          </a:p>
-          <a:p>
-            <a:endParaRPr lang="en-US" dirty="0"/>
-          </a:p>
-          <a:p>
-            <a:r>
-              <a:rPr lang="en-US" dirty="0"/>
-              <a:t>Evolutionary fuzzing often relies on other techniques similar to genetic algorithms and may require some form of binary instrumentation to operate correctly.</a:t>
-            </a:r>
-          </a:p>
-          <a:p>
-            <a:endParaRPr lang="en-US" dirty="0"/>
-          </a:p>
-          <a:p>
+              <a:t>bitcode</a:t>
+            </a:r>
+            <a:r>
+              <a:rPr lang="en-US" dirty="0"/>
+              <a:t> , easy to combine with </a:t>
+            </a:r>
             <a:r>
               <a:rPr lang="en-US" dirty="0" err="1"/>
               <a:t>libFuzzer</a:t>
             </a:r>
-            <a:r>
-              <a:rPr lang="en-US" dirty="0"/>
-              <a:t> – a library for coverage-guided fuzz testing. </a:t>
-            </a:r>
-            <a:r>
-              <a:rPr lang="en-US" dirty="0" err="1"/>
-              <a:t>LibFuzzer</a:t>
-            </a:r>
-            <a:r>
-              <a:rPr lang="en-US" dirty="0"/>
-              <a:t> is in-process, coverage-guided, evolutionary fuzzing engine. </a:t>
-            </a:r>
-            <a:r>
-              <a:rPr lang="en-US" dirty="0" err="1"/>
-              <a:t>LibFuzzer</a:t>
-            </a:r>
-            <a:r>
-              <a:rPr lang="en-US" dirty="0"/>
-              <a:t> is linked with the library under test, and feeds fuzzed inputs to the library via a specific fuzzing </a:t>
-            </a:r>
-            <a:r>
-              <a:rPr lang="en-US" dirty="0" err="1"/>
-              <a:t>entrypoint</a:t>
-            </a:r>
-            <a:r>
-              <a:rPr lang="en-US" dirty="0"/>
-              <a:t> (aka “target function”); the </a:t>
-            </a:r>
-            <a:r>
-              <a:rPr lang="en-US" dirty="0" err="1"/>
-              <a:t>fuzzer</a:t>
-            </a:r>
-            <a:r>
-              <a:rPr lang="en-US" dirty="0"/>
-              <a:t> then tracks which areas of the code are reached, and generates mutations on the corpus of input data in order to maximize the code coverage. The code coverage information for </a:t>
-            </a:r>
-            <a:r>
-              <a:rPr lang="en-US" dirty="0" err="1"/>
-              <a:t>libFuzzer</a:t>
-            </a:r>
-            <a:r>
-              <a:rPr lang="en-US" dirty="0"/>
-              <a:t> is provided by LLVM’s </a:t>
-            </a:r>
-            <a:r>
-              <a:rPr lang="en-US" dirty="0" err="1"/>
-              <a:t>SanitizerCoverage</a:t>
-            </a:r>
-            <a:r>
-              <a:rPr lang="en-US" dirty="0"/>
-              <a:t> instrumentation.</a:t>
-            </a:r>
-          </a:p>
-          <a:p>
-            <a:r>
-              <a:rPr lang="en-US" dirty="0"/>
-              <a:t> - </a:t>
+            <a:br>
+              <a:rPr lang="en-US" dirty="0"/>
+            </a:br>
+            <a:r>
+              <a:rPr lang="en-US" dirty="0"/>
+              <a:t>- </a:t>
             </a:r>
             <a:r>
               <a:rPr lang="en-US" dirty="0">
                 <a:hlinkClick r:id="rId2"/>
               </a:rPr>
-              <a:t>https://llvm.org/docs/LibFuzzer.html</a:t>
-            </a:r>
+              <a:t>https://link.springer.com/chapter/10.1007/978-3-030-31784-3_14</a:t>
+            </a:r>
+            <a:r>
+              <a:rPr lang="en-US" dirty="0"/>
+              <a:t> </a:t>
+            </a:r>
+          </a:p>
+          <a:p>
             <a:endParaRPr lang="en-US" dirty="0"/>
           </a:p>
           <a:p>
+            <a:r>
+              <a:rPr lang="en-US" dirty="0"/>
+              <a:t>We need to buy this PDF (~$80)</a:t>
+            </a:r>
+          </a:p>
+          <a:p>
             <a:endParaRPr lang="en-US" dirty="0"/>
-          </a:p>
-          <a:p>
-            <a:r>
-              <a:rPr lang="en-US" dirty="0"/>
-              <a:t>V-Fuzz: Vulnerability-Oriented Evolutionary Fuzzing</a:t>
-            </a:r>
-          </a:p>
-          <a:p>
-            <a:r>
-              <a:rPr lang="en-US" dirty="0" err="1"/>
-              <a:t>Yuwei</a:t>
-            </a:r>
-            <a:r>
-              <a:rPr lang="en-US" dirty="0"/>
-              <a:t> Li, </a:t>
-            </a:r>
-            <a:r>
-              <a:rPr lang="en-US" dirty="0" err="1"/>
-              <a:t>Shouling</a:t>
-            </a:r>
-            <a:r>
-              <a:rPr lang="en-US" dirty="0"/>
-              <a:t> Ji, </a:t>
-            </a:r>
-            <a:r>
-              <a:rPr lang="en-US" dirty="0" err="1"/>
-              <a:t>Chenyang</a:t>
-            </a:r>
-            <a:r>
-              <a:rPr lang="en-US" dirty="0"/>
-              <a:t> </a:t>
-            </a:r>
-            <a:r>
-              <a:rPr lang="en-US" dirty="0" err="1"/>
-              <a:t>Lv</a:t>
-            </a:r>
-            <a:r>
-              <a:rPr lang="en-US" dirty="0"/>
-              <a:t>, Yuan Chen, </a:t>
-            </a:r>
-            <a:r>
-              <a:rPr lang="en-US" dirty="0" err="1"/>
-              <a:t>Jianhai</a:t>
-            </a:r>
-            <a:r>
-              <a:rPr lang="en-US" dirty="0"/>
-              <a:t> Chen, </a:t>
-            </a:r>
-            <a:r>
-              <a:rPr lang="en-US" dirty="0" err="1"/>
-              <a:t>Qinchen</a:t>
-            </a:r>
-            <a:r>
-              <a:rPr lang="en-US" dirty="0"/>
-              <a:t> Gu, and </a:t>
-            </a:r>
-            <a:r>
-              <a:rPr lang="en-US" dirty="0" err="1"/>
-              <a:t>Chunming</a:t>
-            </a:r>
-            <a:r>
-              <a:rPr lang="en-US" dirty="0"/>
-              <a:t> Wu</a:t>
-            </a:r>
-          </a:p>
-          <a:p>
-            <a:r>
-              <a:rPr lang="en-US" dirty="0"/>
-              <a:t> - </a:t>
-            </a:r>
-            <a:r>
-              <a:rPr lang="en-US" dirty="0">
-                <a:hlinkClick r:id="rId3"/>
-              </a:rPr>
-              <a:t>https://arxiv.org/pdf/1901.01142.pdf</a:t>
-            </a:r>
-            <a:r>
-              <a:rPr lang="en-US" dirty="0"/>
-              <a:t> </a:t>
-            </a:r>
           </a:p>
         </p:txBody>
       </p:sp>
     </p:spTree>
     <p:extLst>
       <p:ext uri="{BB962C8B-B14F-4D97-AF65-F5344CB8AC3E}">
-        <p14:creationId xmlns:p14="http://schemas.microsoft.com/office/powerpoint/2010/main" val="4134792343"/>
+        <p14:creationId xmlns:p14="http://schemas.microsoft.com/office/powerpoint/2010/main" val="731221353"/>
       </p:ext>
     </p:extLst>
   </p:cSld>
@@ -5149,7 +5004,7 @@
           <p:cNvPr id="4" name="TextBox 3">
             <a:extLst>
               <a:ext uri="{FF2B5EF4-FFF2-40B4-BE49-F238E27FC236}">
-                <a16:creationId xmlns:a16="http://schemas.microsoft.com/office/drawing/2014/main" id="{BA908DDB-E503-6B4F-A20C-26E06F933931}"/>
+                <a16:creationId xmlns:a16="http://schemas.microsoft.com/office/drawing/2014/main" id="{C2A4CC70-5A08-8445-A9C6-DED41086EAE6}"/>
               </a:ext>
             </a:extLst>
           </p:cNvPr>
@@ -5158,8 +5013,8 @@
         </p:nvSpPr>
         <p:spPr>
           <a:xfrm>
-            <a:off x="0" y="0"/>
-            <a:ext cx="6420256" cy="2062103"/>
+            <a:off x="-1" y="0"/>
+            <a:ext cx="7120647" cy="584775"/>
           </a:xfrm>
           <a:prstGeom prst="rect">
             <a:avLst/>
@@ -5174,64 +5029,7 @@
           <a:p>
             <a:r>
               <a:rPr lang="en-US" sz="3200" b="1" dirty="0"/>
-              <a:t>Google Brain </a:t>
-            </a:r>
-            <a:r>
-              <a:rPr lang="en-US" sz="3200" b="1" dirty="0" err="1">
-                <a:solidFill>
-                  <a:srgbClr val="0070C0"/>
-                </a:solidFill>
-              </a:rPr>
-              <a:t>TensorFuzz</a:t>
-            </a:r>
-            <a:r>
-              <a:rPr lang="en-US" sz="3200" b="1" dirty="0"/>
-              <a:t> </a:t>
-            </a:r>
-            <a:br>
-              <a:rPr lang="en-US" sz="3200" b="1" dirty="0"/>
-            </a:br>
-            <a:r>
-              <a:rPr lang="en-US" sz="3200" b="1" dirty="0"/>
-              <a:t>Debugs Neural Networks </a:t>
-            </a:r>
-            <a:br>
-              <a:rPr lang="en-US" sz="3200" b="1" dirty="0"/>
-            </a:br>
-            <a:r>
-              <a:rPr lang="en-US" sz="3200" b="1" dirty="0"/>
-              <a:t>with </a:t>
-            </a:r>
-            <a:r>
-              <a:rPr lang="en-US" sz="3200" b="1" dirty="0">
-                <a:solidFill>
-                  <a:srgbClr val="0070C0"/>
-                </a:solidFill>
-              </a:rPr>
-              <a:t>Coverage-Guided Fuzzing (CGF) </a:t>
-            </a:r>
-            <a:br>
-              <a:rPr lang="en-US" sz="3200" b="1" dirty="0"/>
-            </a:br>
-            <a:r>
-              <a:rPr lang="en-US" sz="3200" b="1" dirty="0"/>
-              <a:t>(</a:t>
-            </a:r>
-            <a:r>
-              <a:rPr lang="en-US" sz="3200" b="1" dirty="0" err="1"/>
-              <a:t>Odena</a:t>
-            </a:r>
-            <a:r>
-              <a:rPr lang="en-US" sz="3200" b="1" dirty="0"/>
-              <a:t> &amp; </a:t>
-            </a:r>
-            <a:r>
-              <a:rPr lang="en-US" sz="3200" b="1" dirty="0" err="1"/>
-              <a:t>Goodfellow</a:t>
-            </a:r>
-            <a:r>
-              <a:rPr lang="en-US" sz="3200" b="1" dirty="0"/>
-              <a:t>, 2018)</a:t>
+              <a:t>Evolutionary Fuzzing:</a:t>
             </a:r>
           </a:p>
         </p:txBody>
@@ -5241,7 +5039,7 @@
           <p:cNvPr id="5" name="TextBox 4">
             <a:extLst>
               <a:ext uri="{FF2B5EF4-FFF2-40B4-BE49-F238E27FC236}">
-                <a16:creationId xmlns:a16="http://schemas.microsoft.com/office/drawing/2014/main" id="{03324731-D77F-494B-BCAC-A389F110E23D}"/>
+                <a16:creationId xmlns:a16="http://schemas.microsoft.com/office/drawing/2014/main" id="{BFDF6F9A-AC0B-CD48-8201-02D7B8BE409D}"/>
               </a:ext>
             </a:extLst>
           </p:cNvPr>
@@ -5250,8 +5048,8 @@
         </p:nvSpPr>
         <p:spPr>
           <a:xfrm>
-            <a:off x="29182" y="2169573"/>
-            <a:ext cx="7383296" cy="646331"/>
+            <a:off x="117988" y="584775"/>
+            <a:ext cx="11931444" cy="5632311"/>
           </a:xfrm>
           <a:prstGeom prst="rect">
             <a:avLst/>
@@ -5265,259 +5063,212 @@
           <a:lstStyle/>
           <a:p>
             <a:r>
+              <a:rPr lang="en-US" dirty="0"/>
+              <a:t>Evolutionary fuzzing - converging towards the discovery of weaknesses. </a:t>
+            </a:r>
+          </a:p>
+          <a:p>
+            <a:r>
+              <a:rPr lang="en-US" dirty="0"/>
+              <a:t>It uses genetic algorithms in order to produce successive generations of test cases populations.</a:t>
+            </a:r>
+          </a:p>
+          <a:p>
+            <a:endParaRPr lang="en-US" dirty="0"/>
+          </a:p>
+          <a:p>
+            <a:r>
+              <a:rPr lang="en-US" dirty="0"/>
+              <a:t>Evolutionary fuzzing - use feedback from each test case to learn the format of the input over time. </a:t>
+            </a:r>
+            <a:br>
+              <a:rPr lang="en-US" dirty="0"/>
+            </a:br>
+            <a:r>
+              <a:rPr lang="en-US" dirty="0"/>
+              <a:t>For example, by measuring the code coverage of each test case, the </a:t>
+            </a:r>
+            <a:r>
+              <a:rPr lang="en-US" dirty="0" err="1"/>
+              <a:t>fuzzer</a:t>
+            </a:r>
+            <a:r>
+              <a:rPr lang="en-US" dirty="0"/>
+              <a:t> can work out which properties of the test case exercise a given area of code, and gradually evolve a set of test cases that cover the majority of the program code. </a:t>
+            </a:r>
+          </a:p>
+          <a:p>
+            <a:endParaRPr lang="en-US" dirty="0"/>
+          </a:p>
+          <a:p>
+            <a:r>
+              <a:rPr lang="en-US" dirty="0"/>
+              <a:t>Evolutionary fuzzing often relies on other techniques similar to genetic algorithms and may require some form of binary instrumentation to operate correctly.</a:t>
+            </a:r>
+          </a:p>
+          <a:p>
+            <a:endParaRPr lang="en-US" dirty="0"/>
+          </a:p>
+          <a:p>
+            <a:r>
+              <a:rPr lang="en-US" dirty="0" err="1"/>
+              <a:t>libFuzzer</a:t>
+            </a:r>
+            <a:r>
+              <a:rPr lang="en-US" dirty="0"/>
+              <a:t> – a library for coverage-guided fuzz testing. </a:t>
+            </a:r>
+            <a:r>
+              <a:rPr lang="en-US" dirty="0" err="1"/>
+              <a:t>LibFuzzer</a:t>
+            </a:r>
+            <a:r>
+              <a:rPr lang="en-US" dirty="0"/>
+              <a:t> is in-process, coverage-guided, evolutionary fuzzing engine. </a:t>
+            </a:r>
+            <a:r>
+              <a:rPr lang="en-US" dirty="0" err="1"/>
+              <a:t>LibFuzzer</a:t>
+            </a:r>
+            <a:r>
+              <a:rPr lang="en-US" dirty="0"/>
+              <a:t> is linked with the library under test, and feeds fuzzed inputs to the library via a specific fuzzing </a:t>
+            </a:r>
+            <a:r>
+              <a:rPr lang="en-US" dirty="0" err="1"/>
+              <a:t>entrypoint</a:t>
+            </a:r>
+            <a:r>
+              <a:rPr lang="en-US" dirty="0"/>
+              <a:t> (aka “target function”); the </a:t>
+            </a:r>
+            <a:r>
+              <a:rPr lang="en-US" dirty="0" err="1"/>
+              <a:t>fuzzer</a:t>
+            </a:r>
+            <a:r>
+              <a:rPr lang="en-US" dirty="0"/>
+              <a:t> then tracks which areas of the code are reached, and generates mutations on the corpus of input data in order to maximize the code coverage. The code coverage information for </a:t>
+            </a:r>
+            <a:r>
+              <a:rPr lang="en-US" dirty="0" err="1"/>
+              <a:t>libFuzzer</a:t>
+            </a:r>
+            <a:r>
+              <a:rPr lang="en-US" dirty="0"/>
+              <a:t> is provided by LLVM’s </a:t>
+            </a:r>
+            <a:r>
+              <a:rPr lang="en-US" dirty="0" err="1"/>
+              <a:t>SanitizerCoverage</a:t>
+            </a:r>
+            <a:r>
+              <a:rPr lang="en-US" dirty="0"/>
+              <a:t> instrumentation.</a:t>
+            </a:r>
+          </a:p>
+          <a:p>
+            <a:r>
+              <a:rPr lang="en-US" dirty="0"/>
+              <a:t> - </a:t>
+            </a:r>
+            <a:r>
               <a:rPr lang="en-US" dirty="0">
                 <a:hlinkClick r:id="rId2"/>
               </a:rPr>
-              <a:t>https://medium.com/syncedreview/google-brain-tensorfuzz-debugs-neural-networks-with-coverage-guided-fuzzing-89843346fcda</a:t>
-            </a:r>
-            <a:r>
-              <a:rPr lang="en-US" dirty="0"/>
-              <a:t>  </a:t>
-            </a:r>
-          </a:p>
-        </p:txBody>
-      </p:sp>
-      <p:pic>
-        <p:nvPicPr>
-          <p:cNvPr id="2" name="Picture 1">
-            <a:extLst>
-              <a:ext uri="{FF2B5EF4-FFF2-40B4-BE49-F238E27FC236}">
-                <a16:creationId xmlns:a16="http://schemas.microsoft.com/office/drawing/2014/main" id="{56E224E0-E4AF-294D-8FE9-B92F262DFA73}"/>
-              </a:ext>
-            </a:extLst>
-          </p:cNvPr>
-          <p:cNvPicPr>
-            <a:picLocks noChangeAspect="1"/>
-          </p:cNvPicPr>
-          <p:nvPr/>
-        </p:nvPicPr>
-        <p:blipFill rotWithShape="1">
-          <a:blip r:embed="rId3" cstate="email">
-            <a:extLst>
-              <a:ext uri="{28A0092B-C50C-407E-A947-70E740481C1C}">
-                <a14:useLocalDpi xmlns:a14="http://schemas.microsoft.com/office/drawing/2010/main"/>
-              </a:ext>
-            </a:extLst>
-          </a:blip>
-          <a:srcRect/>
-          <a:stretch/>
-        </p:blipFill>
-        <p:spPr>
-          <a:xfrm>
-            <a:off x="8338794" y="2908237"/>
-            <a:ext cx="3832699" cy="3925198"/>
-          </a:xfrm>
-          <a:prstGeom prst="rect">
-            <a:avLst/>
-          </a:prstGeom>
-        </p:spPr>
-      </p:pic>
-      <p:pic>
-        <p:nvPicPr>
-          <p:cNvPr id="3" name="Picture 2">
-            <a:extLst>
-              <a:ext uri="{FF2B5EF4-FFF2-40B4-BE49-F238E27FC236}">
-                <a16:creationId xmlns:a16="http://schemas.microsoft.com/office/drawing/2014/main" id="{20391757-BA03-DD45-AD15-9B32B72A6F7A}"/>
-              </a:ext>
-            </a:extLst>
-          </p:cNvPr>
-          <p:cNvPicPr>
-            <a:picLocks noChangeAspect="1"/>
-          </p:cNvPicPr>
-          <p:nvPr/>
-        </p:nvPicPr>
-        <p:blipFill>
-          <a:blip r:embed="rId4"/>
-          <a:stretch>
-            <a:fillRect/>
-          </a:stretch>
-        </p:blipFill>
-        <p:spPr>
-          <a:xfrm>
-            <a:off x="8536286" y="260188"/>
-            <a:ext cx="3603829" cy="1801915"/>
-          </a:xfrm>
-          <a:prstGeom prst="rect">
-            <a:avLst/>
-          </a:prstGeom>
-        </p:spPr>
-      </p:pic>
-      <p:sp>
-        <p:nvSpPr>
-          <p:cNvPr id="6" name="TextBox 5">
-            <a:extLst>
-              <a:ext uri="{FF2B5EF4-FFF2-40B4-BE49-F238E27FC236}">
-                <a16:creationId xmlns:a16="http://schemas.microsoft.com/office/drawing/2014/main" id="{41F5609E-9B9B-214E-87DA-4C98A1276ED8}"/>
-              </a:ext>
-            </a:extLst>
-          </p:cNvPr>
-          <p:cNvSpPr txBox="1"/>
-          <p:nvPr/>
-        </p:nvSpPr>
-        <p:spPr>
-          <a:xfrm>
-            <a:off x="8536285" y="2094032"/>
-            <a:ext cx="3603829" cy="369332"/>
-          </a:xfrm>
-          <a:prstGeom prst="rect">
-            <a:avLst/>
-          </a:prstGeom>
-          <a:noFill/>
-        </p:spPr>
-        <p:txBody>
-          <a:bodyPr wrap="square" rtlCol="0">
-            <a:spAutoFit/>
-          </a:bodyPr>
-          <a:lstStyle/>
-          <a:p>
-            <a:r>
-              <a:rPr lang="en-US" dirty="0"/>
-              <a:t>Augustus </a:t>
-            </a:r>
+              <a:t>https://llvm.org/docs/LibFuzzer.html</a:t>
+            </a:r>
+            <a:endParaRPr lang="en-US" dirty="0"/>
+          </a:p>
+          <a:p>
+            <a:endParaRPr lang="en-US" dirty="0"/>
+          </a:p>
+          <a:p>
+            <a:r>
+              <a:rPr lang="en-US" dirty="0"/>
+              <a:t>V-Fuzz: Vulnerability-Oriented Evolutionary Fuzzing</a:t>
+            </a:r>
+          </a:p>
+          <a:p>
             <a:r>
               <a:rPr lang="en-US" dirty="0" err="1"/>
-              <a:t>Odena</a:t>
-            </a:r>
-            <a:r>
-              <a:rPr lang="en-US" dirty="0"/>
-              <a:t>   &amp;   Ian </a:t>
+              <a:t>Yuwei</a:t>
+            </a:r>
+            <a:r>
+              <a:rPr lang="en-US" dirty="0"/>
+              <a:t> Li, </a:t>
             </a:r>
             <a:r>
               <a:rPr lang="en-US" dirty="0" err="1"/>
-              <a:t>Goodfellow</a:t>
-            </a:r>
-            <a:endParaRPr lang="en-US" dirty="0"/>
-          </a:p>
-        </p:txBody>
-      </p:sp>
-      <p:sp>
-        <p:nvSpPr>
-          <p:cNvPr id="7" name="TextBox 6">
-            <a:extLst>
-              <a:ext uri="{FF2B5EF4-FFF2-40B4-BE49-F238E27FC236}">
-                <a16:creationId xmlns:a16="http://schemas.microsoft.com/office/drawing/2014/main" id="{5A42E94E-A869-F34F-85D2-7A3F6569FD46}"/>
-              </a:ext>
-            </a:extLst>
-          </p:cNvPr>
-          <p:cNvSpPr txBox="1"/>
-          <p:nvPr/>
-        </p:nvSpPr>
-        <p:spPr>
-          <a:xfrm>
-            <a:off x="29180" y="3882822"/>
-            <a:ext cx="7869679" cy="2308324"/>
-          </a:xfrm>
-          <a:prstGeom prst="rect">
-            <a:avLst/>
-          </a:prstGeom>
-          <a:noFill/>
-        </p:spPr>
-        <p:txBody>
-          <a:bodyPr wrap="square" rtlCol="0">
-            <a:spAutoFit/>
-          </a:bodyPr>
-          <a:lstStyle/>
-          <a:p>
-            <a:r>
-              <a:rPr lang="en-US" dirty="0"/>
-              <a:t>The </a:t>
-            </a:r>
-            <a:r>
-              <a:rPr lang="en-US" b="1" dirty="0" err="1">
-                <a:solidFill>
-                  <a:srgbClr val="0070C0"/>
-                </a:solidFill>
+              <a:t>Shouling</a:t>
+            </a:r>
+            <a:r>
+              <a:rPr lang="en-US" dirty="0"/>
+              <a:t> Ji, </a:t>
+            </a:r>
+            <a:r>
+              <a:rPr lang="en-US" dirty="0" err="1"/>
+              <a:t>Chenyang</a:t>
+            </a:r>
+            <a:r>
+              <a:rPr lang="en-US" dirty="0"/>
+              <a:t> </a:t>
+            </a:r>
+            <a:r>
+              <a:rPr lang="en-US" dirty="0" err="1"/>
+              <a:t>Lv</a:t>
+            </a:r>
+            <a:r>
+              <a:rPr lang="en-US" dirty="0"/>
+              <a:t>, Yuan Chen, </a:t>
+            </a:r>
+            <a:r>
+              <a:rPr lang="en-US" dirty="0" err="1"/>
+              <a:t>Jianhai</a:t>
+            </a:r>
+            <a:r>
+              <a:rPr lang="en-US" dirty="0"/>
+              <a:t> Chen, </a:t>
+            </a:r>
+            <a:r>
+              <a:rPr lang="en-US" dirty="0" err="1"/>
+              <a:t>Qinchen</a:t>
+            </a:r>
+            <a:r>
+              <a:rPr lang="en-US" dirty="0"/>
+              <a:t> Gu, and </a:t>
+            </a:r>
+            <a:r>
+              <a:rPr lang="en-US" dirty="0" err="1"/>
+              <a:t>Chunming</a:t>
+            </a:r>
+            <a:r>
+              <a:rPr lang="en-US" dirty="0"/>
+              <a:t> Wu</a:t>
+            </a:r>
+          </a:p>
+          <a:p>
+            <a:r>
+              <a:rPr lang="en-US" dirty="0"/>
+              <a:t> - </a:t>
+            </a:r>
+            <a:r>
+              <a:rPr lang="en-US" dirty="0">
+                <a:hlinkClick r:id="rId3"/>
               </a:rPr>
-              <a:t>TensorFuzz</a:t>
-            </a:r>
-            <a:r>
-              <a:rPr lang="en-US" dirty="0"/>
-              <a:t> tool </a:t>
-            </a:r>
-          </a:p>
-          <a:p>
-            <a:r>
-              <a:rPr lang="en-US" dirty="0"/>
-              <a:t>feeds inputs to an arbitrary TensorFlow graph </a:t>
-            </a:r>
-          </a:p>
-          <a:p>
-            <a:r>
-              <a:rPr lang="en-US" dirty="0"/>
-              <a:t>and measures coverage by looking at the “activations” of the computation graph.</a:t>
-            </a:r>
-          </a:p>
-          <a:p>
-            <a:endParaRPr lang="en-US" dirty="0"/>
-          </a:p>
-          <a:p>
-            <a:r>
-              <a:rPr lang="en-US" dirty="0"/>
-              <a:t>In coverage-guided fuzzing, </a:t>
-            </a:r>
-          </a:p>
-          <a:p>
-            <a:r>
-              <a:rPr lang="en-US" dirty="0"/>
-              <a:t>random mutations of inputs to a neural network </a:t>
-            </a:r>
-          </a:p>
-          <a:p>
-            <a:r>
-              <a:rPr lang="en-US" dirty="0"/>
-              <a:t>are guided by a coverage metric </a:t>
-            </a:r>
-          </a:p>
-          <a:p>
-            <a:r>
-              <a:rPr lang="en-US" dirty="0"/>
-              <a:t>toward the goal of satisfying user-specified constraints.</a:t>
-            </a:r>
-          </a:p>
-        </p:txBody>
-      </p:sp>
-      <p:sp>
-        <p:nvSpPr>
-          <p:cNvPr id="8" name="TextBox 7">
-            <a:extLst>
-              <a:ext uri="{FF2B5EF4-FFF2-40B4-BE49-F238E27FC236}">
-                <a16:creationId xmlns:a16="http://schemas.microsoft.com/office/drawing/2014/main" id="{BC75CE2D-A2C2-9A45-B27D-481CF184D1E3}"/>
-              </a:ext>
-            </a:extLst>
-          </p:cNvPr>
-          <p:cNvSpPr txBox="1"/>
-          <p:nvPr/>
-        </p:nvSpPr>
-        <p:spPr>
-          <a:xfrm>
-            <a:off x="29180" y="3070000"/>
-            <a:ext cx="5710218" cy="369332"/>
-          </a:xfrm>
-          <a:prstGeom prst="rect">
-            <a:avLst/>
-          </a:prstGeom>
-          <a:noFill/>
-        </p:spPr>
-        <p:txBody>
-          <a:bodyPr wrap="none" rtlCol="0">
-            <a:spAutoFit/>
-          </a:bodyPr>
-          <a:lstStyle/>
-          <a:p>
-            <a:r>
-              <a:rPr lang="en-US" dirty="0">
-                <a:hlinkClick r:id="rId5"/>
-              </a:rPr>
-              <a:t>http://proceedings.mlr.press/v97/odena19a/odena19a.pdf</a:t>
-            </a:r>
-            <a:endParaRPr lang="en-US" dirty="0"/>
+              <a:t>https://arxiv.org/pdf/1901.01142.pdf</a:t>
+            </a:r>
+            <a:r>
+              <a:rPr lang="en-US" dirty="0"/>
+              <a:t> </a:t>
+            </a:r>
           </a:p>
         </p:txBody>
       </p:sp>
     </p:spTree>
     <p:extLst>
       <p:ext uri="{BB962C8B-B14F-4D97-AF65-F5344CB8AC3E}">
-        <p14:creationId xmlns:p14="http://schemas.microsoft.com/office/powerpoint/2010/main" val="3803802340"/>
+        <p14:creationId xmlns:p14="http://schemas.microsoft.com/office/powerpoint/2010/main" val="4134792343"/>
       </p:ext>
     </p:extLst>
   </p:cSld>
@@ -5558,6 +5309,415 @@
         </p:nvSpPr>
         <p:spPr>
           <a:xfrm>
+            <a:off x="0" y="0"/>
+            <a:ext cx="6420256" cy="2062103"/>
+          </a:xfrm>
+          <a:prstGeom prst="rect">
+            <a:avLst/>
+          </a:prstGeom>
+          <a:noFill/>
+        </p:spPr>
+        <p:txBody>
+          <a:bodyPr wrap="square" rtlCol="0">
+            <a:spAutoFit/>
+          </a:bodyPr>
+          <a:lstStyle/>
+          <a:p>
+            <a:r>
+              <a:rPr lang="en-US" sz="3200" b="1" dirty="0"/>
+              <a:t>Google Brain </a:t>
+            </a:r>
+            <a:r>
+              <a:rPr lang="en-US" sz="3200" b="1" dirty="0" err="1">
+                <a:solidFill>
+                  <a:srgbClr val="0070C0"/>
+                </a:solidFill>
+              </a:rPr>
+              <a:t>TensorFuzz</a:t>
+            </a:r>
+            <a:r>
+              <a:rPr lang="en-US" sz="3200" b="1" dirty="0"/>
+              <a:t> </a:t>
+            </a:r>
+            <a:br>
+              <a:rPr lang="en-US" sz="3200" b="1" dirty="0"/>
+            </a:br>
+            <a:r>
+              <a:rPr lang="en-US" sz="3200" b="1" dirty="0"/>
+              <a:t>Debugs Neural Networks </a:t>
+            </a:r>
+            <a:br>
+              <a:rPr lang="en-US" sz="3200" b="1" dirty="0"/>
+            </a:br>
+            <a:r>
+              <a:rPr lang="en-US" sz="3200" b="1" dirty="0"/>
+              <a:t>with </a:t>
+            </a:r>
+            <a:r>
+              <a:rPr lang="en-US" sz="3200" b="1" dirty="0">
+                <a:solidFill>
+                  <a:srgbClr val="0070C0"/>
+                </a:solidFill>
+              </a:rPr>
+              <a:t>Coverage-Guided Fuzzing (CGF) </a:t>
+            </a:r>
+            <a:br>
+              <a:rPr lang="en-US" sz="3200" b="1" dirty="0"/>
+            </a:br>
+            <a:r>
+              <a:rPr lang="en-US" sz="3200" b="1" dirty="0"/>
+              <a:t>(</a:t>
+            </a:r>
+            <a:r>
+              <a:rPr lang="en-US" sz="3200" b="1" dirty="0" err="1"/>
+              <a:t>Odena</a:t>
+            </a:r>
+            <a:r>
+              <a:rPr lang="en-US" sz="3200" b="1" dirty="0"/>
+              <a:t> &amp; </a:t>
+            </a:r>
+            <a:r>
+              <a:rPr lang="en-US" sz="3200" b="1" dirty="0" err="1"/>
+              <a:t>Goodfellow</a:t>
+            </a:r>
+            <a:r>
+              <a:rPr lang="en-US" sz="3200" b="1" dirty="0"/>
+              <a:t>, 2018)</a:t>
+            </a:r>
+          </a:p>
+        </p:txBody>
+      </p:sp>
+      <p:sp>
+        <p:nvSpPr>
+          <p:cNvPr id="5" name="TextBox 4">
+            <a:extLst>
+              <a:ext uri="{FF2B5EF4-FFF2-40B4-BE49-F238E27FC236}">
+                <a16:creationId xmlns:a16="http://schemas.microsoft.com/office/drawing/2014/main" id="{03324731-D77F-494B-BCAC-A389F110E23D}"/>
+              </a:ext>
+            </a:extLst>
+          </p:cNvPr>
+          <p:cNvSpPr txBox="1"/>
+          <p:nvPr/>
+        </p:nvSpPr>
+        <p:spPr>
+          <a:xfrm>
+            <a:off x="29182" y="2169573"/>
+            <a:ext cx="7383296" cy="646331"/>
+          </a:xfrm>
+          <a:prstGeom prst="rect">
+            <a:avLst/>
+          </a:prstGeom>
+          <a:noFill/>
+        </p:spPr>
+        <p:txBody>
+          <a:bodyPr wrap="square" rtlCol="0">
+            <a:spAutoFit/>
+          </a:bodyPr>
+          <a:lstStyle/>
+          <a:p>
+            <a:r>
+              <a:rPr lang="en-US" dirty="0">
+                <a:hlinkClick r:id="rId2"/>
+              </a:rPr>
+              <a:t>https://medium.com/syncedreview/google-brain-tensorfuzz-debugs-neural-networks-with-coverage-guided-fuzzing-89843346fcda</a:t>
+            </a:r>
+            <a:r>
+              <a:rPr lang="en-US" dirty="0"/>
+              <a:t>  </a:t>
+            </a:r>
+          </a:p>
+        </p:txBody>
+      </p:sp>
+      <p:pic>
+        <p:nvPicPr>
+          <p:cNvPr id="2" name="Picture 1">
+            <a:extLst>
+              <a:ext uri="{FF2B5EF4-FFF2-40B4-BE49-F238E27FC236}">
+                <a16:creationId xmlns:a16="http://schemas.microsoft.com/office/drawing/2014/main" id="{56E224E0-E4AF-294D-8FE9-B92F262DFA73}"/>
+              </a:ext>
+            </a:extLst>
+          </p:cNvPr>
+          <p:cNvPicPr>
+            <a:picLocks noChangeAspect="1"/>
+          </p:cNvPicPr>
+          <p:nvPr/>
+        </p:nvPicPr>
+        <p:blipFill rotWithShape="1">
+          <a:blip r:embed="rId3" cstate="email">
+            <a:extLst>
+              <a:ext uri="{28A0092B-C50C-407E-A947-70E740481C1C}">
+                <a14:useLocalDpi xmlns:a14="http://schemas.microsoft.com/office/drawing/2010/main"/>
+              </a:ext>
+            </a:extLst>
+          </a:blip>
+          <a:srcRect/>
+          <a:stretch/>
+        </p:blipFill>
+        <p:spPr>
+          <a:xfrm>
+            <a:off x="8338794" y="2908237"/>
+            <a:ext cx="3832699" cy="3925198"/>
+          </a:xfrm>
+          <a:prstGeom prst="rect">
+            <a:avLst/>
+          </a:prstGeom>
+        </p:spPr>
+      </p:pic>
+      <p:pic>
+        <p:nvPicPr>
+          <p:cNvPr id="3" name="Picture 2">
+            <a:extLst>
+              <a:ext uri="{FF2B5EF4-FFF2-40B4-BE49-F238E27FC236}">
+                <a16:creationId xmlns:a16="http://schemas.microsoft.com/office/drawing/2014/main" id="{20391757-BA03-DD45-AD15-9B32B72A6F7A}"/>
+              </a:ext>
+            </a:extLst>
+          </p:cNvPr>
+          <p:cNvPicPr>
+            <a:picLocks noChangeAspect="1"/>
+          </p:cNvPicPr>
+          <p:nvPr/>
+        </p:nvPicPr>
+        <p:blipFill>
+          <a:blip r:embed="rId4"/>
+          <a:stretch>
+            <a:fillRect/>
+          </a:stretch>
+        </p:blipFill>
+        <p:spPr>
+          <a:xfrm>
+            <a:off x="8536286" y="260188"/>
+            <a:ext cx="3603829" cy="1801915"/>
+          </a:xfrm>
+          <a:prstGeom prst="rect">
+            <a:avLst/>
+          </a:prstGeom>
+        </p:spPr>
+      </p:pic>
+      <p:sp>
+        <p:nvSpPr>
+          <p:cNvPr id="6" name="TextBox 5">
+            <a:extLst>
+              <a:ext uri="{FF2B5EF4-FFF2-40B4-BE49-F238E27FC236}">
+                <a16:creationId xmlns:a16="http://schemas.microsoft.com/office/drawing/2014/main" id="{41F5609E-9B9B-214E-87DA-4C98A1276ED8}"/>
+              </a:ext>
+            </a:extLst>
+          </p:cNvPr>
+          <p:cNvSpPr txBox="1"/>
+          <p:nvPr/>
+        </p:nvSpPr>
+        <p:spPr>
+          <a:xfrm>
+            <a:off x="8536285" y="2094032"/>
+            <a:ext cx="3603829" cy="369332"/>
+          </a:xfrm>
+          <a:prstGeom prst="rect">
+            <a:avLst/>
+          </a:prstGeom>
+          <a:noFill/>
+        </p:spPr>
+        <p:txBody>
+          <a:bodyPr wrap="square" rtlCol="0">
+            <a:spAutoFit/>
+          </a:bodyPr>
+          <a:lstStyle/>
+          <a:p>
+            <a:r>
+              <a:rPr lang="en-US" dirty="0"/>
+              <a:t>Augustus </a:t>
+            </a:r>
+            <a:r>
+              <a:rPr lang="en-US" dirty="0" err="1"/>
+              <a:t>Odena</a:t>
+            </a:r>
+            <a:r>
+              <a:rPr lang="en-US" dirty="0"/>
+              <a:t>   &amp;   Ian </a:t>
+            </a:r>
+            <a:r>
+              <a:rPr lang="en-US" dirty="0" err="1"/>
+              <a:t>Goodfellow</a:t>
+            </a:r>
+            <a:endParaRPr lang="en-US" dirty="0"/>
+          </a:p>
+        </p:txBody>
+      </p:sp>
+      <p:sp>
+        <p:nvSpPr>
+          <p:cNvPr id="7" name="TextBox 6">
+            <a:extLst>
+              <a:ext uri="{FF2B5EF4-FFF2-40B4-BE49-F238E27FC236}">
+                <a16:creationId xmlns:a16="http://schemas.microsoft.com/office/drawing/2014/main" id="{5A42E94E-A869-F34F-85D2-7A3F6569FD46}"/>
+              </a:ext>
+            </a:extLst>
+          </p:cNvPr>
+          <p:cNvSpPr txBox="1"/>
+          <p:nvPr/>
+        </p:nvSpPr>
+        <p:spPr>
+          <a:xfrm>
+            <a:off x="29180" y="3823801"/>
+            <a:ext cx="7869679" cy="2862322"/>
+          </a:xfrm>
+          <a:prstGeom prst="rect">
+            <a:avLst/>
+          </a:prstGeom>
+          <a:noFill/>
+        </p:spPr>
+        <p:txBody>
+          <a:bodyPr wrap="square" rtlCol="0">
+            <a:spAutoFit/>
+          </a:bodyPr>
+          <a:lstStyle/>
+          <a:p>
+            <a:r>
+              <a:rPr lang="en-US" dirty="0"/>
+              <a:t>Fuzzing over TensorFlow graph.</a:t>
+            </a:r>
+          </a:p>
+          <a:p>
+            <a:endParaRPr lang="en-US" dirty="0"/>
+          </a:p>
+          <a:p>
+            <a:r>
+              <a:rPr lang="en-US" dirty="0"/>
+              <a:t>The </a:t>
+            </a:r>
+            <a:r>
+              <a:rPr lang="en-US" b="1" dirty="0" err="1">
+                <a:solidFill>
+                  <a:srgbClr val="0070C0"/>
+                </a:solidFill>
+              </a:rPr>
+              <a:t>TensorFuzz</a:t>
+            </a:r>
+            <a:r>
+              <a:rPr lang="en-US" dirty="0"/>
+              <a:t> tool </a:t>
+            </a:r>
+          </a:p>
+          <a:p>
+            <a:r>
+              <a:rPr lang="en-US" dirty="0"/>
+              <a:t>feeds inputs to an arbitrary TensorFlow graph </a:t>
+            </a:r>
+          </a:p>
+          <a:p>
+            <a:r>
+              <a:rPr lang="en-US" dirty="0"/>
+              <a:t>and measures coverage by looking at the “activations” of the computation graph.</a:t>
+            </a:r>
+          </a:p>
+          <a:p>
+            <a:endParaRPr lang="en-US" dirty="0"/>
+          </a:p>
+          <a:p>
+            <a:r>
+              <a:rPr lang="en-US" dirty="0"/>
+              <a:t>In coverage-guided fuzzing, </a:t>
+            </a:r>
+          </a:p>
+          <a:p>
+            <a:r>
+              <a:rPr lang="en-US" dirty="0"/>
+              <a:t>random mutations of inputs to a neural network </a:t>
+            </a:r>
+          </a:p>
+          <a:p>
+            <a:r>
+              <a:rPr lang="en-US" dirty="0"/>
+              <a:t>are guided by a coverage metric </a:t>
+            </a:r>
+          </a:p>
+          <a:p>
+            <a:r>
+              <a:rPr lang="en-US" dirty="0"/>
+              <a:t>toward the goal of satisfying user-specified constraints.</a:t>
+            </a:r>
+          </a:p>
+        </p:txBody>
+      </p:sp>
+      <p:sp>
+        <p:nvSpPr>
+          <p:cNvPr id="8" name="TextBox 7">
+            <a:extLst>
+              <a:ext uri="{FF2B5EF4-FFF2-40B4-BE49-F238E27FC236}">
+                <a16:creationId xmlns:a16="http://schemas.microsoft.com/office/drawing/2014/main" id="{BC75CE2D-A2C2-9A45-B27D-481CF184D1E3}"/>
+              </a:ext>
+            </a:extLst>
+          </p:cNvPr>
+          <p:cNvSpPr txBox="1"/>
+          <p:nvPr/>
+        </p:nvSpPr>
+        <p:spPr>
+          <a:xfrm>
+            <a:off x="29180" y="3070000"/>
+            <a:ext cx="5710218" cy="369332"/>
+          </a:xfrm>
+          <a:prstGeom prst="rect">
+            <a:avLst/>
+          </a:prstGeom>
+          <a:noFill/>
+        </p:spPr>
+        <p:txBody>
+          <a:bodyPr wrap="none" rtlCol="0">
+            <a:spAutoFit/>
+          </a:bodyPr>
+          <a:lstStyle/>
+          <a:p>
+            <a:r>
+              <a:rPr lang="en-US" dirty="0">
+                <a:hlinkClick r:id="rId5"/>
+              </a:rPr>
+              <a:t>http://proceedings.mlr.press/v97/odena19a/odena19a.pdf</a:t>
+            </a:r>
+            <a:endParaRPr lang="en-US" dirty="0"/>
+          </a:p>
+        </p:txBody>
+      </p:sp>
+    </p:spTree>
+    <p:extLst>
+      <p:ext uri="{BB962C8B-B14F-4D97-AF65-F5344CB8AC3E}">
+        <p14:creationId xmlns:p14="http://schemas.microsoft.com/office/powerpoint/2010/main" val="3803802340"/>
+      </p:ext>
+    </p:extLst>
+  </p:cSld>
+  <p:clrMapOvr>
+    <a:masterClrMapping/>
+  </p:clrMapOvr>
+</p:sld>
+</file>
+
+<file path=ppt/slides/slide7.xml><?xml version="1.0" encoding="utf-8"?>
+<p:sld xmlns:a="http://schemas.openxmlformats.org/drawingml/2006/main" xmlns:r="http://schemas.openxmlformats.org/officeDocument/2006/relationships" xmlns:p="http://schemas.openxmlformats.org/presentationml/2006/main">
+  <p:cSld>
+    <p:spTree>
+      <p:nvGrpSpPr>
+        <p:cNvPr id="1" name=""/>
+        <p:cNvGrpSpPr/>
+        <p:nvPr/>
+      </p:nvGrpSpPr>
+      <p:grpSpPr>
+        <a:xfrm>
+          <a:off x="0" y="0"/>
+          <a:ext cx="0" cy="0"/>
+          <a:chOff x="0" y="0"/>
+          <a:chExt cx="0" cy="0"/>
+        </a:xfrm>
+      </p:grpSpPr>
+      <p:sp>
+        <p:nvSpPr>
+          <p:cNvPr id="4" name="TextBox 3">
+            <a:extLst>
+              <a:ext uri="{FF2B5EF4-FFF2-40B4-BE49-F238E27FC236}">
+                <a16:creationId xmlns:a16="http://schemas.microsoft.com/office/drawing/2014/main" id="{BA908DDB-E503-6B4F-A20C-26E06F933931}"/>
+              </a:ext>
+            </a:extLst>
+          </p:cNvPr>
+          <p:cNvSpPr txBox="1"/>
+          <p:nvPr/>
+        </p:nvSpPr>
+        <p:spPr>
+          <a:xfrm>
             <a:off x="-1" y="0"/>
             <a:ext cx="7120647" cy="584775"/>
           </a:xfrm>
@@ -5747,7 +5907,7 @@
 </p:sld>
 </file>
 
-<file path=ppt/slides/slide7.xml><?xml version="1.0" encoding="utf-8"?>
+<file path=ppt/slides/slide8.xml><?xml version="1.0" encoding="utf-8"?>
 <p:sld xmlns:a="http://schemas.openxmlformats.org/drawingml/2006/main" xmlns:r="http://schemas.openxmlformats.org/officeDocument/2006/relationships" xmlns:p="http://schemas.openxmlformats.org/presentationml/2006/main">
   <p:cSld>
     <p:spTree>
@@ -6095,7 +6255,7 @@
 </p:sld>
 </file>
 
-<file path=ppt/slides/slide8.xml><?xml version="1.0" encoding="utf-8"?>
+<file path=ppt/slides/slide9.xml><?xml version="1.0" encoding="utf-8"?>
 <p:sld xmlns:a="http://schemas.openxmlformats.org/drawingml/2006/main" xmlns:r="http://schemas.openxmlformats.org/officeDocument/2006/relationships" xmlns:p="http://schemas.openxmlformats.org/presentationml/2006/main">
   <p:cSld>
     <p:spTree>
@@ -6127,7 +6287,7 @@
         <p:spPr>
           <a:xfrm>
             <a:off x="383458" y="280219"/>
-            <a:ext cx="9601200" cy="5262979"/>
+            <a:ext cx="9601200" cy="6124754"/>
           </a:xfrm>
           <a:prstGeom prst="rect">
             <a:avLst/>
@@ -6442,20 +6602,45 @@
           </a:p>
           <a:p>
             <a:r>
+              <a:rPr lang="en-US" sz="1400" dirty="0">
+                <a:hlinkClick r:id="rId2"/>
+              </a:rPr>
+              <a:t>https://github.com/google/fuzzing/blob/master/tutorial/libFuzzerTutorial.md</a:t>
+            </a:r>
+            <a:endParaRPr lang="en-US" sz="1400" dirty="0"/>
+          </a:p>
+          <a:p>
+            <a:endParaRPr lang="en-US" sz="1400" dirty="0"/>
+          </a:p>
+          <a:p>
+            <a:endParaRPr lang="en-US" sz="1400" dirty="0"/>
+          </a:p>
+          <a:p>
+            <a:r>
               <a:rPr lang="en-US" sz="1400" dirty="0"/>
-              <a:t>https://</a:t>
+              <a:t>KLUZZER: </a:t>
             </a:r>
             <a:r>
               <a:rPr lang="en-US" sz="1400" dirty="0" err="1"/>
-              <a:t>github.com</a:t>
+              <a:t>Whitebox</a:t>
             </a:r>
             <a:r>
               <a:rPr lang="en-US" sz="1400" dirty="0"/>
-              <a:t>/google/fuzzing/blob/master/tutorial/</a:t>
+              <a:t> Fuzzing on Top of LLVM </a:t>
             </a:r>
             <a:r>
               <a:rPr lang="en-US" sz="1400" dirty="0" err="1"/>
-              <a:t>libFuzzerTutorial.md</a:t>
+              <a:t>bitcode</a:t>
+            </a:r>
+            <a:r>
+              <a:rPr lang="en-US" sz="1400" dirty="0"/>
+              <a:t> - </a:t>
+            </a:r>
+            <a:r>
+              <a:rPr lang="en-US" sz="1400" dirty="0">
+                <a:hlinkClick r:id="rId3"/>
+              </a:rPr>
+              <a:t>https://link.springer.com/chapter/10.1007/978-3-030-31784-3_14</a:t>
             </a:r>
             <a:endParaRPr lang="en-US" sz="1400" dirty="0"/>
           </a:p>

--- a/fuzzing.pptx
+++ b/fuzzing.pptx
@@ -13,7 +13,6 @@
     <p:sldId id="259" r:id="rId7"/>
     <p:sldId id="258" r:id="rId8"/>
     <p:sldId id="261" r:id="rId9"/>
-    <p:sldId id="260" r:id="rId10"/>
   </p:sldIdLst>
   <p:sldSz cx="12192000" cy="6858000"/>
   <p:notesSz cx="6858000" cy="9144000"/>
@@ -4550,7 +4549,7 @@
         <p:spPr>
           <a:xfrm>
             <a:off x="0" y="103236"/>
-            <a:ext cx="12192000" cy="6370975"/>
+            <a:ext cx="12192000" cy="6124754"/>
           </a:xfrm>
           <a:prstGeom prst="rect">
             <a:avLst/>
@@ -4635,12 +4634,22 @@
           <a:p>
             <a:r>
               <a:rPr lang="en-US" sz="1600" dirty="0"/>
-              <a:t>Read excellent intro here:    - </a:t>
+              <a:t> - </a:t>
             </a:r>
             <a:r>
               <a:rPr lang="en-US" sz="1600" dirty="0">
                 <a:hlinkClick r:id="rId3"/>
               </a:rPr>
+              <a:t>http://lcamtuf.coredump.cx/afl/</a:t>
+            </a:r>
+            <a:r>
+              <a:rPr lang="en-US" sz="1600" dirty="0"/>
+              <a:t> , read excellent intro here:    - </a:t>
+            </a:r>
+            <a:r>
+              <a:rPr lang="en-US" sz="1600" dirty="0">
+                <a:hlinkClick r:id="rId4"/>
+              </a:rPr>
               <a:t>https://github.com/google/AFL</a:t>
             </a:r>
             <a:r>
@@ -4663,7 +4672,7 @@
             </a:r>
             <a:r>
               <a:rPr lang="en-US" sz="1600" dirty="0">
-                <a:hlinkClick r:id="rId4"/>
+                <a:hlinkClick r:id="rId5"/>
               </a:rPr>
               <a:t>https://github.com/google/AFL/blob/master/docs/QuickStartGuide.txt</a:t>
             </a:r>
@@ -4692,7 +4701,7 @@
             </a:r>
             <a:r>
               <a:rPr lang="en-US" sz="1600" dirty="0">
-                <a:hlinkClick r:id="rId5"/>
+                <a:hlinkClick r:id="rId6"/>
               </a:rPr>
               <a:t>lcamtuf@google.com</a:t>
             </a:r>
@@ -4732,7 +4741,7 @@
             </a:r>
             <a:r>
               <a:rPr lang="en-US" sz="1600" dirty="0">
-                <a:hlinkClick r:id="rId6"/>
+                <a:hlinkClick r:id="rId7"/>
               </a:rPr>
               <a:t>https://llvm.org/docs/LibFuzzer.html</a:t>
             </a:r>
@@ -4745,11 +4754,41 @@
             </a:r>
             <a:r>
               <a:rPr lang="en-US" sz="1600" dirty="0">
-                <a:hlinkClick r:id="rId7"/>
+                <a:hlinkClick r:id="rId8"/>
               </a:rPr>
               <a:t>https://github.com/google/fuzzing/blob/master/tutorial/libFuzzerTutorial.md</a:t>
             </a:r>
+            <a:r>
+              <a:rPr lang="en-US" sz="1600" dirty="0"/>
+              <a:t> </a:t>
+            </a:r>
+          </a:p>
+          <a:p>
+            <a:r>
+              <a:rPr lang="en-US" sz="1600" dirty="0"/>
+              <a:t> - </a:t>
+            </a:r>
+            <a:r>
+              <a:rPr lang="en-US" sz="1600" dirty="0">
+                <a:hlinkClick r:id="rId9"/>
+              </a:rPr>
+              <a:t>https://scholar.google.com/scholar?start=10&amp;q=fuzz+testing+libfuzzer&amp;hl=en&amp;as_sdt=0,33</a:t>
+            </a:r>
             <a:endParaRPr lang="en-US" sz="1600" dirty="0"/>
+          </a:p>
+          <a:p>
+            <a:r>
+              <a:rPr lang="en-US" sz="1600" dirty="0"/>
+              <a:t> - Google for </a:t>
+            </a:r>
+            <a:r>
+              <a:rPr lang="en-US" sz="1600" dirty="0" err="1"/>
+              <a:t>libfuzzer</a:t>
+            </a:r>
+            <a:r>
+              <a:rPr lang="en-US" sz="1600" dirty="0"/>
+              <a:t> to get more links</a:t>
+            </a:r>
           </a:p>
           <a:p>
             <a:r>
@@ -4768,37 +4807,77 @@
             </a:r>
           </a:p>
           <a:p>
-            <a:endParaRPr lang="en-US" sz="1600" dirty="0"/>
-          </a:p>
-          <a:p>
-            <a:r>
-              <a:rPr lang="en-US" sz="1600" dirty="0"/>
-              <a:t>     clang -g -O1 -</a:t>
-            </a:r>
-            <a:r>
-              <a:rPr lang="en-US" sz="1600" dirty="0" err="1"/>
+            <a:r>
+              <a:rPr lang="en-US" sz="1600" dirty="0"/>
+              <a:t>     </a:t>
+            </a:r>
+            <a:r>
+              <a:rPr lang="en-US" sz="1600" b="1" dirty="0">
+                <a:solidFill>
+                  <a:srgbClr val="0070C0"/>
+                </a:solidFill>
+                <a:latin typeface="Consolas" panose="020B0609020204030204" pitchFamily="49" charset="0"/>
+                <a:cs typeface="Consolas" panose="020B0609020204030204" pitchFamily="49" charset="0"/>
+              </a:rPr>
+              <a:t>clang -g -O1 -</a:t>
+            </a:r>
+            <a:r>
+              <a:rPr lang="en-US" sz="1600" b="1" dirty="0" err="1">
+                <a:solidFill>
+                  <a:srgbClr val="0070C0"/>
+                </a:solidFill>
+                <a:latin typeface="Consolas" panose="020B0609020204030204" pitchFamily="49" charset="0"/>
+                <a:cs typeface="Consolas" panose="020B0609020204030204" pitchFamily="49" charset="0"/>
+              </a:rPr>
               <a:t>fsanitize</a:t>
             </a:r>
             <a:r>
-              <a:rPr lang="en-US" sz="1600" dirty="0"/>
+              <a:rPr lang="en-US" sz="1600" b="1" dirty="0">
+                <a:solidFill>
+                  <a:srgbClr val="0070C0"/>
+                </a:solidFill>
+                <a:latin typeface="Consolas" panose="020B0609020204030204" pitchFamily="49" charset="0"/>
+                <a:cs typeface="Consolas" panose="020B0609020204030204" pitchFamily="49" charset="0"/>
+              </a:rPr>
               <a:t>=</a:t>
             </a:r>
             <a:r>
-              <a:rPr lang="en-US" sz="1600" dirty="0" err="1"/>
+              <a:rPr lang="en-US" sz="1600" b="1" dirty="0" err="1">
+                <a:solidFill>
+                  <a:srgbClr val="0070C0"/>
+                </a:solidFill>
+                <a:latin typeface="Consolas" panose="020B0609020204030204" pitchFamily="49" charset="0"/>
+                <a:cs typeface="Consolas" panose="020B0609020204030204" pitchFamily="49" charset="0"/>
+              </a:rPr>
               <a:t>fuzzer</a:t>
             </a:r>
             <a:r>
-              <a:rPr lang="en-US" sz="1600" dirty="0"/>
+              <a:rPr lang="en-US" sz="1600" b="1" dirty="0">
+                <a:solidFill>
+                  <a:srgbClr val="0070C0"/>
+                </a:solidFill>
+                <a:latin typeface="Consolas" panose="020B0609020204030204" pitchFamily="49" charset="0"/>
+                <a:cs typeface="Consolas" panose="020B0609020204030204" pitchFamily="49" charset="0"/>
+              </a:rPr>
               <a:t> </a:t>
             </a:r>
             <a:r>
-              <a:rPr lang="en-US" sz="1600" dirty="0" err="1"/>
+              <a:rPr lang="en-US" sz="1600" b="1" dirty="0" err="1">
+                <a:solidFill>
+                  <a:srgbClr val="0070C0"/>
+                </a:solidFill>
+                <a:latin typeface="Consolas" panose="020B0609020204030204" pitchFamily="49" charset="0"/>
+                <a:cs typeface="Consolas" panose="020B0609020204030204" pitchFamily="49" charset="0"/>
+              </a:rPr>
               <a:t>mytarget.c</a:t>
             </a:r>
-            <a:endParaRPr lang="en-US" sz="1600" dirty="0"/>
-          </a:p>
-          <a:p>
-            <a:endParaRPr lang="en-US" sz="1600" dirty="0"/>
+            <a:endParaRPr lang="en-US" sz="1600" b="1" dirty="0">
+              <a:solidFill>
+                <a:srgbClr val="0070C0"/>
+              </a:solidFill>
+              <a:latin typeface="Consolas" panose="020B0609020204030204" pitchFamily="49" charset="0"/>
+              <a:cs typeface="Consolas" panose="020B0609020204030204" pitchFamily="49" charset="0"/>
+            </a:endParaRPr>
           </a:p>
           <a:p>
             <a:r>
@@ -4807,13 +4886,7 @@
             </a:r>
             <a:r>
               <a:rPr lang="en-US" sz="1600" dirty="0"/>
-              <a:t> requires a bit more work to setup (comparing with AFL), </a:t>
-            </a:r>
-          </a:p>
-          <a:p>
-            <a:r>
-              <a:rPr lang="en-US" sz="1600" dirty="0"/>
-              <a:t>but it is ideal when it comes to fuzzing specific API calls in a library </a:t>
+              <a:t> requires a bit more work to setup (comparing with AFL), but it is ideal when it comes to fuzzing specific API calls in a library </a:t>
             </a:r>
           </a:p>
           <a:p>
@@ -4891,7 +4964,7 @@
         <p:spPr>
           <a:xfrm>
             <a:off x="280219" y="176981"/>
-            <a:ext cx="7492181" cy="2031325"/>
+            <a:ext cx="11695471" cy="6001643"/>
           </a:xfrm>
           <a:prstGeom prst="rect">
             <a:avLst/>
@@ -4905,67 +4978,347 @@
           <a:lstStyle/>
           <a:p>
             <a:r>
-              <a:rPr lang="en-US" dirty="0"/>
+              <a:rPr lang="en-US" sz="1600" b="1" dirty="0">
+                <a:solidFill>
+                  <a:srgbClr val="FF0000"/>
+                </a:solidFill>
+              </a:rPr>
+              <a:t>Awesome Fuzzing </a:t>
+            </a:r>
+            <a:r>
+              <a:rPr lang="en-US" sz="1600" dirty="0"/>
+              <a:t>- a curated list of fuzzing resources (books, courses, videos, tools, tutorials,  vulnerable applications to practice on )</a:t>
+            </a:r>
+          </a:p>
+          <a:p>
+            <a:r>
+              <a:rPr lang="en-US" sz="1600" dirty="0"/>
+              <a:t> - </a:t>
+            </a:r>
+            <a:r>
+              <a:rPr lang="en-US" sz="1600" dirty="0">
+                <a:hlinkClick r:id="rId2"/>
+              </a:rPr>
+              <a:t>https://github.com/secfigo/Awesome-Fuzzing</a:t>
+            </a:r>
+            <a:endParaRPr lang="en-US" sz="1600" dirty="0"/>
+          </a:p>
+          <a:p>
+            <a:endParaRPr lang="en-US" sz="1600" dirty="0"/>
+          </a:p>
+          <a:p>
+            <a:r>
+              <a:rPr lang="en-US" sz="1600" b="1" dirty="0">
+                <a:solidFill>
+                  <a:srgbClr val="FF0000"/>
+                </a:solidFill>
+              </a:rPr>
+              <a:t>NEUZZ: Efficient Fuzzing </a:t>
+            </a:r>
+            <a:r>
+              <a:rPr lang="en-US" sz="1600" dirty="0"/>
+              <a:t>with Neural Program Smoothing (July 2019, </a:t>
+            </a:r>
+            <a:r>
+              <a:rPr lang="en-US" sz="1600" b="1" dirty="0">
+                <a:solidFill>
+                  <a:srgbClr val="FF0000"/>
+                </a:solidFill>
+              </a:rPr>
+              <a:t>Columbia University </a:t>
+            </a:r>
+            <a:r>
+              <a:rPr lang="en-US" sz="1600" dirty="0"/>
+              <a:t>- by </a:t>
+            </a:r>
+            <a:r>
+              <a:rPr lang="en-US" sz="1600" dirty="0" err="1"/>
+              <a:t>Dongdong</a:t>
+            </a:r>
+            <a:r>
+              <a:rPr lang="en-US" sz="1600" dirty="0"/>
+              <a:t> She, </a:t>
+            </a:r>
+            <a:r>
+              <a:rPr lang="en-US" sz="1600" dirty="0" err="1"/>
+              <a:t>Kexin</a:t>
+            </a:r>
+            <a:r>
+              <a:rPr lang="en-US" sz="1600" dirty="0"/>
+              <a:t> Pei, Dave Epstein, </a:t>
+            </a:r>
+            <a:r>
+              <a:rPr lang="en-US" sz="1600" dirty="0" err="1"/>
+              <a:t>Junfeng</a:t>
+            </a:r>
+            <a:r>
+              <a:rPr lang="en-US" sz="1600" dirty="0"/>
+              <a:t> Yang, </a:t>
+            </a:r>
+            <a:r>
+              <a:rPr lang="en-US" sz="1600" dirty="0" err="1"/>
+              <a:t>Baishakhi</a:t>
+            </a:r>
+            <a:r>
+              <a:rPr lang="en-US" sz="1600" dirty="0"/>
+              <a:t> Ray, and Suman Jana). NEUZZ significantly outperforms 10 state-of-the-art </a:t>
+            </a:r>
+            <a:r>
+              <a:rPr lang="en-US" sz="1600" dirty="0" err="1"/>
+              <a:t>graybox</a:t>
+            </a:r>
+            <a:r>
+              <a:rPr lang="en-US" sz="1600" dirty="0"/>
+              <a:t> </a:t>
+            </a:r>
+            <a:r>
+              <a:rPr lang="en-US" sz="1600" dirty="0" err="1"/>
+              <a:t>fuzzers</a:t>
+            </a:r>
+            <a:r>
+              <a:rPr lang="en-US" sz="1600" dirty="0"/>
+              <a:t> on 10 popular real-world programs both at finding new bugs and achieving higher edge coverage.</a:t>
+            </a:r>
+          </a:p>
+          <a:p>
+            <a:r>
+              <a:rPr lang="en-US" sz="1600" dirty="0"/>
+              <a:t> - </a:t>
+            </a:r>
+            <a:r>
+              <a:rPr lang="en-US" sz="1600" dirty="0">
+                <a:hlinkClick r:id="rId3"/>
+              </a:rPr>
+              <a:t>https://arxiv.org/pdf/1807.05620.pdf</a:t>
+            </a:r>
+            <a:endParaRPr lang="en-US" sz="1600" dirty="0"/>
+          </a:p>
+          <a:p>
+            <a:endParaRPr lang="en-US" sz="1600" dirty="0"/>
+          </a:p>
+          <a:p>
+            <a:r>
+              <a:rPr lang="en-US" sz="1600" b="1" dirty="0">
+                <a:solidFill>
+                  <a:srgbClr val="FF0000"/>
+                </a:solidFill>
+              </a:rPr>
               <a:t>KLUZZER: </a:t>
             </a:r>
             <a:r>
-              <a:rPr lang="en-US" dirty="0" err="1"/>
+              <a:rPr lang="en-US" sz="1600" b="1" dirty="0" err="1">
+                <a:solidFill>
+                  <a:srgbClr val="FF0000"/>
+                </a:solidFill>
+              </a:rPr>
               <a:t>Whitebox</a:t>
             </a:r>
             <a:r>
-              <a:rPr lang="en-US" dirty="0"/>
+              <a:rPr lang="en-US" sz="1600" b="1" dirty="0">
+                <a:solidFill>
+                  <a:srgbClr val="FF0000"/>
+                </a:solidFill>
+              </a:rPr>
               <a:t> Fuzzing on Top of LLVM </a:t>
             </a:r>
-          </a:p>
-          <a:p>
-            <a:endParaRPr lang="en-US" dirty="0"/>
-          </a:p>
-          <a:p>
-            <a:r>
-              <a:rPr lang="en-US" dirty="0"/>
-              <a:t>Targeting LLVM </a:t>
-            </a:r>
-            <a:r>
-              <a:rPr lang="en-US" dirty="0" err="1"/>
+            <a:r>
+              <a:rPr lang="en-US" sz="1600" dirty="0"/>
+              <a:t>- Targeting LLVM </a:t>
+            </a:r>
+            <a:r>
+              <a:rPr lang="en-US" sz="1600" dirty="0" err="1"/>
               <a:t>bitcode</a:t>
             </a:r>
             <a:r>
-              <a:rPr lang="en-US" dirty="0"/>
+              <a:rPr lang="en-US" sz="1600" dirty="0"/>
               <a:t> , easy to combine with </a:t>
             </a:r>
             <a:r>
-              <a:rPr lang="en-US" dirty="0" err="1"/>
+              <a:rPr lang="en-US" sz="1600" dirty="0" err="1"/>
               <a:t>libFuzzer</a:t>
             </a:r>
+            <a:r>
+              <a:rPr lang="en-US" sz="1600" dirty="0"/>
+              <a:t>. </a:t>
+            </a:r>
+            <a:r>
+              <a:rPr lang="en-US" sz="1600" b="1" dirty="0">
+                <a:solidFill>
+                  <a:srgbClr val="FF0000"/>
+                </a:solidFill>
+              </a:rPr>
+              <a:t>We need to buy this PDF (~$80</a:t>
+            </a:r>
+            <a:r>
+              <a:rPr lang="en-US" sz="1600" dirty="0"/>
+              <a:t>)</a:t>
+            </a:r>
             <a:br>
-              <a:rPr lang="en-US" dirty="0"/>
+              <a:rPr lang="en-US" sz="1600" dirty="0"/>
             </a:br>
             <a:r>
-              <a:rPr lang="en-US" dirty="0"/>
-              <a:t>- </a:t>
-            </a:r>
-            <a:r>
-              <a:rPr lang="en-US" dirty="0">
-                <a:hlinkClick r:id="rId2"/>
+              <a:rPr lang="en-US" sz="1600" dirty="0"/>
+              <a:t> - </a:t>
+            </a:r>
+            <a:r>
+              <a:rPr lang="en-US" sz="1600" dirty="0">
+                <a:hlinkClick r:id="rId4"/>
               </a:rPr>
               <a:t>https://link.springer.com/chapter/10.1007/978-3-030-31784-3_14</a:t>
             </a:r>
             <a:r>
-              <a:rPr lang="en-US" dirty="0"/>
+              <a:rPr lang="en-US" sz="1600" dirty="0"/>
               <a:t> </a:t>
             </a:r>
           </a:p>
           <a:p>
-            <a:endParaRPr lang="en-US" dirty="0"/>
-          </a:p>
-          <a:p>
-            <a:r>
-              <a:rPr lang="en-US" dirty="0"/>
-              <a:t>We need to buy this PDF (~$80)</a:t>
-            </a:r>
-          </a:p>
-          <a:p>
-            <a:endParaRPr lang="en-US" dirty="0"/>
+            <a:endParaRPr lang="en-US" sz="1600" dirty="0"/>
+          </a:p>
+          <a:p>
+            <a:r>
+              <a:rPr lang="en-US" sz="1600" b="1" dirty="0">
+                <a:solidFill>
+                  <a:srgbClr val="FF0000"/>
+                </a:solidFill>
+              </a:rPr>
+              <a:t>Pulling JPEGs out of thin a</a:t>
+            </a:r>
+            <a:r>
+              <a:rPr lang="en-US" sz="1600" dirty="0"/>
+              <a:t>ir - demonstration of the capabilities of AFL:</a:t>
+            </a:r>
+          </a:p>
+          <a:p>
+            <a:r>
+              <a:rPr lang="en-US" sz="1600" dirty="0"/>
+              <a:t> - </a:t>
+            </a:r>
+            <a:r>
+              <a:rPr lang="en-US" sz="1600" dirty="0">
+                <a:hlinkClick r:id="rId5"/>
+              </a:rPr>
+              <a:t>https://lcamtuf.blogspot.com/2014/11/pulling-jpegs-out-of-thin-air.html?m=1</a:t>
+            </a:r>
+            <a:endParaRPr lang="en-US" sz="1600" dirty="0"/>
+          </a:p>
+          <a:p>
+            <a:endParaRPr lang="en-US" sz="1600" dirty="0"/>
+          </a:p>
+          <a:p>
+            <a:r>
+              <a:rPr lang="en-US" sz="1600" b="1" dirty="0">
+                <a:solidFill>
+                  <a:srgbClr val="FF0000"/>
+                </a:solidFill>
+              </a:rPr>
+              <a:t>Hypothesis</a:t>
+            </a:r>
+            <a:r>
+              <a:rPr lang="en-US" sz="1600" dirty="0"/>
+              <a:t> - Python library for creating unit tests: </a:t>
+            </a:r>
+            <a:r>
+              <a:rPr lang="en-US" sz="1600" dirty="0">
+                <a:hlinkClick r:id="rId6"/>
+              </a:rPr>
+              <a:t>https://hypothesis.readthedocs.io/en/latest/index.html</a:t>
+            </a:r>
+            <a:endParaRPr lang="en-US" sz="1600" dirty="0"/>
+          </a:p>
+          <a:p>
+            <a:endParaRPr lang="en-US" sz="1600" dirty="0"/>
+          </a:p>
+          <a:p>
+            <a:r>
+              <a:rPr lang="en-US" sz="1600" b="1" dirty="0">
+                <a:solidFill>
+                  <a:srgbClr val="FF0000"/>
+                </a:solidFill>
+              </a:rPr>
+              <a:t>Symbolic Execution </a:t>
+            </a:r>
+            <a:r>
+              <a:rPr lang="en-US" sz="1600" dirty="0"/>
+              <a:t>(also symbolic evaluation) - a means of analyzing a program to determine </a:t>
+            </a:r>
+          </a:p>
+          <a:p>
+            <a:r>
+              <a:rPr lang="en-US" sz="1600" dirty="0"/>
+              <a:t>what inputs cause each part of a program to execute: </a:t>
+            </a:r>
+            <a:r>
+              <a:rPr lang="en-US" sz="1600" dirty="0">
+                <a:hlinkClick r:id="rId7"/>
+              </a:rPr>
+              <a:t>https://en.m.wikipedia.org/wiki/Symbolic_execution</a:t>
+            </a:r>
+            <a:endParaRPr lang="en-US" sz="1600" dirty="0"/>
+          </a:p>
+          <a:p>
+            <a:endParaRPr lang="en-US" sz="1600" dirty="0"/>
+          </a:p>
+          <a:p>
+            <a:r>
+              <a:rPr lang="en-US" sz="1600" b="1" dirty="0">
+                <a:solidFill>
+                  <a:srgbClr val="FF0000"/>
+                </a:solidFill>
+              </a:rPr>
+              <a:t>Dynamic program analysis </a:t>
+            </a:r>
+            <a:r>
+              <a:rPr lang="en-US" sz="1600" dirty="0"/>
+              <a:t>– executing with sufficient test inputs to cover almost all possible outputs</a:t>
+            </a:r>
+          </a:p>
+          <a:p>
+            <a:r>
+              <a:rPr lang="en-US" sz="1600" dirty="0"/>
+              <a:t> - </a:t>
+            </a:r>
+            <a:r>
+              <a:rPr lang="en-US" sz="1600" dirty="0">
+                <a:hlinkClick r:id="rId8"/>
+              </a:rPr>
+              <a:t>https://en.m.wikipedia.org/wiki/Dynamic_program_analysis</a:t>
+            </a:r>
+            <a:endParaRPr lang="en-US" sz="1600" dirty="0"/>
+          </a:p>
+          <a:p>
+            <a:endParaRPr lang="en-US" sz="1600" dirty="0"/>
+          </a:p>
+          <a:p>
+            <a:r>
+              <a:rPr lang="en-US" sz="1600" b="1" dirty="0" err="1">
+                <a:solidFill>
+                  <a:srgbClr val="FF0000"/>
+                </a:solidFill>
+              </a:rPr>
+              <a:t>ClusterFuzz</a:t>
+            </a:r>
+            <a:r>
+              <a:rPr lang="en-US" sz="1600" dirty="0"/>
+              <a:t> – open-sourced by Google in 2019, was used on 25,000 servers to find 16,000 bugs in </a:t>
+            </a:r>
+            <a:r>
+              <a:rPr lang="en-US" sz="1600" dirty="0" err="1"/>
+              <a:t>Chome</a:t>
+            </a:r>
+            <a:r>
+              <a:rPr lang="en-US" sz="1600" dirty="0"/>
+              <a:t> and 11,000 bugs in other Open Source projects: </a:t>
+            </a:r>
+            <a:r>
+              <a:rPr lang="en-US" sz="1600" dirty="0">
+                <a:hlinkClick r:id="rId9"/>
+              </a:rPr>
+              <a:t>https://jaxenter.com/clusterfuzz-open-sourced-155414.html</a:t>
+            </a:r>
+            <a:r>
+              <a:rPr lang="en-US" sz="1600" dirty="0"/>
+              <a:t> </a:t>
+            </a:r>
           </a:p>
         </p:txBody>
       </p:sp>
@@ -6246,410 +6599,6 @@
     <p:extLst>
       <p:ext uri="{BB962C8B-B14F-4D97-AF65-F5344CB8AC3E}">
         <p14:creationId xmlns:p14="http://schemas.microsoft.com/office/powerpoint/2010/main" val="2673955838"/>
-      </p:ext>
-    </p:extLst>
-  </p:cSld>
-  <p:clrMapOvr>
-    <a:masterClrMapping/>
-  </p:clrMapOvr>
-</p:sld>
-</file>
-
-<file path=ppt/slides/slide9.xml><?xml version="1.0" encoding="utf-8"?>
-<p:sld xmlns:a="http://schemas.openxmlformats.org/drawingml/2006/main" xmlns:r="http://schemas.openxmlformats.org/officeDocument/2006/relationships" xmlns:p="http://schemas.openxmlformats.org/presentationml/2006/main">
-  <p:cSld>
-    <p:spTree>
-      <p:nvGrpSpPr>
-        <p:cNvPr id="1" name=""/>
-        <p:cNvGrpSpPr/>
-        <p:nvPr/>
-      </p:nvGrpSpPr>
-      <p:grpSpPr>
-        <a:xfrm>
-          <a:off x="0" y="0"/>
-          <a:ext cx="0" cy="0"/>
-          <a:chOff x="0" y="0"/>
-          <a:chExt cx="0" cy="0"/>
-        </a:xfrm>
-      </p:grpSpPr>
-      <p:sp>
-        <p:nvSpPr>
-          <p:cNvPr id="4" name="TextBox 3">
-            <a:extLst>
-              <a:ext uri="{FF2B5EF4-FFF2-40B4-BE49-F238E27FC236}">
-                <a16:creationId xmlns:a16="http://schemas.microsoft.com/office/drawing/2014/main" id="{2E712138-F9BA-2142-A5BF-70E827EF4D7C}"/>
-              </a:ext>
-            </a:extLst>
-          </p:cNvPr>
-          <p:cNvSpPr txBox="1"/>
-          <p:nvPr/>
-        </p:nvSpPr>
-        <p:spPr>
-          <a:xfrm>
-            <a:off x="383458" y="280219"/>
-            <a:ext cx="9601200" cy="6124754"/>
-          </a:xfrm>
-          <a:prstGeom prst="rect">
-            <a:avLst/>
-          </a:prstGeom>
-          <a:noFill/>
-        </p:spPr>
-        <p:txBody>
-          <a:bodyPr wrap="square" rtlCol="0">
-            <a:spAutoFit/>
-          </a:bodyPr>
-          <a:lstStyle/>
-          <a:p>
-            <a:r>
-              <a:rPr lang="en-US" sz="1400" dirty="0"/>
-              <a:t>https://</a:t>
-            </a:r>
-            <a:r>
-              <a:rPr lang="en-US" sz="1400" dirty="0" err="1"/>
-              <a:t>lcamtuf.blogspot.com</a:t>
-            </a:r>
-            <a:r>
-              <a:rPr lang="en-US" sz="1400" dirty="0"/>
-              <a:t>/2014/11/</a:t>
-            </a:r>
-            <a:r>
-              <a:rPr lang="en-US" sz="1400" dirty="0" err="1"/>
-              <a:t>pulling-jpegs-out-of-thin-air.html?m</a:t>
-            </a:r>
-            <a:r>
-              <a:rPr lang="en-US" sz="1400" dirty="0"/>
-              <a:t>=1</a:t>
-            </a:r>
-          </a:p>
-          <a:p>
-            <a:endParaRPr lang="en-US" sz="1400" dirty="0"/>
-          </a:p>
-          <a:p>
-            <a:r>
-              <a:rPr lang="en-US" sz="1400" dirty="0"/>
-              <a:t>https://</a:t>
-            </a:r>
-            <a:r>
-              <a:rPr lang="en-US" sz="1400" dirty="0" err="1"/>
-              <a:t>github.com</a:t>
-            </a:r>
-            <a:r>
-              <a:rPr lang="en-US" sz="1400" dirty="0"/>
-              <a:t>/</a:t>
-            </a:r>
-            <a:r>
-              <a:rPr lang="en-US" sz="1400" dirty="0" err="1"/>
-              <a:t>secfigo</a:t>
-            </a:r>
-            <a:r>
-              <a:rPr lang="en-US" sz="1400" dirty="0"/>
-              <a:t>/Awesome-Fuzzing</a:t>
-            </a:r>
-          </a:p>
-          <a:p>
-            <a:endParaRPr lang="en-US" sz="1400" dirty="0"/>
-          </a:p>
-          <a:p>
-            <a:r>
-              <a:rPr lang="en-US" sz="1400" dirty="0"/>
-              <a:t>https://</a:t>
-            </a:r>
-            <a:r>
-              <a:rPr lang="en-US" sz="1400" dirty="0" err="1"/>
-              <a:t>hypothesis.readthedocs.io</a:t>
-            </a:r>
-            <a:r>
-              <a:rPr lang="en-US" sz="1400" dirty="0"/>
-              <a:t>/</a:t>
-            </a:r>
-            <a:r>
-              <a:rPr lang="en-US" sz="1400" dirty="0" err="1"/>
-              <a:t>en</a:t>
-            </a:r>
-            <a:r>
-              <a:rPr lang="en-US" sz="1400" dirty="0"/>
-              <a:t>/latest/</a:t>
-            </a:r>
-            <a:r>
-              <a:rPr lang="en-US" sz="1400" dirty="0" err="1"/>
-              <a:t>quickstart.html</a:t>
-            </a:r>
-            <a:endParaRPr lang="en-US" sz="1400" dirty="0"/>
-          </a:p>
-          <a:p>
-            <a:endParaRPr lang="en-US" sz="1400" dirty="0"/>
-          </a:p>
-          <a:p>
-            <a:r>
-              <a:rPr lang="en-US" sz="1400" dirty="0"/>
-              <a:t>https://</a:t>
-            </a:r>
-            <a:r>
-              <a:rPr lang="en-US" sz="1400" dirty="0" err="1"/>
-              <a:t>en.m.wikipedia.org</a:t>
-            </a:r>
-            <a:r>
-              <a:rPr lang="en-US" sz="1400" dirty="0"/>
-              <a:t>/wiki/</a:t>
-            </a:r>
-            <a:r>
-              <a:rPr lang="en-US" sz="1400" dirty="0" err="1"/>
-              <a:t>Symbolic_execution</a:t>
-            </a:r>
-            <a:endParaRPr lang="en-US" sz="1400" dirty="0"/>
-          </a:p>
-          <a:p>
-            <a:endParaRPr lang="en-US" sz="1400" dirty="0"/>
-          </a:p>
-          <a:p>
-            <a:r>
-              <a:rPr lang="en-US" sz="1400" dirty="0"/>
-              <a:t>https://</a:t>
-            </a:r>
-            <a:r>
-              <a:rPr lang="en-US" sz="1400" dirty="0" err="1"/>
-              <a:t>en.m.wikipedia.org</a:t>
-            </a:r>
-            <a:r>
-              <a:rPr lang="en-US" sz="1400" dirty="0"/>
-              <a:t>/wiki/</a:t>
-            </a:r>
-            <a:r>
-              <a:rPr lang="en-US" sz="1400" dirty="0" err="1"/>
-              <a:t>Dynamic_program_analysis</a:t>
-            </a:r>
-            <a:endParaRPr lang="en-US" sz="1400" dirty="0"/>
-          </a:p>
-          <a:p>
-            <a:endParaRPr lang="en-US" sz="1400" dirty="0"/>
-          </a:p>
-          <a:p>
-            <a:r>
-              <a:rPr lang="en-US" sz="1400" dirty="0"/>
-              <a:t>https://</a:t>
-            </a:r>
-            <a:r>
-              <a:rPr lang="en-US" sz="1400" dirty="0" err="1"/>
-              <a:t>jaxenter.com</a:t>
-            </a:r>
-            <a:r>
-              <a:rPr lang="en-US" sz="1400" dirty="0"/>
-              <a:t>/clusterfuzz-open-sourced-155414.html</a:t>
-            </a:r>
-          </a:p>
-          <a:p>
-            <a:endParaRPr lang="en-US" sz="1400" dirty="0"/>
-          </a:p>
-          <a:p>
-            <a:r>
-              <a:rPr lang="en-US" sz="1400" dirty="0"/>
-              <a:t>https://</a:t>
-            </a:r>
-            <a:r>
-              <a:rPr lang="en-US" sz="1400" dirty="0" err="1"/>
-              <a:t>www.google.com</a:t>
-            </a:r>
-            <a:r>
-              <a:rPr lang="en-US" sz="1400" dirty="0"/>
-              <a:t>/</a:t>
-            </a:r>
-            <a:r>
-              <a:rPr lang="en-US" sz="1400" dirty="0" err="1"/>
-              <a:t>url?sa</a:t>
-            </a:r>
-            <a:r>
-              <a:rPr lang="en-US" sz="1400" dirty="0"/>
-              <a:t>=</a:t>
-            </a:r>
-            <a:r>
-              <a:rPr lang="en-US" sz="1400" dirty="0" err="1"/>
-              <a:t>t&amp;source</a:t>
-            </a:r>
-            <a:r>
-              <a:rPr lang="en-US" sz="1400" dirty="0"/>
-              <a:t>=</a:t>
-            </a:r>
-            <a:r>
-              <a:rPr lang="en-US" sz="1400" dirty="0" err="1"/>
-              <a:t>web&amp;rct</a:t>
-            </a:r>
-            <a:r>
-              <a:rPr lang="en-US" sz="1400" dirty="0"/>
-              <a:t>=</a:t>
-            </a:r>
-            <a:r>
-              <a:rPr lang="en-US" sz="1400" dirty="0" err="1"/>
-              <a:t>j&amp;url</a:t>
-            </a:r>
-            <a:r>
-              <a:rPr lang="en-US" sz="1400" dirty="0"/>
-              <a:t>=https://</a:t>
-            </a:r>
-            <a:r>
-              <a:rPr lang="en-US" sz="1400" dirty="0" err="1"/>
-              <a:t>arxiv.org</a:t>
-            </a:r>
-            <a:r>
-              <a:rPr lang="en-US" sz="1400" dirty="0"/>
-              <a:t>/pdf/1807.05620&amp;ved=2ahUKEwjGq8DfhcPnAhXllnIEHeCxDFIQFjAMegQIAxAB&amp;usg=AOvVaw1iTCG09IstfMpmUwGnJMgO</a:t>
-            </a:r>
-          </a:p>
-          <a:p>
-            <a:endParaRPr lang="en-US" sz="1400" dirty="0"/>
-          </a:p>
-          <a:p>
-            <a:r>
-              <a:rPr lang="en-US" sz="1400" dirty="0"/>
-              <a:t>https://</a:t>
-            </a:r>
-            <a:r>
-              <a:rPr lang="en-US" sz="1400" dirty="0" err="1"/>
-              <a:t>www.google.com</a:t>
-            </a:r>
-            <a:r>
-              <a:rPr lang="en-US" sz="1400" dirty="0"/>
-              <a:t>/</a:t>
-            </a:r>
-            <a:r>
-              <a:rPr lang="en-US" sz="1400" dirty="0" err="1"/>
-              <a:t>search?safe</a:t>
-            </a:r>
-            <a:r>
-              <a:rPr lang="en-US" sz="1400" dirty="0"/>
-              <a:t>=</a:t>
-            </a:r>
-            <a:r>
-              <a:rPr lang="en-US" sz="1400" dirty="0" err="1"/>
-              <a:t>off&amp;client</a:t>
-            </a:r>
-            <a:r>
-              <a:rPr lang="en-US" sz="1400" dirty="0"/>
-              <a:t>=</a:t>
-            </a:r>
-            <a:r>
-              <a:rPr lang="en-US" sz="1400" dirty="0" err="1"/>
-              <a:t>ms-android-verizon&amp;sxsrf</a:t>
-            </a:r>
-            <a:r>
-              <a:rPr lang="en-US" sz="1400" dirty="0"/>
-              <a:t>=ACYBGNTeNA2omSZuKgto098v76N3D5kPiA%3A1581202462479&amp;ei=Hjw_XufrHJyrytMPwtGa6AU&amp;q=</a:t>
-            </a:r>
-            <a:r>
-              <a:rPr lang="en-US" sz="1400" dirty="0" err="1"/>
-              <a:t>libfuzzer&amp;oq</a:t>
-            </a:r>
-            <a:r>
-              <a:rPr lang="en-US" sz="1400" dirty="0"/>
-              <a:t>=</a:t>
-            </a:r>
-            <a:r>
-              <a:rPr lang="en-US" sz="1400" dirty="0" err="1"/>
-              <a:t>libfuzzer&amp;gs_l</a:t>
-            </a:r>
-            <a:r>
-              <a:rPr lang="en-US" sz="1400" dirty="0"/>
-              <a:t>=mobile-gws-wiz-serp.3..0i67j0i20i263l2j0l5.12896.14945..15183...1.1..0.173.1139.0j9....2..0....1.......8..0i71j35i362i39j46i322i39i275j35i39j46i322i39j0i273j0i199i291j46i322i131j0i10i67j46i322i67j46i322j0i199i175i131i273j0i199i291i131.mFbC4fbnsIk#sbfbu=1&amp;pi=</a:t>
-            </a:r>
-            <a:r>
-              <a:rPr lang="en-US" sz="1400" dirty="0" err="1"/>
-              <a:t>libfuzzer</a:t>
-            </a:r>
-            <a:endParaRPr lang="en-US" sz="1400" dirty="0"/>
-          </a:p>
-          <a:p>
-            <a:endParaRPr lang="en-US" sz="1400" dirty="0"/>
-          </a:p>
-          <a:p>
-            <a:r>
-              <a:rPr lang="en-US" sz="1400" dirty="0"/>
-              <a:t>https://</a:t>
-            </a:r>
-            <a:r>
-              <a:rPr lang="en-US" sz="1400" dirty="0" err="1"/>
-              <a:t>scholar.google.com</a:t>
-            </a:r>
-            <a:r>
-              <a:rPr lang="en-US" sz="1400" dirty="0"/>
-              <a:t>/</a:t>
-            </a:r>
-            <a:r>
-              <a:rPr lang="en-US" sz="1400" dirty="0" err="1"/>
-              <a:t>scholar?start</a:t>
-            </a:r>
-            <a:r>
-              <a:rPr lang="en-US" sz="1400" dirty="0"/>
-              <a:t>=10&amp;q=</a:t>
-            </a:r>
-            <a:r>
-              <a:rPr lang="en-US" sz="1400" dirty="0" err="1"/>
-              <a:t>fuzz+testing+libfuzzer&amp;hl</a:t>
-            </a:r>
-            <a:r>
-              <a:rPr lang="en-US" sz="1400" dirty="0"/>
-              <a:t>=</a:t>
-            </a:r>
-            <a:r>
-              <a:rPr lang="en-US" sz="1400" dirty="0" err="1"/>
-              <a:t>en&amp;as_sdt</a:t>
-            </a:r>
-            <a:r>
-              <a:rPr lang="en-US" sz="1400" dirty="0"/>
-              <a:t>=0,33</a:t>
-            </a:r>
-          </a:p>
-          <a:p>
-            <a:endParaRPr lang="en-US" sz="1400" dirty="0"/>
-          </a:p>
-          <a:p>
-            <a:r>
-              <a:rPr lang="en-US" sz="1400" dirty="0">
-                <a:hlinkClick r:id="rId2"/>
-              </a:rPr>
-              <a:t>https://github.com/google/fuzzing/blob/master/tutorial/libFuzzerTutorial.md</a:t>
-            </a:r>
-            <a:endParaRPr lang="en-US" sz="1400" dirty="0"/>
-          </a:p>
-          <a:p>
-            <a:endParaRPr lang="en-US" sz="1400" dirty="0"/>
-          </a:p>
-          <a:p>
-            <a:endParaRPr lang="en-US" sz="1400" dirty="0"/>
-          </a:p>
-          <a:p>
-            <a:r>
-              <a:rPr lang="en-US" sz="1400" dirty="0"/>
-              <a:t>KLUZZER: </a:t>
-            </a:r>
-            <a:r>
-              <a:rPr lang="en-US" sz="1400" dirty="0" err="1"/>
-              <a:t>Whitebox</a:t>
-            </a:r>
-            <a:r>
-              <a:rPr lang="en-US" sz="1400" dirty="0"/>
-              <a:t> Fuzzing on Top of LLVM </a:t>
-            </a:r>
-            <a:r>
-              <a:rPr lang="en-US" sz="1400" dirty="0" err="1"/>
-              <a:t>bitcode</a:t>
-            </a:r>
-            <a:r>
-              <a:rPr lang="en-US" sz="1400" dirty="0"/>
-              <a:t> - </a:t>
-            </a:r>
-            <a:r>
-              <a:rPr lang="en-US" sz="1400" dirty="0">
-                <a:hlinkClick r:id="rId3"/>
-              </a:rPr>
-              <a:t>https://link.springer.com/chapter/10.1007/978-3-030-31784-3_14</a:t>
-            </a:r>
-            <a:endParaRPr lang="en-US" sz="1400" dirty="0"/>
-          </a:p>
-        </p:txBody>
-      </p:sp>
-    </p:spTree>
-    <p:extLst>
-      <p:ext uri="{BB962C8B-B14F-4D97-AF65-F5344CB8AC3E}">
-        <p14:creationId xmlns:p14="http://schemas.microsoft.com/office/powerpoint/2010/main" val="2966429166"/>
       </p:ext>
     </p:extLst>
   </p:cSld>

--- a/fuzzing.pptx
+++ b/fuzzing.pptx
@@ -4964,7 +4964,7 @@
         <p:spPr>
           <a:xfrm>
             <a:off x="280219" y="176981"/>
-            <a:ext cx="11695471" cy="6001643"/>
+            <a:ext cx="11695471" cy="6494085"/>
           </a:xfrm>
           <a:prstGeom prst="rect">
             <a:avLst/>
@@ -5172,6 +5172,19 @@
             </a:r>
           </a:p>
           <a:p>
+            <a:r>
+              <a:rPr lang="en-US" sz="1600" dirty="0"/>
+              <a:t> - </a:t>
+            </a:r>
+            <a:r>
+              <a:rPr lang="en-US" sz="1600" dirty="0">
+                <a:hlinkClick r:id="rId5"/>
+              </a:rPr>
+              <a:t>https://gitlab.informatik.uni-bremen.de/mhle/kluzzer_atva19</a:t>
+            </a:r>
+            <a:endParaRPr lang="en-US" sz="1600" dirty="0"/>
+          </a:p>
+          <a:p>
             <a:endParaRPr lang="en-US" sz="1600" dirty="0"/>
           </a:p>
           <a:p>
@@ -5195,7 +5208,7 @@
             </a:r>
             <a:r>
               <a:rPr lang="en-US" sz="1600" dirty="0">
-                <a:hlinkClick r:id="rId5"/>
+                <a:hlinkClick r:id="rId6"/>
               </a:rPr>
               <a:t>https://lcamtuf.blogspot.com/2014/11/pulling-jpegs-out-of-thin-air.html?m=1</a:t>
             </a:r>
@@ -5219,7 +5232,7 @@
             </a:r>
             <a:r>
               <a:rPr lang="en-US" sz="1600" dirty="0">
-                <a:hlinkClick r:id="rId6"/>
+                <a:hlinkClick r:id="rId7"/>
               </a:rPr>
               <a:t>https://hypothesis.readthedocs.io/en/latest/index.html</a:t>
             </a:r>
@@ -5249,7 +5262,7 @@
             </a:r>
             <a:r>
               <a:rPr lang="en-US" sz="1600" dirty="0">
-                <a:hlinkClick r:id="rId7"/>
+                <a:hlinkClick r:id="rId8"/>
               </a:rPr>
               <a:t>https://en.m.wikipedia.org/wiki/Symbolic_execution</a:t>
             </a:r>
@@ -5279,7 +5292,7 @@
             </a:r>
             <a:r>
               <a:rPr lang="en-US" sz="1600" dirty="0">
-                <a:hlinkClick r:id="rId8"/>
+                <a:hlinkClick r:id="rId9"/>
               </a:rPr>
               <a:t>https://en.m.wikipedia.org/wiki/Dynamic_program_analysis</a:t>
             </a:r>
@@ -5311,7 +5324,7 @@
             </a:r>
             <a:r>
               <a:rPr lang="en-US" sz="1600" dirty="0">
-                <a:hlinkClick r:id="rId9"/>
+                <a:hlinkClick r:id="rId10"/>
               </a:rPr>
               <a:t>https://jaxenter.com/clusterfuzz-open-sourced-155414.html</a:t>
             </a:r>
@@ -5755,7 +5768,7 @@
         <p:spPr>
           <a:xfrm>
             <a:off x="29182" y="2169573"/>
-            <a:ext cx="7383296" cy="646331"/>
+            <a:ext cx="7383296" cy="584775"/>
           </a:xfrm>
           <a:prstGeom prst="rect">
             <a:avLst/>
@@ -5769,13 +5782,13 @@
           <a:lstStyle/>
           <a:p>
             <a:r>
-              <a:rPr lang="en-US" dirty="0">
+              <a:rPr lang="en-US" sz="1600" dirty="0">
                 <a:hlinkClick r:id="rId2"/>
               </a:rPr>
               <a:t>https://medium.com/syncedreview/google-brain-tensorfuzz-debugs-neural-networks-with-coverage-guided-fuzzing-89843346fcda</a:t>
             </a:r>
             <a:r>
-              <a:rPr lang="en-US" dirty="0"/>
+              <a:rPr lang="en-US" sz="1600" dirty="0"/>
               <a:t>  </a:t>
             </a:r>
           </a:p>
@@ -6003,8 +6016,8 @@
         </p:nvSpPr>
         <p:spPr>
           <a:xfrm>
-            <a:off x="29180" y="3070000"/>
-            <a:ext cx="5710218" cy="369332"/>
+            <a:off x="29180" y="2817760"/>
+            <a:ext cx="5081776" cy="338554"/>
           </a:xfrm>
           <a:prstGeom prst="rect">
             <a:avLst/>
@@ -6018,12 +6031,50 @@
           <a:lstStyle/>
           <a:p>
             <a:r>
-              <a:rPr lang="en-US" dirty="0">
+              <a:rPr lang="en-US" sz="1600" dirty="0">
                 <a:hlinkClick r:id="rId5"/>
               </a:rPr>
               <a:t>http://proceedings.mlr.press/v97/odena19a/odena19a.pdf</a:t>
             </a:r>
-            <a:endParaRPr lang="en-US" dirty="0"/>
+            <a:endParaRPr lang="en-US" sz="1600" dirty="0"/>
+          </a:p>
+        </p:txBody>
+      </p:sp>
+      <p:sp>
+        <p:nvSpPr>
+          <p:cNvPr id="9" name="TextBox 8">
+            <a:extLst>
+              <a:ext uri="{FF2B5EF4-FFF2-40B4-BE49-F238E27FC236}">
+                <a16:creationId xmlns:a16="http://schemas.microsoft.com/office/drawing/2014/main" id="{38E65684-3955-CF44-A6B4-70EECD7B2AD8}"/>
+              </a:ext>
+            </a:extLst>
+          </p:cNvPr>
+          <p:cNvSpPr txBox="1"/>
+          <p:nvPr/>
+        </p:nvSpPr>
+        <p:spPr>
+          <a:xfrm>
+            <a:off x="29180" y="3176760"/>
+            <a:ext cx="3995837" cy="338554"/>
+          </a:xfrm>
+          <a:prstGeom prst="rect">
+            <a:avLst/>
+          </a:prstGeom>
+          <a:noFill/>
+        </p:spPr>
+        <p:txBody>
+          <a:bodyPr wrap="none" rtlCol="0">
+            <a:spAutoFit/>
+          </a:bodyPr>
+          <a:lstStyle/>
+          <a:p>
+            <a:r>
+              <a:rPr lang="en-US" sz="1600" dirty="0">
+                <a:hlinkClick r:id="rId6"/>
+              </a:rPr>
+              <a:t>https://github.com/brain-research/tensorfuzz</a:t>
+            </a:r>
+            <a:endParaRPr lang="en-US" sz="1600" dirty="0"/>
           </a:p>
         </p:txBody>
       </p:sp>
@@ -6072,7 +6123,7 @@
         <p:spPr>
           <a:xfrm>
             <a:off x="-1" y="0"/>
-            <a:ext cx="7120647" cy="584775"/>
+            <a:ext cx="4256691" cy="738664"/>
           </a:xfrm>
           <a:prstGeom prst="rect">
             <a:avLst/>
@@ -6086,8 +6137,15 @@
           <a:lstStyle/>
           <a:p>
             <a:r>
-              <a:rPr lang="en-US" sz="3200" b="1" dirty="0"/>
-              <a:t>Some Fuzz Testing Frameworks:</a:t>
+              <a:rPr lang="en-US" sz="2400" b="1" dirty="0"/>
+              <a:t>Some Fuzz Testing Frameworks</a:t>
+            </a:r>
+            <a:br>
+              <a:rPr lang="en-US" sz="2400" b="1" dirty="0"/>
+            </a:br>
+            <a:r>
+              <a:rPr lang="en-US" b="1" dirty="0"/>
+              <a:t> (web applications and cybersecurity):</a:t>
             </a:r>
           </a:p>
         </p:txBody>
@@ -6106,7 +6164,7 @@
         </p:nvSpPr>
         <p:spPr>
           <a:xfrm>
-            <a:off x="0" y="761755"/>
+            <a:off x="-1" y="1014004"/>
             <a:ext cx="12034684" cy="5016758"/>
           </a:xfrm>
           <a:prstGeom prst="rect">
@@ -6291,8 +6349,8 @@
         </p:nvSpPr>
         <p:spPr>
           <a:xfrm>
-            <a:off x="-1" y="0"/>
-            <a:ext cx="8549147" cy="6463308"/>
+            <a:off x="99848" y="1021241"/>
+            <a:ext cx="11992304" cy="5509200"/>
           </a:xfrm>
           <a:prstGeom prst="rect">
             <a:avLst/>
@@ -6306,295 +6364,349 @@
           <a:lstStyle/>
           <a:p>
             <a:r>
-              <a:rPr lang="en-US" dirty="0"/>
-              <a:t>A systematic review of fuzzing based on machine learning techniques</a:t>
-            </a:r>
-          </a:p>
-          <a:p>
-            <a:r>
-              <a:rPr lang="en-US" dirty="0"/>
-              <a:t>Yan </a:t>
-            </a:r>
-            <a:r>
-              <a:rPr lang="en-US" dirty="0" err="1"/>
+              <a:rPr lang="en-US" sz="1600" dirty="0"/>
+              <a:t>A systematic review of fuzzing based on machine learning techniques – by Yan </a:t>
+            </a:r>
+            <a:r>
+              <a:rPr lang="en-US" sz="1600" dirty="0" err="1"/>
               <a:t>Wanga</a:t>
             </a:r>
             <a:r>
-              <a:rPr lang="en-US" dirty="0"/>
+              <a:rPr lang="en-US" sz="1600" dirty="0"/>
               <a:t>, Peng </a:t>
             </a:r>
             <a:r>
-              <a:rPr lang="en-US" dirty="0" err="1"/>
+              <a:rPr lang="en-US" sz="1600" dirty="0" err="1"/>
               <a:t>Jiaa</a:t>
             </a:r>
             <a:r>
-              <a:rPr lang="en-US" dirty="0"/>
+              <a:rPr lang="en-US" sz="1600" dirty="0"/>
               <a:t>, </a:t>
             </a:r>
             <a:r>
-              <a:rPr lang="en-US" dirty="0" err="1"/>
+              <a:rPr lang="en-US" sz="1600" dirty="0" err="1"/>
               <a:t>Luping</a:t>
             </a:r>
             <a:r>
-              <a:rPr lang="en-US" dirty="0"/>
+              <a:rPr lang="en-US" sz="1600" dirty="0"/>
               <a:t> </a:t>
             </a:r>
             <a:r>
-              <a:rPr lang="en-US" dirty="0" err="1"/>
+              <a:rPr lang="en-US" sz="1600" dirty="0" err="1"/>
               <a:t>Liub</a:t>
             </a:r>
             <a:r>
-              <a:rPr lang="en-US" dirty="0"/>
+              <a:rPr lang="en-US" sz="1600" dirty="0"/>
               <a:t>, </a:t>
             </a:r>
             <a:r>
-              <a:rPr lang="en-US" dirty="0" err="1"/>
+              <a:rPr lang="en-US" sz="1600" dirty="0" err="1"/>
               <a:t>Jiayong</a:t>
             </a:r>
             <a:r>
-              <a:rPr lang="en-US" dirty="0"/>
+              <a:rPr lang="en-US" sz="1600" dirty="0"/>
               <a:t> Liua1</a:t>
             </a:r>
-            <a:endParaRPr lang="en-US" dirty="0">
+            <a:endParaRPr lang="en-US" sz="1600" dirty="0">
               <a:hlinkClick r:id="rId2"/>
             </a:endParaRPr>
           </a:p>
           <a:p>
             <a:r>
-              <a:rPr lang="en-US" dirty="0"/>
+              <a:rPr lang="en-US" sz="1600" dirty="0"/>
               <a:t> - </a:t>
             </a:r>
             <a:r>
-              <a:rPr lang="en-US" dirty="0">
+              <a:rPr lang="en-US" sz="1600" dirty="0">
                 <a:hlinkClick r:id="rId2"/>
               </a:rPr>
               <a:t>https://arxiv.org/pdf/1908.01262.pdf</a:t>
             </a:r>
-            <a:endParaRPr lang="en-US" dirty="0"/>
-          </a:p>
-          <a:p>
-            <a:endParaRPr lang="en-US" dirty="0"/>
-          </a:p>
-          <a:p>
-            <a:r>
-              <a:rPr lang="en-US" dirty="0" err="1"/>
+            <a:endParaRPr lang="en-US" sz="1600" dirty="0"/>
+          </a:p>
+          <a:p>
+            <a:endParaRPr lang="en-US" sz="1600" dirty="0"/>
+          </a:p>
+          <a:p>
+            <a:r>
+              <a:rPr lang="en-US" sz="1600" dirty="0" err="1"/>
               <a:t>NeuFuzz</a:t>
             </a:r>
             <a:r>
-              <a:rPr lang="en-US" dirty="0"/>
-              <a:t>: Efficient Fuzzing With Deep Neural Network </a:t>
-            </a:r>
-          </a:p>
-          <a:p>
-            <a:r>
-              <a:rPr lang="en-US" dirty="0" err="1"/>
+              <a:rPr lang="en-US" sz="1600" dirty="0"/>
+              <a:t>: Efficient Fuzzing With Deep Neural Network – by </a:t>
+            </a:r>
+            <a:r>
+              <a:rPr lang="en-US" sz="1600" dirty="0" err="1"/>
               <a:t>Yunchao</a:t>
             </a:r>
             <a:r>
-              <a:rPr lang="en-US" dirty="0"/>
+              <a:rPr lang="en-US" sz="1600" dirty="0"/>
               <a:t> Wang; </a:t>
             </a:r>
             <a:r>
-              <a:rPr lang="en-US" dirty="0" err="1"/>
+              <a:rPr lang="en-US" sz="1600" dirty="0" err="1"/>
               <a:t>Zehui</a:t>
             </a:r>
             <a:r>
-              <a:rPr lang="en-US" dirty="0"/>
+              <a:rPr lang="en-US" sz="1600" dirty="0"/>
               <a:t> Wu; </a:t>
             </a:r>
             <a:r>
-              <a:rPr lang="en-US" dirty="0" err="1"/>
+              <a:rPr lang="en-US" sz="1600" dirty="0" err="1"/>
               <a:t>Qiang</a:t>
             </a:r>
             <a:r>
-              <a:rPr lang="en-US" dirty="0"/>
+              <a:rPr lang="en-US" sz="1600" dirty="0"/>
               <a:t> Wei; </a:t>
             </a:r>
             <a:r>
-              <a:rPr lang="en-US" dirty="0" err="1"/>
+              <a:rPr lang="en-US" sz="1600" dirty="0" err="1"/>
               <a:t>Qingxian</a:t>
             </a:r>
             <a:r>
-              <a:rPr lang="en-US" dirty="0"/>
+              <a:rPr lang="en-US" sz="1600" dirty="0"/>
               <a:t> Wang</a:t>
             </a:r>
           </a:p>
           <a:p>
             <a:r>
-              <a:rPr lang="en-US" dirty="0"/>
+              <a:rPr lang="en-US" sz="1600" dirty="0"/>
               <a:t> - </a:t>
             </a:r>
             <a:r>
-              <a:rPr lang="en-US" dirty="0">
+              <a:rPr lang="en-US" sz="1600" dirty="0">
                 <a:hlinkClick r:id="rId3"/>
               </a:rPr>
               <a:t>https://ieeexplore.ieee.org/document/8672949</a:t>
             </a:r>
-            <a:endParaRPr lang="en-US" dirty="0"/>
-          </a:p>
-          <a:p>
-            <a:endParaRPr lang="en-US" dirty="0"/>
-          </a:p>
-          <a:p>
-            <a:r>
-              <a:rPr lang="en-US" dirty="0"/>
-              <a:t>Microsoft - Neural fuzzing: applying DNN to software security testing. Deep neural network (DNN) is used to learn the hidden vulnerability pattern from a large number of vulnerable and clean program paths to train a prediction model to classify whether paths are vulnerable. The </a:t>
-            </a:r>
-            <a:r>
-              <a:rPr lang="en-US" dirty="0" err="1"/>
-              <a:t>fuzzer</a:t>
-            </a:r>
-            <a:r>
-              <a:rPr lang="en-US" dirty="0"/>
-              <a:t> then prioritizes seed inputs that are capable of covering the vulnerable paths and assigns more mutation energy.  Overall, using neural fuzzing outperformed traditional AFL in most cases.</a:t>
-            </a:r>
-          </a:p>
-          <a:p>
-            <a:r>
-              <a:rPr lang="en-US" dirty="0"/>
+            <a:endParaRPr lang="en-US" sz="1600" dirty="0"/>
+          </a:p>
+          <a:p>
+            <a:endParaRPr lang="en-US" sz="1600" dirty="0"/>
+          </a:p>
+          <a:p>
+            <a:r>
+              <a:rPr lang="en-US" sz="1600" dirty="0"/>
+              <a:t>Microsoft - Neural fuzzing: applying Deep Neural Network (DNN) to software security testing … Overall, using neural fuzzing outperformed traditional AFL in most cases.</a:t>
+            </a:r>
+          </a:p>
+          <a:p>
+            <a:r>
+              <a:rPr lang="en-US" sz="1600" dirty="0"/>
               <a:t> - </a:t>
             </a:r>
             <a:r>
-              <a:rPr lang="en-US" dirty="0">
+              <a:rPr lang="en-US" sz="1600" dirty="0">
                 <a:hlinkClick r:id="rId4"/>
               </a:rPr>
               <a:t>https://www.microsoft.com/en-us/research/blog/neural-fuzzing/</a:t>
             </a:r>
-            <a:endParaRPr lang="en-US" dirty="0"/>
-          </a:p>
-          <a:p>
-            <a:endParaRPr lang="en-US" dirty="0"/>
-          </a:p>
-          <a:p>
-            <a:r>
-              <a:rPr lang="en-US" dirty="0"/>
-              <a:t>Coverage-guided Fuzzing for Feedforward Neural Networks</a:t>
-            </a:r>
-          </a:p>
-          <a:p>
-            <a:r>
-              <a:rPr lang="en-US" dirty="0" err="1"/>
+            <a:endParaRPr lang="en-US" sz="1600" dirty="0"/>
+          </a:p>
+          <a:p>
+            <a:endParaRPr lang="en-US" sz="1600" dirty="0"/>
+          </a:p>
+          <a:p>
+            <a:r>
+              <a:rPr lang="en-US" sz="1600" dirty="0"/>
+              <a:t>Coverage-guided Fuzzing for Feedforward Neural Networks – by </a:t>
+            </a:r>
+            <a:r>
+              <a:rPr lang="en-US" sz="1600" dirty="0" err="1"/>
               <a:t>Xiaofei</a:t>
             </a:r>
             <a:r>
-              <a:rPr lang="en-US" dirty="0"/>
+              <a:rPr lang="en-US" sz="1600" dirty="0"/>
               <a:t> </a:t>
             </a:r>
             <a:r>
-              <a:rPr lang="en-US" dirty="0" err="1"/>
+              <a:rPr lang="en-US" sz="1600" dirty="0" err="1"/>
               <a:t>Xie</a:t>
             </a:r>
             <a:r>
-              <a:rPr lang="en-US" dirty="0"/>
+              <a:rPr lang="en-US" sz="1600" dirty="0"/>
               <a:t>; </a:t>
             </a:r>
             <a:r>
-              <a:rPr lang="en-US" dirty="0" err="1"/>
+              <a:rPr lang="en-US" sz="1600" dirty="0" err="1"/>
               <a:t>Hongxu</a:t>
             </a:r>
             <a:r>
-              <a:rPr lang="en-US" dirty="0"/>
+              <a:rPr lang="en-US" sz="1600" dirty="0"/>
               <a:t> Chen; Yi Li; Lei Ma; Yang Liu; </a:t>
             </a:r>
             <a:r>
-              <a:rPr lang="en-US" dirty="0" err="1"/>
+              <a:rPr lang="en-US" sz="1600" dirty="0" err="1"/>
               <a:t>Jianjun</a:t>
             </a:r>
             <a:r>
-              <a:rPr lang="en-US" dirty="0"/>
+              <a:rPr lang="en-US" sz="1600" dirty="0"/>
               <a:t> Zhao - Singapore &amp; Japan</a:t>
             </a:r>
           </a:p>
           <a:p>
             <a:r>
-              <a:rPr lang="en-US" dirty="0"/>
+              <a:rPr lang="en-US" sz="1600" dirty="0"/>
               <a:t> - </a:t>
             </a:r>
             <a:r>
-              <a:rPr lang="en-US" dirty="0">
+              <a:rPr lang="en-US" sz="1600" dirty="0">
                 <a:hlinkClick r:id="rId5"/>
               </a:rPr>
               <a:t>https://www.ntu.edu.sg/home/yi_li/files/ase19-deephunter.pdf</a:t>
             </a:r>
-            <a:endParaRPr lang="en-US" dirty="0"/>
-          </a:p>
-          <a:p>
-            <a:endParaRPr lang="en-US" dirty="0"/>
-          </a:p>
-          <a:p>
-            <a:r>
-              <a:rPr lang="en-US" dirty="0" err="1"/>
+            <a:endParaRPr lang="en-US" sz="1600" dirty="0"/>
+          </a:p>
+          <a:p>
+            <a:endParaRPr lang="en-US" sz="1600" dirty="0"/>
+          </a:p>
+          <a:p>
+            <a:r>
+              <a:rPr lang="en-US" sz="1600" dirty="0" err="1"/>
               <a:t>ReluDiff</a:t>
             </a:r>
             <a:r>
-              <a:rPr lang="en-US" dirty="0"/>
-              <a:t>: Differential Verification of Deep Neural Networks</a:t>
-            </a:r>
-          </a:p>
-          <a:p>
-            <a:r>
-              <a:rPr lang="en-US" dirty="0"/>
-              <a:t>Brandon Paulsen; </a:t>
-            </a:r>
-            <a:r>
-              <a:rPr lang="en-US" dirty="0" err="1"/>
+              <a:rPr lang="en-US" sz="1600" dirty="0"/>
+              <a:t>: Differential Verification of Deep Neural Networks – by Brandon Paulsen; </a:t>
+            </a:r>
+            <a:r>
+              <a:rPr lang="en-US" sz="1600" dirty="0" err="1"/>
               <a:t>Jingbo</a:t>
             </a:r>
             <a:r>
-              <a:rPr lang="en-US" dirty="0"/>
+              <a:rPr lang="en-US" sz="1600" dirty="0"/>
               <a:t> Wang; Chao Wang</a:t>
             </a:r>
           </a:p>
           <a:p>
             <a:r>
-              <a:rPr lang="en-US" dirty="0"/>
+              <a:rPr lang="en-US" sz="1600" dirty="0"/>
               <a:t> - </a:t>
             </a:r>
             <a:r>
-              <a:rPr lang="en-US" dirty="0">
+              <a:rPr lang="en-US" sz="1600" dirty="0">
                 <a:hlinkClick r:id="rId6"/>
               </a:rPr>
               <a:t>https://arxiv.org/pdf/2001.03662.pdf</a:t>
             </a:r>
-            <a:endParaRPr lang="en-US" dirty="0"/>
-          </a:p>
-        </p:txBody>
-      </p:sp>
-      <p:pic>
-        <p:nvPicPr>
-          <p:cNvPr id="5" name="Picture 4">
-            <a:extLst>
-              <a:ext uri="{FF2B5EF4-FFF2-40B4-BE49-F238E27FC236}">
-                <a16:creationId xmlns:a16="http://schemas.microsoft.com/office/drawing/2014/main" id="{93B085F6-B951-C042-8039-6B3F9835FC18}"/>
-              </a:ext>
-            </a:extLst>
-          </p:cNvPr>
-          <p:cNvPicPr>
-            <a:picLocks noChangeAspect="1"/>
-          </p:cNvPicPr>
-          <p:nvPr/>
-        </p:nvPicPr>
-        <p:blipFill rotWithShape="1">
-          <a:blip r:embed="rId7" cstate="email">
-            <a:extLst>
-              <a:ext uri="{28A0092B-C50C-407E-A947-70E740481C1C}">
-                <a14:useLocalDpi xmlns:a14="http://schemas.microsoft.com/office/drawing/2010/main"/>
-              </a:ext>
-            </a:extLst>
-          </a:blip>
-          <a:srcRect/>
-          <a:stretch/>
-        </p:blipFill>
-        <p:spPr>
-          <a:xfrm>
-            <a:off x="8549147" y="386531"/>
-            <a:ext cx="3642853" cy="1866900"/>
-          </a:xfrm>
-          <a:prstGeom prst="rect">
-            <a:avLst/>
-          </a:prstGeom>
-        </p:spPr>
-      </p:pic>
+            <a:r>
+              <a:rPr lang="en-US" sz="1600" dirty="0"/>
+              <a:t>.      </a:t>
+            </a:r>
+          </a:p>
+          <a:p>
+            <a:endParaRPr lang="en-US" sz="1600" dirty="0"/>
+          </a:p>
+          <a:p>
+            <a:r>
+              <a:rPr lang="en-US" sz="1600" dirty="0" err="1"/>
+              <a:t>FuzzerGym</a:t>
+            </a:r>
+            <a:r>
+              <a:rPr lang="en-US" sz="1600" dirty="0"/>
+              <a:t>: A Competitive Framework for Fuzzing and Learning – by William </a:t>
+            </a:r>
+            <a:r>
+              <a:rPr lang="en-US" sz="1600" dirty="0" err="1"/>
+              <a:t>Drozd</a:t>
+            </a:r>
+            <a:r>
+              <a:rPr lang="en-US" sz="1600" dirty="0"/>
+              <a:t> &amp; Michael D. Wagner, CMU</a:t>
+            </a:r>
+          </a:p>
+          <a:p>
+            <a:r>
+              <a:rPr lang="en-US" sz="1600" dirty="0"/>
+              <a:t> - </a:t>
+            </a:r>
+            <a:r>
+              <a:rPr lang="en-US" sz="1600" dirty="0">
+                <a:hlinkClick r:id="rId7"/>
+              </a:rPr>
+              <a:t>https://arxiv.org/pdf/1807.07490.p</a:t>
+            </a:r>
+            <a:r>
+              <a:rPr lang="en-US" sz="1600" dirty="0">
+                <a:hlinkClick r:id="rId7"/>
+              </a:rPr>
+              <a:t>df</a:t>
+            </a:r>
+            <a:endParaRPr lang="en-US" sz="1600" dirty="0"/>
+          </a:p>
+          <a:p>
+            <a:endParaRPr lang="en-US" sz="1600" dirty="0"/>
+          </a:p>
+          <a:p>
+            <a:r>
+              <a:rPr lang="en-US" sz="1600" dirty="0"/>
+              <a:t>A systematic review of fuzzing based on machine learning techniques – by Yan </a:t>
+            </a:r>
+            <a:r>
+              <a:rPr lang="en-US" sz="1600" dirty="0" err="1"/>
+              <a:t>Wanga</a:t>
+            </a:r>
+            <a:r>
+              <a:rPr lang="en-US" sz="1600" dirty="0"/>
+              <a:t>, Peng </a:t>
+            </a:r>
+            <a:r>
+              <a:rPr lang="en-US" sz="1600" dirty="0" err="1"/>
+              <a:t>Jiaa</a:t>
+            </a:r>
+            <a:r>
+              <a:rPr lang="en-US" sz="1600" dirty="0"/>
+              <a:t>, </a:t>
+            </a:r>
+            <a:r>
+              <a:rPr lang="en-US" sz="1600" dirty="0" err="1"/>
+              <a:t>Luping</a:t>
+            </a:r>
+            <a:r>
+              <a:rPr lang="en-US" sz="1600" dirty="0"/>
+              <a:t> </a:t>
+            </a:r>
+            <a:r>
+              <a:rPr lang="en-US" sz="1600" dirty="0" err="1"/>
+              <a:t>Liub</a:t>
+            </a:r>
+            <a:r>
+              <a:rPr lang="en-US" sz="1600" dirty="0"/>
+              <a:t>, </a:t>
+            </a:r>
+            <a:r>
+              <a:rPr lang="en-US" sz="1600" dirty="0" err="1"/>
+              <a:t>Jiayong</a:t>
+            </a:r>
+            <a:r>
+              <a:rPr lang="en-US" sz="1600" dirty="0"/>
+              <a:t> </a:t>
+            </a:r>
+            <a:r>
+              <a:rPr lang="en-US" sz="1600" dirty="0" err="1"/>
+              <a:t>Liua</a:t>
+            </a:r>
+            <a:r>
+              <a:rPr lang="en-US" sz="1600" dirty="0"/>
+              <a:t>, China</a:t>
+            </a:r>
+          </a:p>
+          <a:p>
+            <a:r>
+              <a:rPr lang="en-US" sz="1600" dirty="0"/>
+              <a:t> - </a:t>
+            </a:r>
+            <a:r>
+              <a:rPr lang="en-US" sz="1600" dirty="0">
+                <a:hlinkClick r:id="rId2"/>
+              </a:rPr>
+              <a:t>https://arxiv.org/pdf/1908.01262.pdf</a:t>
+            </a:r>
+            <a:endParaRPr lang="en-US" sz="1600" dirty="0"/>
+          </a:p>
+        </p:txBody>
+      </p:sp>
     </p:spTree>
     <p:extLst>
       <p:ext uri="{BB962C8B-B14F-4D97-AF65-F5344CB8AC3E}">

--- a/fuzzing.pptx
+++ b/fuzzing.pptx
@@ -266,7 +266,7 @@
           <a:p>
             <a:fld id="{F7C34817-32A6-8B49-A0F9-E5B31E458402}" type="datetimeFigureOut">
               <a:rPr lang="en-US" smtClean="0"/>
-              <a:t>2/9/20</a:t>
+              <a:t>2/10/20</a:t>
             </a:fld>
             <a:endParaRPr lang="en-US"/>
           </a:p>
@@ -464,7 +464,7 @@
           <a:p>
             <a:fld id="{F7C34817-32A6-8B49-A0F9-E5B31E458402}" type="datetimeFigureOut">
               <a:rPr lang="en-US" smtClean="0"/>
-              <a:t>2/9/20</a:t>
+              <a:t>2/10/20</a:t>
             </a:fld>
             <a:endParaRPr lang="en-US"/>
           </a:p>
@@ -672,7 +672,7 @@
           <a:p>
             <a:fld id="{F7C34817-32A6-8B49-A0F9-E5B31E458402}" type="datetimeFigureOut">
               <a:rPr lang="en-US" smtClean="0"/>
-              <a:t>2/9/20</a:t>
+              <a:t>2/10/20</a:t>
             </a:fld>
             <a:endParaRPr lang="en-US"/>
           </a:p>
@@ -870,7 +870,7 @@
           <a:p>
             <a:fld id="{F7C34817-32A6-8B49-A0F9-E5B31E458402}" type="datetimeFigureOut">
               <a:rPr lang="en-US" smtClean="0"/>
-              <a:t>2/9/20</a:t>
+              <a:t>2/10/20</a:t>
             </a:fld>
             <a:endParaRPr lang="en-US"/>
           </a:p>
@@ -1145,7 +1145,7 @@
           <a:p>
             <a:fld id="{F7C34817-32A6-8B49-A0F9-E5B31E458402}" type="datetimeFigureOut">
               <a:rPr lang="en-US" smtClean="0"/>
-              <a:t>2/9/20</a:t>
+              <a:t>2/10/20</a:t>
             </a:fld>
             <a:endParaRPr lang="en-US"/>
           </a:p>
@@ -1410,7 +1410,7 @@
           <a:p>
             <a:fld id="{F7C34817-32A6-8B49-A0F9-E5B31E458402}" type="datetimeFigureOut">
               <a:rPr lang="en-US" smtClean="0"/>
-              <a:t>2/9/20</a:t>
+              <a:t>2/10/20</a:t>
             </a:fld>
             <a:endParaRPr lang="en-US"/>
           </a:p>
@@ -1822,7 +1822,7 @@
           <a:p>
             <a:fld id="{F7C34817-32A6-8B49-A0F9-E5B31E458402}" type="datetimeFigureOut">
               <a:rPr lang="en-US" smtClean="0"/>
-              <a:t>2/9/20</a:t>
+              <a:t>2/10/20</a:t>
             </a:fld>
             <a:endParaRPr lang="en-US"/>
           </a:p>
@@ -1963,7 +1963,7 @@
           <a:p>
             <a:fld id="{F7C34817-32A6-8B49-A0F9-E5B31E458402}" type="datetimeFigureOut">
               <a:rPr lang="en-US" smtClean="0"/>
-              <a:t>2/9/20</a:t>
+              <a:t>2/10/20</a:t>
             </a:fld>
             <a:endParaRPr lang="en-US"/>
           </a:p>
@@ -2076,7 +2076,7 @@
           <a:p>
             <a:fld id="{F7C34817-32A6-8B49-A0F9-E5B31E458402}" type="datetimeFigureOut">
               <a:rPr lang="en-US" smtClean="0"/>
-              <a:t>2/9/20</a:t>
+              <a:t>2/10/20</a:t>
             </a:fld>
             <a:endParaRPr lang="en-US"/>
           </a:p>
@@ -2387,7 +2387,7 @@
           <a:p>
             <a:fld id="{F7C34817-32A6-8B49-A0F9-E5B31E458402}" type="datetimeFigureOut">
               <a:rPr lang="en-US" smtClean="0"/>
-              <a:t>2/9/20</a:t>
+              <a:t>2/10/20</a:t>
             </a:fld>
             <a:endParaRPr lang="en-US"/>
           </a:p>
@@ -2675,7 +2675,7 @@
           <a:p>
             <a:fld id="{F7C34817-32A6-8B49-A0F9-E5B31E458402}" type="datetimeFigureOut">
               <a:rPr lang="en-US" smtClean="0"/>
-              <a:t>2/9/20</a:t>
+              <a:t>2/10/20</a:t>
             </a:fld>
             <a:endParaRPr lang="en-US"/>
           </a:p>
@@ -2916,7 +2916,7 @@
           <a:p>
             <a:fld id="{F7C34817-32A6-8B49-A0F9-E5B31E458402}" type="datetimeFigureOut">
               <a:rPr lang="en-US" smtClean="0"/>
-              <a:t>2/9/20</a:t>
+              <a:t>2/10/20</a:t>
             </a:fld>
             <a:endParaRPr lang="en-US"/>
           </a:p>
@@ -6349,8 +6349,8 @@
         </p:nvSpPr>
         <p:spPr>
           <a:xfrm>
-            <a:off x="99848" y="1021241"/>
-            <a:ext cx="11992304" cy="5509200"/>
+            <a:off x="96460" y="652527"/>
+            <a:ext cx="11992304" cy="5755422"/>
           </a:xfrm>
           <a:prstGeom prst="rect">
             <a:avLst/>
@@ -6488,13 +6488,7 @@
           <a:p>
             <a:r>
               <a:rPr lang="en-US" sz="1600" dirty="0"/>
-              <a:t>Microsoft - Neural fuzzing: applying Deep Neural Network (DNN) to software security testing … Overall, using neural fuzzing outperformed traditional AFL in most cases.</a:t>
-            </a:r>
-          </a:p>
-          <a:p>
-            <a:r>
-              <a:rPr lang="en-US" sz="1600" dirty="0"/>
-              <a:t> - </a:t>
+              <a:t>Microsoft - Neural fuzzing: applying Deep Neural Network (DNN) to software security testing … Overall, using neural fuzzing outperformed traditional AFL in most cases.  - </a:t>
             </a:r>
             <a:r>
               <a:rPr lang="en-US" sz="1600" dirty="0">
@@ -6542,13 +6536,7 @@
             </a:r>
             <a:r>
               <a:rPr lang="en-US" sz="1600" dirty="0"/>
-              <a:t> Zhao - Singapore &amp; Japan</a:t>
-            </a:r>
-          </a:p>
-          <a:p>
-            <a:r>
-              <a:rPr lang="en-US" sz="1600" dirty="0"/>
-              <a:t> - </a:t>
+              <a:t> Zhao - Singapore &amp; Japan  - </a:t>
             </a:r>
             <a:r>
               <a:rPr lang="en-US" sz="1600" dirty="0">
@@ -6625,13 +6613,7 @@
               <a:rPr lang="en-US" sz="1600" dirty="0">
                 <a:hlinkClick r:id="rId7"/>
               </a:rPr>
-              <a:t>https://arxiv.org/pdf/1807.07490.p</a:t>
-            </a:r>
-            <a:r>
-              <a:rPr lang="en-US" sz="1600" dirty="0">
-                <a:hlinkClick r:id="rId7"/>
-              </a:rPr>
-              <a:t>df</a:t>
+              <a:t>https://arxiv.org/pdf/1807.07490.pdf</a:t>
             </a:r>
             <a:endParaRPr lang="en-US" sz="1600" dirty="0"/>
           </a:p>
@@ -6703,7 +6685,69 @@
               </a:rPr>
               <a:t>https://arxiv.org/pdf/1908.01262.pdf</a:t>
             </a:r>
+            <a:r>
+              <a:rPr lang="en-US" sz="1600" dirty="0"/>
+              <a:t>  </a:t>
+            </a:r>
+          </a:p>
+          <a:p>
             <a:endParaRPr lang="en-US" sz="1600" dirty="0"/>
+          </a:p>
+          <a:p>
+            <a:r>
+              <a:rPr lang="en-US" sz="1600" dirty="0"/>
+              <a:t>The Art, Science, and Engineering of Fuzzing: A Survey (2019) – by Valentin J.M. </a:t>
+            </a:r>
+            <a:r>
+              <a:rPr lang="en-US" sz="1600" dirty="0" err="1"/>
+              <a:t>Man`es</a:t>
+            </a:r>
+            <a:r>
+              <a:rPr lang="en-US" sz="1600" dirty="0"/>
+              <a:t>, </a:t>
+            </a:r>
+            <a:r>
+              <a:rPr lang="en-US" sz="1600" dirty="0" err="1"/>
+              <a:t>HyungSeok</a:t>
+            </a:r>
+            <a:r>
+              <a:rPr lang="en-US" sz="1600" dirty="0"/>
+              <a:t> Han, </a:t>
+            </a:r>
+            <a:r>
+              <a:rPr lang="en-US" sz="1600" dirty="0" err="1"/>
+              <a:t>Choongwoo</a:t>
+            </a:r>
+            <a:r>
+              <a:rPr lang="en-US" sz="1600" dirty="0"/>
+              <a:t> Han, Sang </a:t>
+            </a:r>
+            <a:r>
+              <a:rPr lang="en-US" sz="1600" dirty="0" err="1"/>
+              <a:t>Kil</a:t>
+            </a:r>
+            <a:r>
+              <a:rPr lang="en-US" sz="1600" dirty="0"/>
+              <a:t> Cha, Manuel </a:t>
+            </a:r>
+            <a:r>
+              <a:rPr lang="en-US" sz="1600" dirty="0" err="1"/>
+              <a:t>Egele</a:t>
+            </a:r>
+            <a:r>
+              <a:rPr lang="en-US" sz="1600" dirty="0"/>
+              <a:t>, Edward J. Schwartz, and Maverick Woo - </a:t>
+            </a:r>
+            <a:r>
+              <a:rPr lang="en-US" sz="1600" dirty="0">
+                <a:hlinkClick r:id="rId8"/>
+              </a:rPr>
+              <a:t>https://arxiv.org/pdf/1812.00140.pdf</a:t>
+            </a:r>
+            <a:r>
+              <a:rPr lang="en-US" sz="1600" dirty="0"/>
+              <a:t> </a:t>
+            </a:r>
           </a:p>
         </p:txBody>
       </p:sp>

--- a/fuzzing.pptx
+++ b/fuzzing.pptx
@@ -4,6 +4,9 @@
   <p:sldMasterIdLst>
     <p:sldMasterId id="2147483648" r:id="rId1"/>
   </p:sldMasterIdLst>
+  <p:notesMasterIdLst>
+    <p:notesMasterId r:id="rId11"/>
+  </p:notesMasterIdLst>
   <p:sldIdLst>
     <p:sldId id="256" r:id="rId2"/>
     <p:sldId id="257" r:id="rId3"/>
@@ -12,7 +15,8 @@
     <p:sldId id="262" r:id="rId6"/>
     <p:sldId id="259" r:id="rId7"/>
     <p:sldId id="258" r:id="rId8"/>
-    <p:sldId id="261" r:id="rId9"/>
+    <p:sldId id="265" r:id="rId9"/>
+    <p:sldId id="261" r:id="rId10"/>
   </p:sldIdLst>
   <p:sldSz cx="12192000" cy="6858000"/>
   <p:notesSz cx="6858000" cy="9144000"/>
@@ -117,6 +121,439 @@
     </p:ext>
   </p:extLst>
 </p:presentation>
+</file>
+
+<file path=ppt/notesMasters/notesMaster1.xml><?xml version="1.0" encoding="utf-8"?>
+<p:notesMaster xmlns:a="http://schemas.openxmlformats.org/drawingml/2006/main" xmlns:r="http://schemas.openxmlformats.org/officeDocument/2006/relationships" xmlns:p="http://schemas.openxmlformats.org/presentationml/2006/main">
+  <p:cSld>
+    <p:bg>
+      <p:bgRef idx="1001">
+        <a:schemeClr val="bg1"/>
+      </p:bgRef>
+    </p:bg>
+    <p:spTree>
+      <p:nvGrpSpPr>
+        <p:cNvPr id="1" name=""/>
+        <p:cNvGrpSpPr/>
+        <p:nvPr/>
+      </p:nvGrpSpPr>
+      <p:grpSpPr>
+        <a:xfrm>
+          <a:off x="0" y="0"/>
+          <a:ext cx="0" cy="0"/>
+          <a:chOff x="0" y="0"/>
+          <a:chExt cx="0" cy="0"/>
+        </a:xfrm>
+      </p:grpSpPr>
+      <p:sp>
+        <p:nvSpPr>
+          <p:cNvPr id="2" name="Header Placeholder 1"/>
+          <p:cNvSpPr>
+            <a:spLocks noGrp="1"/>
+          </p:cNvSpPr>
+          <p:nvPr>
+            <p:ph type="hdr" sz="quarter"/>
+          </p:nvPr>
+        </p:nvSpPr>
+        <p:spPr>
+          <a:xfrm>
+            <a:off x="0" y="0"/>
+            <a:ext cx="2971800" cy="458788"/>
+          </a:xfrm>
+          <a:prstGeom prst="rect">
+            <a:avLst/>
+          </a:prstGeom>
+        </p:spPr>
+        <p:txBody>
+          <a:bodyPr vert="horz" lIns="91440" tIns="45720" rIns="91440" bIns="45720" rtlCol="0"/>
+          <a:lstStyle>
+            <a:lvl1pPr algn="l">
+              <a:defRPr sz="1200"/>
+            </a:lvl1pPr>
+          </a:lstStyle>
+          <a:p>
+            <a:endParaRPr lang="en-US"/>
+          </a:p>
+        </p:txBody>
+      </p:sp>
+      <p:sp>
+        <p:nvSpPr>
+          <p:cNvPr id="3" name="Date Placeholder 2"/>
+          <p:cNvSpPr>
+            <a:spLocks noGrp="1"/>
+          </p:cNvSpPr>
+          <p:nvPr>
+            <p:ph type="dt" idx="1"/>
+          </p:nvPr>
+        </p:nvSpPr>
+        <p:spPr>
+          <a:xfrm>
+            <a:off x="3884613" y="0"/>
+            <a:ext cx="2971800" cy="458788"/>
+          </a:xfrm>
+          <a:prstGeom prst="rect">
+            <a:avLst/>
+          </a:prstGeom>
+        </p:spPr>
+        <p:txBody>
+          <a:bodyPr vert="horz" lIns="91440" tIns="45720" rIns="91440" bIns="45720" rtlCol="0"/>
+          <a:lstStyle>
+            <a:lvl1pPr algn="r">
+              <a:defRPr sz="1200"/>
+            </a:lvl1pPr>
+          </a:lstStyle>
+          <a:p>
+            <a:fld id="{681946D7-9ACD-5741-9A93-6BC3A876858B}" type="datetimeFigureOut">
+              <a:rPr lang="en-US" smtClean="0"/>
+              <a:t>2/10/20</a:t>
+            </a:fld>
+            <a:endParaRPr lang="en-US"/>
+          </a:p>
+        </p:txBody>
+      </p:sp>
+      <p:sp>
+        <p:nvSpPr>
+          <p:cNvPr id="4" name="Slide Image Placeholder 3"/>
+          <p:cNvSpPr>
+            <a:spLocks noGrp="1" noRot="1" noChangeAspect="1"/>
+          </p:cNvSpPr>
+          <p:nvPr>
+            <p:ph type="sldImg" idx="2"/>
+          </p:nvPr>
+        </p:nvSpPr>
+        <p:spPr>
+          <a:xfrm>
+            <a:off x="685800" y="1143000"/>
+            <a:ext cx="5486400" cy="3086100"/>
+          </a:xfrm>
+          <a:prstGeom prst="rect">
+            <a:avLst/>
+          </a:prstGeom>
+          <a:noFill/>
+          <a:ln w="12700">
+            <a:solidFill>
+              <a:prstClr val="black"/>
+            </a:solidFill>
+          </a:ln>
+        </p:spPr>
+        <p:txBody>
+          <a:bodyPr vert="horz" lIns="91440" tIns="45720" rIns="91440" bIns="45720" rtlCol="0" anchor="ctr"/>
+          <a:lstStyle/>
+          <a:p>
+            <a:endParaRPr lang="en-US"/>
+          </a:p>
+        </p:txBody>
+      </p:sp>
+      <p:sp>
+        <p:nvSpPr>
+          <p:cNvPr id="5" name="Notes Placeholder 4"/>
+          <p:cNvSpPr>
+            <a:spLocks noGrp="1"/>
+          </p:cNvSpPr>
+          <p:nvPr>
+            <p:ph type="body" sz="quarter" idx="3"/>
+          </p:nvPr>
+        </p:nvSpPr>
+        <p:spPr>
+          <a:xfrm>
+            <a:off x="685800" y="4400550"/>
+            <a:ext cx="5486400" cy="3600450"/>
+          </a:xfrm>
+          <a:prstGeom prst="rect">
+            <a:avLst/>
+          </a:prstGeom>
+        </p:spPr>
+        <p:txBody>
+          <a:bodyPr vert="horz" lIns="91440" tIns="45720" rIns="91440" bIns="45720" rtlCol="0"/>
+          <a:lstStyle/>
+          <a:p>
+            <a:pPr lvl="0"/>
+            <a:r>
+              <a:rPr lang="en-US"/>
+              <a:t>Click to edit Master text styles</a:t>
+            </a:r>
+          </a:p>
+          <a:p>
+            <a:pPr lvl="1"/>
+            <a:r>
+              <a:rPr lang="en-US"/>
+              <a:t>Second level</a:t>
+            </a:r>
+          </a:p>
+          <a:p>
+            <a:pPr lvl="2"/>
+            <a:r>
+              <a:rPr lang="en-US"/>
+              <a:t>Third level</a:t>
+            </a:r>
+          </a:p>
+          <a:p>
+            <a:pPr lvl="3"/>
+            <a:r>
+              <a:rPr lang="en-US"/>
+              <a:t>Fourth level</a:t>
+            </a:r>
+          </a:p>
+          <a:p>
+            <a:pPr lvl="4"/>
+            <a:r>
+              <a:rPr lang="en-US"/>
+              <a:t>Fifth level</a:t>
+            </a:r>
+          </a:p>
+        </p:txBody>
+      </p:sp>
+      <p:sp>
+        <p:nvSpPr>
+          <p:cNvPr id="6" name="Footer Placeholder 5"/>
+          <p:cNvSpPr>
+            <a:spLocks noGrp="1"/>
+          </p:cNvSpPr>
+          <p:nvPr>
+            <p:ph type="ftr" sz="quarter" idx="4"/>
+          </p:nvPr>
+        </p:nvSpPr>
+        <p:spPr>
+          <a:xfrm>
+            <a:off x="0" y="8685213"/>
+            <a:ext cx="2971800" cy="458787"/>
+          </a:xfrm>
+          <a:prstGeom prst="rect">
+            <a:avLst/>
+          </a:prstGeom>
+        </p:spPr>
+        <p:txBody>
+          <a:bodyPr vert="horz" lIns="91440" tIns="45720" rIns="91440" bIns="45720" rtlCol="0" anchor="b"/>
+          <a:lstStyle>
+            <a:lvl1pPr algn="l">
+              <a:defRPr sz="1200"/>
+            </a:lvl1pPr>
+          </a:lstStyle>
+          <a:p>
+            <a:endParaRPr lang="en-US"/>
+          </a:p>
+        </p:txBody>
+      </p:sp>
+      <p:sp>
+        <p:nvSpPr>
+          <p:cNvPr id="7" name="Slide Number Placeholder 6"/>
+          <p:cNvSpPr>
+            <a:spLocks noGrp="1"/>
+          </p:cNvSpPr>
+          <p:nvPr>
+            <p:ph type="sldNum" sz="quarter" idx="5"/>
+          </p:nvPr>
+        </p:nvSpPr>
+        <p:spPr>
+          <a:xfrm>
+            <a:off x="3884613" y="8685213"/>
+            <a:ext cx="2971800" cy="458787"/>
+          </a:xfrm>
+          <a:prstGeom prst="rect">
+            <a:avLst/>
+          </a:prstGeom>
+        </p:spPr>
+        <p:txBody>
+          <a:bodyPr vert="horz" lIns="91440" tIns="45720" rIns="91440" bIns="45720" rtlCol="0" anchor="b"/>
+          <a:lstStyle>
+            <a:lvl1pPr algn="r">
+              <a:defRPr sz="1200"/>
+            </a:lvl1pPr>
+          </a:lstStyle>
+          <a:p>
+            <a:fld id="{CA11E873-B224-394B-B916-6479B7FB4561}" type="slidenum">
+              <a:rPr lang="en-US" smtClean="0"/>
+              <a:t>‹#›</a:t>
+            </a:fld>
+            <a:endParaRPr lang="en-US"/>
+          </a:p>
+        </p:txBody>
+      </p:sp>
+    </p:spTree>
+    <p:extLst>
+      <p:ext uri="{BB962C8B-B14F-4D97-AF65-F5344CB8AC3E}">
+        <p14:creationId xmlns:p14="http://schemas.microsoft.com/office/powerpoint/2010/main" val="870186475"/>
+      </p:ext>
+    </p:extLst>
+  </p:cSld>
+  <p:clrMap bg1="lt1" tx1="dk1" bg2="lt2" tx2="dk2" accent1="accent1" accent2="accent2" accent3="accent3" accent4="accent4" accent5="accent5" accent6="accent6" hlink="hlink" folHlink="folHlink"/>
+  <p:notesStyle>
+    <a:lvl1pPr marL="0" algn="l" defTabSz="914400" rtl="0" eaLnBrk="1" latinLnBrk="0" hangingPunct="1">
+      <a:defRPr sz="1200" kern="1200">
+        <a:solidFill>
+          <a:schemeClr val="tx1"/>
+        </a:solidFill>
+        <a:latin typeface="+mn-lt"/>
+        <a:ea typeface="+mn-ea"/>
+        <a:cs typeface="+mn-cs"/>
+      </a:defRPr>
+    </a:lvl1pPr>
+    <a:lvl2pPr marL="457200" algn="l" defTabSz="914400" rtl="0" eaLnBrk="1" latinLnBrk="0" hangingPunct="1">
+      <a:defRPr sz="1200" kern="1200">
+        <a:solidFill>
+          <a:schemeClr val="tx1"/>
+        </a:solidFill>
+        <a:latin typeface="+mn-lt"/>
+        <a:ea typeface="+mn-ea"/>
+        <a:cs typeface="+mn-cs"/>
+      </a:defRPr>
+    </a:lvl2pPr>
+    <a:lvl3pPr marL="914400" algn="l" defTabSz="914400" rtl="0" eaLnBrk="1" latinLnBrk="0" hangingPunct="1">
+      <a:defRPr sz="1200" kern="1200">
+        <a:solidFill>
+          <a:schemeClr val="tx1"/>
+        </a:solidFill>
+        <a:latin typeface="+mn-lt"/>
+        <a:ea typeface="+mn-ea"/>
+        <a:cs typeface="+mn-cs"/>
+      </a:defRPr>
+    </a:lvl3pPr>
+    <a:lvl4pPr marL="1371600" algn="l" defTabSz="914400" rtl="0" eaLnBrk="1" latinLnBrk="0" hangingPunct="1">
+      <a:defRPr sz="1200" kern="1200">
+        <a:solidFill>
+          <a:schemeClr val="tx1"/>
+        </a:solidFill>
+        <a:latin typeface="+mn-lt"/>
+        <a:ea typeface="+mn-ea"/>
+        <a:cs typeface="+mn-cs"/>
+      </a:defRPr>
+    </a:lvl4pPr>
+    <a:lvl5pPr marL="1828800" algn="l" defTabSz="914400" rtl="0" eaLnBrk="1" latinLnBrk="0" hangingPunct="1">
+      <a:defRPr sz="1200" kern="1200">
+        <a:solidFill>
+          <a:schemeClr val="tx1"/>
+        </a:solidFill>
+        <a:latin typeface="+mn-lt"/>
+        <a:ea typeface="+mn-ea"/>
+        <a:cs typeface="+mn-cs"/>
+      </a:defRPr>
+    </a:lvl5pPr>
+    <a:lvl6pPr marL="2286000" algn="l" defTabSz="914400" rtl="0" eaLnBrk="1" latinLnBrk="0" hangingPunct="1">
+      <a:defRPr sz="1200" kern="1200">
+        <a:solidFill>
+          <a:schemeClr val="tx1"/>
+        </a:solidFill>
+        <a:latin typeface="+mn-lt"/>
+        <a:ea typeface="+mn-ea"/>
+        <a:cs typeface="+mn-cs"/>
+      </a:defRPr>
+    </a:lvl6pPr>
+    <a:lvl7pPr marL="2743200" algn="l" defTabSz="914400" rtl="0" eaLnBrk="1" latinLnBrk="0" hangingPunct="1">
+      <a:defRPr sz="1200" kern="1200">
+        <a:solidFill>
+          <a:schemeClr val="tx1"/>
+        </a:solidFill>
+        <a:latin typeface="+mn-lt"/>
+        <a:ea typeface="+mn-ea"/>
+        <a:cs typeface="+mn-cs"/>
+      </a:defRPr>
+    </a:lvl7pPr>
+    <a:lvl8pPr marL="3200400" algn="l" defTabSz="914400" rtl="0" eaLnBrk="1" latinLnBrk="0" hangingPunct="1">
+      <a:defRPr sz="1200" kern="1200">
+        <a:solidFill>
+          <a:schemeClr val="tx1"/>
+        </a:solidFill>
+        <a:latin typeface="+mn-lt"/>
+        <a:ea typeface="+mn-ea"/>
+        <a:cs typeface="+mn-cs"/>
+      </a:defRPr>
+    </a:lvl8pPr>
+    <a:lvl9pPr marL="3657600" algn="l" defTabSz="914400" rtl="0" eaLnBrk="1" latinLnBrk="0" hangingPunct="1">
+      <a:defRPr sz="1200" kern="1200">
+        <a:solidFill>
+          <a:schemeClr val="tx1"/>
+        </a:solidFill>
+        <a:latin typeface="+mn-lt"/>
+        <a:ea typeface="+mn-ea"/>
+        <a:cs typeface="+mn-cs"/>
+      </a:defRPr>
+    </a:lvl9pPr>
+  </p:notesStyle>
+</p:notesMaster>
+</file>
+
+<file path=ppt/notesSlides/notesSlide1.xml><?xml version="1.0" encoding="utf-8"?>
+<p:notes xmlns:a="http://schemas.openxmlformats.org/drawingml/2006/main" xmlns:r="http://schemas.openxmlformats.org/officeDocument/2006/relationships" xmlns:p="http://schemas.openxmlformats.org/presentationml/2006/main">
+  <p:cSld>
+    <p:spTree>
+      <p:nvGrpSpPr>
+        <p:cNvPr id="1" name=""/>
+        <p:cNvGrpSpPr/>
+        <p:nvPr/>
+      </p:nvGrpSpPr>
+      <p:grpSpPr>
+        <a:xfrm>
+          <a:off x="0" y="0"/>
+          <a:ext cx="0" cy="0"/>
+          <a:chOff x="0" y="0"/>
+          <a:chExt cx="0" cy="0"/>
+        </a:xfrm>
+      </p:grpSpPr>
+      <p:sp>
+        <p:nvSpPr>
+          <p:cNvPr id="2" name="Slide Image Placeholder 1"/>
+          <p:cNvSpPr>
+            <a:spLocks noGrp="1" noRot="1" noChangeAspect="1"/>
+          </p:cNvSpPr>
+          <p:nvPr>
+            <p:ph type="sldImg"/>
+          </p:nvPr>
+        </p:nvSpPr>
+        <p:spPr/>
+      </p:sp>
+      <p:sp>
+        <p:nvSpPr>
+          <p:cNvPr id="3" name="Notes Placeholder 2"/>
+          <p:cNvSpPr>
+            <a:spLocks noGrp="1"/>
+          </p:cNvSpPr>
+          <p:nvPr>
+            <p:ph type="body" idx="1"/>
+          </p:nvPr>
+        </p:nvSpPr>
+        <p:spPr/>
+        <p:txBody>
+          <a:bodyPr/>
+          <a:lstStyle/>
+          <a:p>
+            <a:endParaRPr lang="en-US" dirty="0"/>
+          </a:p>
+        </p:txBody>
+      </p:sp>
+      <p:sp>
+        <p:nvSpPr>
+          <p:cNvPr id="4" name="Slide Number Placeholder 3"/>
+          <p:cNvSpPr>
+            <a:spLocks noGrp="1"/>
+          </p:cNvSpPr>
+          <p:nvPr>
+            <p:ph type="sldNum" sz="quarter" idx="5"/>
+          </p:nvPr>
+        </p:nvSpPr>
+        <p:spPr/>
+        <p:txBody>
+          <a:bodyPr/>
+          <a:lstStyle/>
+          <a:p>
+            <a:fld id="{CA11E873-B224-394B-B916-6479B7FB4561}" type="slidenum">
+              <a:rPr lang="en-US" smtClean="0"/>
+              <a:t>7</a:t>
+            </a:fld>
+            <a:endParaRPr lang="en-US"/>
+          </a:p>
+        </p:txBody>
+      </p:sp>
+    </p:spTree>
+    <p:extLst>
+      <p:ext uri="{BB962C8B-B14F-4D97-AF65-F5344CB8AC3E}">
+        <p14:creationId xmlns:p14="http://schemas.microsoft.com/office/powerpoint/2010/main" val="1484550207"/>
+      </p:ext>
+    </p:extLst>
+  </p:cSld>
+  <p:clrMapOvr>
+    <a:masterClrMapping/>
+  </p:clrMapOvr>
+</p:notes>
 </file>
 
 <file path=ppt/slideLayouts/slideLayout1.xml><?xml version="1.0" encoding="utf-8"?>
@@ -4089,8 +4526,8 @@
         </p:nvSpPr>
         <p:spPr>
           <a:xfrm>
-            <a:off x="1" y="796413"/>
-            <a:ext cx="5633884" cy="4524315"/>
+            <a:off x="68826" y="2152574"/>
+            <a:ext cx="5633884" cy="1754326"/>
           </a:xfrm>
           <a:prstGeom prst="rect">
             <a:avLst/>
@@ -4165,89 +4602,6 @@
               <a:t>-input data generated by modifying existing data – and then select the best inputs (test suite reduction)</a:t>
             </a:r>
           </a:p>
-          <a:p>
-            <a:endParaRPr lang="en-US" dirty="0"/>
-          </a:p>
-          <a:p>
-            <a:endParaRPr lang="en-US" dirty="0"/>
-          </a:p>
-          <a:p>
-            <a:endParaRPr lang="en-US" dirty="0"/>
-          </a:p>
-          <a:p>
-            <a:endParaRPr lang="en-US" dirty="0"/>
-          </a:p>
-          <a:p>
-            <a:r>
-              <a:rPr lang="en-US" b="1" dirty="0">
-                <a:solidFill>
-                  <a:srgbClr val="0070C0"/>
-                </a:solidFill>
-              </a:rPr>
-              <a:t>dumb </a:t>
-            </a:r>
-            <a:r>
-              <a:rPr lang="en-US" b="1" dirty="0" err="1">
-                <a:solidFill>
-                  <a:srgbClr val="0070C0"/>
-                </a:solidFill>
-              </a:rPr>
-              <a:t>fuzzer</a:t>
-            </a:r>
-            <a:r>
-              <a:rPr lang="en-US" b="1" dirty="0">
-                <a:solidFill>
-                  <a:srgbClr val="0070C0"/>
-                </a:solidFill>
-              </a:rPr>
-              <a:t> </a:t>
-            </a:r>
-            <a:r>
-              <a:rPr lang="en-US" dirty="0"/>
-              <a:t>– not aware of input structure</a:t>
-            </a:r>
-          </a:p>
-          <a:p>
-            <a:endParaRPr lang="en-US" dirty="0"/>
-          </a:p>
-          <a:p>
-            <a:r>
-              <a:rPr lang="en-US" b="1" dirty="0">
-                <a:solidFill>
-                  <a:srgbClr val="0070C0"/>
-                </a:solidFill>
-              </a:rPr>
-              <a:t>smart </a:t>
-            </a:r>
-            <a:r>
-              <a:rPr lang="en-US" b="1" dirty="0" err="1">
-                <a:solidFill>
-                  <a:srgbClr val="0070C0"/>
-                </a:solidFill>
-              </a:rPr>
-              <a:t>fuzzer</a:t>
-            </a:r>
-            <a:r>
-              <a:rPr lang="en-US" b="1" dirty="0">
-                <a:solidFill>
-                  <a:srgbClr val="0070C0"/>
-                </a:solidFill>
-              </a:rPr>
-              <a:t> </a:t>
-            </a:r>
-            <a:r>
-              <a:rPr lang="en-US" dirty="0"/>
-              <a:t>– aware of structure of input data. For example, a smart generation-based </a:t>
-            </a:r>
-            <a:r>
-              <a:rPr lang="en-US" dirty="0" err="1"/>
-              <a:t>fuzzer</a:t>
-            </a:r>
-            <a:r>
-              <a:rPr lang="en-US" dirty="0"/>
-              <a:t> takes the input model or protocol that was provided by the user to generate new inputs.</a:t>
-            </a:r>
-          </a:p>
         </p:txBody>
       </p:sp>
       <p:sp>
@@ -4264,7 +4618,7 @@
         </p:nvSpPr>
         <p:spPr>
           <a:xfrm>
-            <a:off x="6194325" y="934911"/>
+            <a:off x="6194325" y="1943900"/>
             <a:ext cx="5737122" cy="4247317"/>
           </a:xfrm>
           <a:prstGeom prst="rect">
@@ -4442,8 +4796,8 @@
         </p:nvCxnSpPr>
         <p:spPr>
           <a:xfrm>
-            <a:off x="5781368" y="796413"/>
-            <a:ext cx="0" cy="6061587"/>
+            <a:off x="5781368" y="1805402"/>
+            <a:ext cx="0" cy="5052598"/>
           </a:xfrm>
           <a:prstGeom prst="line">
             <a:avLst/>
@@ -4481,7 +4835,7 @@
         </p:nvCxnSpPr>
         <p:spPr>
           <a:xfrm flipH="1">
-            <a:off x="0" y="3279058"/>
+            <a:off x="0" y="4288047"/>
             <a:ext cx="5771536" cy="0"/>
           </a:xfrm>
           <a:prstGeom prst="line">
@@ -4504,6 +4858,148 @@
           </a:fontRef>
         </p:style>
       </p:cxnSp>
+      <p:sp>
+        <p:nvSpPr>
+          <p:cNvPr id="3" name="TextBox 2">
+            <a:extLst>
+              <a:ext uri="{FF2B5EF4-FFF2-40B4-BE49-F238E27FC236}">
+                <a16:creationId xmlns:a16="http://schemas.microsoft.com/office/drawing/2014/main" id="{1CDB414B-8AB7-F64D-849A-B19163C8AF57}"/>
+              </a:ext>
+            </a:extLst>
+          </p:cNvPr>
+          <p:cNvSpPr txBox="1"/>
+          <p:nvPr/>
+        </p:nvSpPr>
+        <p:spPr>
+          <a:xfrm>
+            <a:off x="0" y="813184"/>
+            <a:ext cx="10499832" cy="369332"/>
+          </a:xfrm>
+          <a:prstGeom prst="rect">
+            <a:avLst/>
+          </a:prstGeom>
+          <a:noFill/>
+        </p:spPr>
+        <p:txBody>
+          <a:bodyPr wrap="square" rtlCol="0">
+            <a:spAutoFit/>
+          </a:bodyPr>
+          <a:lstStyle/>
+          <a:p>
+            <a:r>
+              <a:rPr lang="en-US" dirty="0"/>
+              <a:t>Fuzz Testing — A Primer: </a:t>
+            </a:r>
+            <a:r>
+              <a:rPr lang="en-US" dirty="0">
+                <a:hlinkClick r:id="rId2"/>
+              </a:rPr>
+              <a:t>https://medium.com/@priyankasomrah/fuzz-testing-a-primer-2f8f4dc1062</a:t>
+            </a:r>
+            <a:endParaRPr lang="en-US" dirty="0"/>
+          </a:p>
+        </p:txBody>
+      </p:sp>
+      <p:sp>
+        <p:nvSpPr>
+          <p:cNvPr id="11" name="TextBox 10">
+            <a:extLst>
+              <a:ext uri="{FF2B5EF4-FFF2-40B4-BE49-F238E27FC236}">
+                <a16:creationId xmlns:a16="http://schemas.microsoft.com/office/drawing/2014/main" id="{9091F54C-C89A-0549-83F3-013DF5C7A74A}"/>
+              </a:ext>
+            </a:extLst>
+          </p:cNvPr>
+          <p:cNvSpPr txBox="1"/>
+          <p:nvPr/>
+        </p:nvSpPr>
+        <p:spPr>
+          <a:xfrm>
+            <a:off x="68826" y="4669195"/>
+            <a:ext cx="5633884" cy="1754326"/>
+          </a:xfrm>
+          <a:prstGeom prst="rect">
+            <a:avLst/>
+          </a:prstGeom>
+          <a:noFill/>
+        </p:spPr>
+        <p:txBody>
+          <a:bodyPr wrap="square" rtlCol="0">
+            <a:spAutoFit/>
+          </a:bodyPr>
+          <a:lstStyle/>
+          <a:p>
+            <a:r>
+              <a:rPr lang="en-US" b="1" dirty="0">
+                <a:solidFill>
+                  <a:srgbClr val="0070C0"/>
+                </a:solidFill>
+              </a:rPr>
+              <a:t>dumb </a:t>
+            </a:r>
+            <a:r>
+              <a:rPr lang="en-US" b="1" dirty="0" err="1">
+                <a:solidFill>
+                  <a:srgbClr val="0070C0"/>
+                </a:solidFill>
+              </a:rPr>
+              <a:t>fuzzer</a:t>
+            </a:r>
+            <a:r>
+              <a:rPr lang="en-US" b="1" dirty="0">
+                <a:solidFill>
+                  <a:srgbClr val="0070C0"/>
+                </a:solidFill>
+              </a:rPr>
+              <a:t> </a:t>
+            </a:r>
+            <a:r>
+              <a:rPr lang="en-US" dirty="0"/>
+              <a:t>– not aware of input structure</a:t>
+            </a:r>
+          </a:p>
+          <a:p>
+            <a:endParaRPr lang="en-US" dirty="0"/>
+          </a:p>
+          <a:p>
+            <a:r>
+              <a:rPr lang="en-US" b="1" dirty="0">
+                <a:solidFill>
+                  <a:srgbClr val="0070C0"/>
+                </a:solidFill>
+              </a:rPr>
+              <a:t>smart </a:t>
+            </a:r>
+            <a:r>
+              <a:rPr lang="en-US" b="1" dirty="0" err="1">
+                <a:solidFill>
+                  <a:srgbClr val="0070C0"/>
+                </a:solidFill>
+              </a:rPr>
+              <a:t>fuzzer</a:t>
+            </a:r>
+            <a:r>
+              <a:rPr lang="en-US" b="1" dirty="0">
+                <a:solidFill>
+                  <a:srgbClr val="0070C0"/>
+                </a:solidFill>
+              </a:rPr>
+              <a:t> </a:t>
+            </a:r>
+            <a:r>
+              <a:rPr lang="en-US" dirty="0"/>
+              <a:t>– aware of structure of input data. For example, a smart generation-based </a:t>
+            </a:r>
+            <a:r>
+              <a:rPr lang="en-US" dirty="0" err="1"/>
+              <a:t>fuzzer</a:t>
+            </a:r>
+            <a:r>
+              <a:rPr lang="en-US" dirty="0"/>
+              <a:t> takes the input model or protocol that was provided by the user to generate new inputs.</a:t>
+            </a:r>
+          </a:p>
+        </p:txBody>
+      </p:sp>
     </p:spTree>
     <p:extLst>
       <p:ext uri="{BB962C8B-B14F-4D97-AF65-F5344CB8AC3E}">
@@ -6164,8 +6660,8 @@
         </p:nvSpPr>
         <p:spPr>
           <a:xfrm>
-            <a:off x="-1" y="1014004"/>
-            <a:ext cx="12034684" cy="5016758"/>
+            <a:off x="0" y="738664"/>
+            <a:ext cx="12034684" cy="3785652"/>
           </a:xfrm>
           <a:prstGeom prst="rect">
             <a:avLst/>
@@ -6178,8 +6674,16 @@
           </a:bodyPr>
           <a:lstStyle/>
           <a:p>
-            <a:r>
-              <a:rPr lang="en-US" sz="1600" dirty="0" err="1"/>
+            <a:pPr marL="285750" indent="-285750">
+              <a:buFont typeface="Arial" panose="020B0604020202020204" pitchFamily="34" charset="0"/>
+              <a:buChar char="•"/>
+            </a:pPr>
+            <a:r>
+              <a:rPr lang="en-US" sz="1600" b="1" dirty="0" err="1">
+                <a:solidFill>
+                  <a:srgbClr val="FF0000"/>
+                </a:solidFill>
+              </a:rPr>
               <a:t>Radamsa</a:t>
             </a:r>
             <a:r>
@@ -6188,11 +6692,16 @@
             </a:r>
           </a:p>
           <a:p>
-            <a:endParaRPr lang="en-US" sz="1600" dirty="0"/>
-          </a:p>
-          <a:p>
-            <a:r>
-              <a:rPr lang="en-US" sz="1600" dirty="0" err="1"/>
+            <a:pPr marL="285750" indent="-285750">
+              <a:buFont typeface="Arial" panose="020B0604020202020204" pitchFamily="34" charset="0"/>
+              <a:buChar char="•"/>
+            </a:pPr>
+            <a:r>
+              <a:rPr lang="en-US" sz="1600" b="1" dirty="0" err="1">
+                <a:solidFill>
+                  <a:srgbClr val="FF0000"/>
+                </a:solidFill>
+              </a:rPr>
               <a:t>Sulley</a:t>
             </a:r>
             <a:r>
@@ -6201,21 +6710,39 @@
             </a:r>
           </a:p>
           <a:p>
-            <a:endParaRPr lang="en-US" sz="1600" dirty="0"/>
-          </a:p>
-          <a:p>
-            <a:r>
-              <a:rPr lang="en-US" sz="1600" dirty="0"/>
-              <a:t>Peach - framework can perform smart fuzzing for file formats and network protocols. It can perform both generation- and mutation-based fuzzing and contains components to help with modelling and monitoring the target.</a:t>
-            </a:r>
-          </a:p>
-          <a:p>
-            <a:endParaRPr lang="en-US" sz="1600" dirty="0"/>
-          </a:p>
-          <a:p>
-            <a:r>
-              <a:rPr lang="en-US" sz="1600" dirty="0"/>
-              <a:t>SPIKE - a network protocol </a:t>
+            <a:pPr marL="285750" indent="-285750">
+              <a:buFont typeface="Arial" panose="020B0604020202020204" pitchFamily="34" charset="0"/>
+              <a:buChar char="•"/>
+            </a:pPr>
+            <a:r>
+              <a:rPr lang="en-US" sz="1600" b="1" dirty="0">
+                <a:solidFill>
+                  <a:srgbClr val="FF0000"/>
+                </a:solidFill>
+              </a:rPr>
+              <a:t>Peach</a:t>
+            </a:r>
+            <a:r>
+              <a:rPr lang="en-US" sz="1600" dirty="0"/>
+              <a:t> - framework can perform smart fuzzing for file formats and network protocols. It can perform both generation- and mutation-based fuzzing and contains components to help with modelling and monitoring the target.</a:t>
+            </a:r>
+          </a:p>
+          <a:p>
+            <a:pPr marL="285750" indent="-285750">
+              <a:buFont typeface="Arial" panose="020B0604020202020204" pitchFamily="34" charset="0"/>
+              <a:buChar char="•"/>
+            </a:pPr>
+            <a:r>
+              <a:rPr lang="en-US" sz="1600" b="1" dirty="0">
+                <a:solidFill>
+                  <a:srgbClr val="FF0000"/>
+                </a:solidFill>
+              </a:rPr>
+              <a:t>SPIKE</a:t>
+            </a:r>
+            <a:r>
+              <a:rPr lang="en-US" sz="1600" dirty="0"/>
+              <a:t> - a network protocol </a:t>
             </a:r>
             <a:r>
               <a:rPr lang="en-US" sz="1600" dirty="0" err="1"/>
@@ -6227,12 +6754,21 @@
             </a:r>
           </a:p>
           <a:p>
-            <a:endParaRPr lang="en-US" sz="1600" dirty="0"/>
-          </a:p>
-          <a:p>
-            <a:r>
-              <a:rPr lang="en-US" sz="1600" dirty="0"/>
-              <a:t>Grinder - a web browser </a:t>
+            <a:pPr marL="285750" indent="-285750">
+              <a:buFont typeface="Arial" panose="020B0604020202020204" pitchFamily="34" charset="0"/>
+              <a:buChar char="•"/>
+            </a:pPr>
+            <a:r>
+              <a:rPr lang="en-US" sz="1600" b="1" dirty="0">
+                <a:solidFill>
+                  <a:srgbClr val="FF0000"/>
+                </a:solidFill>
+              </a:rPr>
+              <a:t>Grinder</a:t>
+            </a:r>
+            <a:r>
+              <a:rPr lang="en-US" sz="1600" dirty="0"/>
+              <a:t> - a web browser </a:t>
             </a:r>
             <a:r>
               <a:rPr lang="en-US" sz="1600" dirty="0" err="1"/>
@@ -6244,11 +6780,16 @@
             </a:r>
           </a:p>
           <a:p>
-            <a:endParaRPr lang="en-US" sz="1600" dirty="0"/>
-          </a:p>
-          <a:p>
-            <a:r>
-              <a:rPr lang="en-US" sz="1600" dirty="0" err="1"/>
+            <a:pPr marL="285750" indent="-285750">
+              <a:buFont typeface="Arial" panose="020B0604020202020204" pitchFamily="34" charset="0"/>
+              <a:buChar char="•"/>
+            </a:pPr>
+            <a:r>
+              <a:rPr lang="en-US" sz="1600" b="1" dirty="0" err="1">
+                <a:solidFill>
+                  <a:srgbClr val="FF0000"/>
+                </a:solidFill>
+              </a:rPr>
               <a:t>NodeFuzz</a:t>
             </a:r>
             <a:r>
@@ -6265,43 +6806,97 @@
             </a:r>
           </a:p>
           <a:p>
+            <a:pPr marL="285750" indent="-285750">
+              <a:buFont typeface="Arial" panose="020B0604020202020204" pitchFamily="34" charset="0"/>
+              <a:buChar char="•"/>
+            </a:pPr>
+            <a:r>
+              <a:rPr lang="en-US" sz="1600" b="1" dirty="0">
+                <a:solidFill>
+                  <a:srgbClr val="FF0000"/>
+                </a:solidFill>
+              </a:rPr>
+              <a:t>Burp Suite </a:t>
+            </a:r>
+            <a:r>
+              <a:rPr lang="en-US" sz="1600" dirty="0"/>
+              <a:t>– Cybersecurity Software</a:t>
+            </a:r>
+          </a:p>
+          <a:p>
+            <a:pPr marL="285750" indent="-285750">
+              <a:buFont typeface="Arial" panose="020B0604020202020204" pitchFamily="34" charset="0"/>
+              <a:buChar char="•"/>
+            </a:pPr>
+            <a:r>
+              <a:rPr lang="en-US" sz="1600" b="1" dirty="0" err="1">
+                <a:solidFill>
+                  <a:srgbClr val="FF0000"/>
+                </a:solidFill>
+              </a:rPr>
+              <a:t>Webscarab</a:t>
+            </a:r>
+            <a:r>
+              <a:rPr lang="en-US" sz="1600" dirty="0"/>
+              <a:t> – Java framework, http &amp; https, can be used as intercepting proxy</a:t>
+            </a:r>
+          </a:p>
+          <a:p>
+            <a:pPr marL="285750" indent="-285750">
+              <a:buFont typeface="Arial" panose="020B0604020202020204" pitchFamily="34" charset="0"/>
+              <a:buChar char="•"/>
+            </a:pPr>
+            <a:r>
+              <a:rPr lang="en-US" sz="1600" b="1" dirty="0">
+                <a:solidFill>
+                  <a:srgbClr val="FF0000"/>
+                </a:solidFill>
+              </a:rPr>
+              <a:t>OWASP </a:t>
+            </a:r>
+            <a:r>
+              <a:rPr lang="en-US" sz="1600" b="1" dirty="0" err="1">
+                <a:solidFill>
+                  <a:srgbClr val="FF0000"/>
+                </a:solidFill>
+              </a:rPr>
+              <a:t>WSFuzzer</a:t>
+            </a:r>
+            <a:r>
+              <a:rPr lang="en-US" sz="1600" b="1" dirty="0">
+                <a:solidFill>
+                  <a:srgbClr val="FF0000"/>
+                </a:solidFill>
+              </a:rPr>
+              <a:t> </a:t>
+            </a:r>
+            <a:r>
+              <a:rPr lang="en-US" sz="1600" dirty="0"/>
+              <a:t>– python, for HTTP based SOAP services</a:t>
+            </a:r>
+          </a:p>
+          <a:p>
+            <a:pPr marL="285750" indent="-285750">
+              <a:buFont typeface="Arial" panose="020B0604020202020204" pitchFamily="34" charset="0"/>
+              <a:buChar char="•"/>
+            </a:pPr>
+            <a:r>
+              <a:rPr lang="en-US" sz="1600" dirty="0"/>
+              <a:t>Software testing at Facebook and Google in 2018 - </a:t>
+            </a:r>
+            <a:r>
+              <a:rPr lang="en-US" sz="1600" dirty="0">
+                <a:hlinkClick r:id="rId3"/>
+              </a:rPr>
+              <a:t>https://screenster.io/software-testing-facebook-google/</a:t>
+            </a:r>
+            <a:r>
+              <a:rPr lang="en-US" sz="1600" dirty="0"/>
+              <a:t>  </a:t>
+            </a:r>
+          </a:p>
+          <a:p>
             <a:endParaRPr lang="en-US" sz="1600" dirty="0"/>
-          </a:p>
-          <a:p>
-            <a:r>
-              <a:rPr lang="en-US" sz="1600" dirty="0"/>
-              <a:t>Burp Suite – Cybersecurity Software</a:t>
-            </a:r>
-          </a:p>
-          <a:p>
-            <a:endParaRPr lang="en-US" sz="1600" dirty="0"/>
-          </a:p>
-          <a:p>
-            <a:r>
-              <a:rPr lang="en-US" sz="1600" dirty="0" err="1"/>
-              <a:t>Webscarab</a:t>
-            </a:r>
-            <a:r>
-              <a:rPr lang="en-US" sz="1600" dirty="0"/>
-              <a:t> – Java framework, http &amp; https, can be used as intercepting proxy</a:t>
-            </a:r>
-          </a:p>
-          <a:p>
-            <a:endParaRPr lang="en-US" sz="1600" dirty="0"/>
-          </a:p>
-          <a:p>
-            <a:r>
-              <a:rPr lang="en-US" sz="1600" dirty="0"/>
-              <a:t>OWASP </a:t>
-            </a:r>
-            <a:r>
-              <a:rPr lang="en-US" sz="1600" dirty="0" err="1"/>
-              <a:t>WSFuzzer</a:t>
-            </a:r>
-            <a:r>
-              <a:rPr lang="en-US" sz="1600" dirty="0"/>
-              <a:t> – python, for HTTP based SOAP services</a:t>
-            </a:r>
           </a:p>
         </p:txBody>
       </p:sp>
@@ -6319,6 +6914,195 @@
 </file>
 
 <file path=ppt/slides/slide8.xml><?xml version="1.0" encoding="utf-8"?>
+<p:sld xmlns:a="http://schemas.openxmlformats.org/drawingml/2006/main" xmlns:r="http://schemas.openxmlformats.org/officeDocument/2006/relationships" xmlns:p="http://schemas.openxmlformats.org/presentationml/2006/main">
+  <p:cSld>
+    <p:spTree>
+      <p:nvGrpSpPr>
+        <p:cNvPr id="1" name=""/>
+        <p:cNvGrpSpPr/>
+        <p:nvPr/>
+      </p:nvGrpSpPr>
+      <p:grpSpPr>
+        <a:xfrm>
+          <a:off x="0" y="0"/>
+          <a:ext cx="0" cy="0"/>
+          <a:chOff x="0" y="0"/>
+          <a:chExt cx="0" cy="0"/>
+        </a:xfrm>
+      </p:grpSpPr>
+      <p:sp>
+        <p:nvSpPr>
+          <p:cNvPr id="4" name="TextBox 3">
+            <a:extLst>
+              <a:ext uri="{FF2B5EF4-FFF2-40B4-BE49-F238E27FC236}">
+                <a16:creationId xmlns:a16="http://schemas.microsoft.com/office/drawing/2014/main" id="{4F748E74-60AF-5244-B3C0-27789557F58B}"/>
+              </a:ext>
+            </a:extLst>
+          </p:cNvPr>
+          <p:cNvSpPr txBox="1"/>
+          <p:nvPr/>
+        </p:nvSpPr>
+        <p:spPr>
+          <a:xfrm>
+            <a:off x="546538" y="430924"/>
+            <a:ext cx="11140965" cy="3970318"/>
+          </a:xfrm>
+          <a:prstGeom prst="rect">
+            <a:avLst/>
+          </a:prstGeom>
+          <a:noFill/>
+        </p:spPr>
+        <p:txBody>
+          <a:bodyPr wrap="square" rtlCol="0">
+            <a:spAutoFit/>
+          </a:bodyPr>
+          <a:lstStyle/>
+          <a:p>
+            <a:r>
+              <a:rPr lang="en-US" dirty="0"/>
+              <a:t>Facebook Testing Tools</a:t>
+            </a:r>
+          </a:p>
+          <a:p>
+            <a:endParaRPr lang="en-US" dirty="0"/>
+          </a:p>
+          <a:p>
+            <a:pPr marL="285750" indent="-285750">
+              <a:buFont typeface="Arial" panose="020B0604020202020204" pitchFamily="34" charset="0"/>
+              <a:buChar char="•"/>
+            </a:pPr>
+            <a:r>
+              <a:rPr lang="en-US" dirty="0"/>
+              <a:t>Software testing at Facebook and Google in 2018 - </a:t>
+            </a:r>
+            <a:r>
+              <a:rPr lang="en-US" dirty="0">
+                <a:hlinkClick r:id="rId2"/>
+              </a:rPr>
+              <a:t>https://screenster.io/software-testing-facebook-google/</a:t>
+            </a:r>
+            <a:r>
+              <a:rPr lang="en-US" dirty="0"/>
+              <a:t>  </a:t>
+            </a:r>
+          </a:p>
+          <a:p>
+            <a:endParaRPr lang="en-US" dirty="0"/>
+          </a:p>
+          <a:p>
+            <a:pPr marL="285750" indent="-285750">
+              <a:buFont typeface="Arial" panose="020B0604020202020204" pitchFamily="34" charset="0"/>
+              <a:buChar char="•"/>
+            </a:pPr>
+            <a:r>
+              <a:rPr lang="en-US" b="1" dirty="0" err="1">
+                <a:solidFill>
+                  <a:srgbClr val="FF0000"/>
+                </a:solidFill>
+              </a:rPr>
+              <a:t>Sapienz</a:t>
+            </a:r>
+            <a:r>
+              <a:rPr lang="en-US" dirty="0"/>
+              <a:t> - Facebook acquired </a:t>
+            </a:r>
+            <a:r>
+              <a:rPr lang="en-US" dirty="0" err="1"/>
+              <a:t>Sapienz</a:t>
+            </a:r>
+            <a:r>
+              <a:rPr lang="en-US" dirty="0"/>
+              <a:t> in 2017, a search-based dynamic code analyzer for Android, relies on fuzz testing, creates models of the system under tests, and generates test sequences. Whereas most dynamic analyzers have to comb through ~15,000 actions to find a crashing bug, </a:t>
+            </a:r>
+            <a:r>
+              <a:rPr lang="en-US" dirty="0" err="1"/>
+              <a:t>Sapienz</a:t>
+            </a:r>
+            <a:r>
+              <a:rPr lang="en-US" dirty="0"/>
+              <a:t> only needs 150–200 interactions. - </a:t>
+            </a:r>
+            <a:r>
+              <a:rPr lang="en-US" dirty="0">
+                <a:hlinkClick r:id="rId3"/>
+              </a:rPr>
+              <a:t>https://thenewstack.io/facebooks-tool-for-automated-testing-at-2-billion-users-scale/</a:t>
+            </a:r>
+            <a:r>
+              <a:rPr lang="en-US" dirty="0"/>
+              <a:t>  </a:t>
+            </a:r>
+          </a:p>
+          <a:p>
+            <a:pPr marL="285750" indent="-285750">
+              <a:buFont typeface="Arial" panose="020B0604020202020204" pitchFamily="34" charset="0"/>
+              <a:buChar char="•"/>
+            </a:pPr>
+            <a:r>
+              <a:rPr lang="en-US" b="1" dirty="0">
+                <a:solidFill>
+                  <a:srgbClr val="FF0000"/>
+                </a:solidFill>
+              </a:rPr>
+              <a:t>Infer</a:t>
+            </a:r>
+            <a:r>
+              <a:rPr lang="en-US" dirty="0"/>
+              <a:t> - A static code analyzer, Infer scans through code without running it. It detects bugs like memory leaks and null points exceptions in iOS and Android. Facebook bought the technology in 2013 and open-sourced it in 2015. Today, Infer is integral to the testing of Facebook, Instagram, WhatsApp, Messenger, as well as Spotify and Uber. Mozilla, Sky, and Marks &amp; Spencer are among other well-known brands using working with this tool.</a:t>
+            </a:r>
+          </a:p>
+          <a:p>
+            <a:pPr marL="285750" indent="-285750">
+              <a:buFont typeface="Arial" panose="020B0604020202020204" pitchFamily="34" charset="0"/>
+              <a:buChar char="•"/>
+            </a:pPr>
+            <a:r>
+              <a:rPr lang="en-US" b="1" dirty="0" err="1">
+                <a:solidFill>
+                  <a:srgbClr val="FF0000"/>
+                </a:solidFill>
+              </a:rPr>
+              <a:t>BrowserLab</a:t>
+            </a:r>
+            <a:r>
+              <a:rPr lang="en-US" dirty="0"/>
+              <a:t> - granular monitoring of browser rendering speeds, detects performance regressions.</a:t>
+            </a:r>
+          </a:p>
+          <a:p>
+            <a:pPr marL="285750" indent="-285750">
+              <a:buFont typeface="Arial" panose="020B0604020202020204" pitchFamily="34" charset="0"/>
+              <a:buChar char="•"/>
+            </a:pPr>
+            <a:r>
+              <a:rPr lang="en-US" b="1" dirty="0">
+                <a:solidFill>
+                  <a:srgbClr val="FF0000"/>
+                </a:solidFill>
+              </a:rPr>
+              <a:t>Jest</a:t>
+            </a:r>
+            <a:r>
+              <a:rPr lang="en-US" dirty="0"/>
+              <a:t> - Marketed as a framework for JavaScript testing (React, etc.).</a:t>
+            </a:r>
+          </a:p>
+        </p:txBody>
+      </p:sp>
+    </p:spTree>
+    <p:extLst>
+      <p:ext uri="{BB962C8B-B14F-4D97-AF65-F5344CB8AC3E}">
+        <p14:creationId xmlns:p14="http://schemas.microsoft.com/office/powerpoint/2010/main" val="419585650"/>
+      </p:ext>
+    </p:extLst>
+  </p:cSld>
+  <p:clrMapOvr>
+    <a:masterClrMapping/>
+  </p:clrMapOvr>
+</p:sld>
+</file>
+
+<file path=ppt/slides/slide9.xml><?xml version="1.0" encoding="utf-8"?>
 <p:sld xmlns:a="http://schemas.openxmlformats.org/drawingml/2006/main" xmlns:r="http://schemas.openxmlformats.org/officeDocument/2006/relationships" xmlns:p="http://schemas.openxmlformats.org/presentationml/2006/main">
   <p:cSld>
     <p:spTree>
@@ -7057,4 +7841,299 @@
     </a:ext>
   </a:extLst>
 </a:theme>
+</file>
+
+<file path=ppt/theme/theme2.xml><?xml version="1.0" encoding="utf-8"?>
+<a:theme xmlns:a="http://schemas.openxmlformats.org/drawingml/2006/main" name="Office Theme">
+  <a:themeElements>
+    <a:clrScheme name="Office">
+      <a:dk1>
+        <a:sysClr val="windowText" lastClr="000000"/>
+      </a:dk1>
+      <a:lt1>
+        <a:sysClr val="window" lastClr="FFFFFF"/>
+      </a:lt1>
+      <a:dk2>
+        <a:srgbClr val="44546A"/>
+      </a:dk2>
+      <a:lt2>
+        <a:srgbClr val="E7E6E6"/>
+      </a:lt2>
+      <a:accent1>
+        <a:srgbClr val="4472C4"/>
+      </a:accent1>
+      <a:accent2>
+        <a:srgbClr val="ED7D31"/>
+      </a:accent2>
+      <a:accent3>
+        <a:srgbClr val="A5A5A5"/>
+      </a:accent3>
+      <a:accent4>
+        <a:srgbClr val="FFC000"/>
+      </a:accent4>
+      <a:accent5>
+        <a:srgbClr val="5B9BD5"/>
+      </a:accent5>
+      <a:accent6>
+        <a:srgbClr val="70AD47"/>
+      </a:accent6>
+      <a:hlink>
+        <a:srgbClr val="0563C1"/>
+      </a:hlink>
+      <a:folHlink>
+        <a:srgbClr val="954F72"/>
+      </a:folHlink>
+    </a:clrScheme>
+    <a:fontScheme name="Office">
+      <a:majorFont>
+        <a:latin typeface="Calibri Light" panose="020F0302020204030204"/>
+        <a:ea typeface=""/>
+        <a:cs typeface=""/>
+        <a:font script="Jpan" typeface="游ゴシック Light"/>
+        <a:font script="Hang" typeface="맑은 고딕"/>
+        <a:font script="Hans" typeface="等线 Light"/>
+        <a:font script="Hant" typeface="新細明體"/>
+        <a:font script="Arab" typeface="Times New Roman"/>
+        <a:font script="Hebr" typeface="Times New Roman"/>
+        <a:font script="Thai" typeface="Angsana New"/>
+        <a:font script="Ethi" typeface="Nyala"/>
+        <a:font script="Beng" typeface="Vrinda"/>
+        <a:font script="Gujr" typeface="Shruti"/>
+        <a:font script="Khmr" typeface="MoolBoran"/>
+        <a:font script="Knda" typeface="Tunga"/>
+        <a:font script="Guru" typeface="Raavi"/>
+        <a:font script="Cans" typeface="Euphemia"/>
+        <a:font script="Cher" typeface="Plantagenet Cherokee"/>
+        <a:font script="Yiii" typeface="Microsoft Yi Baiti"/>
+        <a:font script="Tibt" typeface="Microsoft Himalaya"/>
+        <a:font script="Thaa" typeface="MV Boli"/>
+        <a:font script="Deva" typeface="Mangal"/>
+        <a:font script="Telu" typeface="Gautami"/>
+        <a:font script="Taml" typeface="Latha"/>
+        <a:font script="Syrc" typeface="Estrangelo Edessa"/>
+        <a:font script="Orya" typeface="Kalinga"/>
+        <a:font script="Mlym" typeface="Kartika"/>
+        <a:font script="Laoo" typeface="DokChampa"/>
+        <a:font script="Sinh" typeface="Iskoola Pota"/>
+        <a:font script="Mong" typeface="Mongolian Baiti"/>
+        <a:font script="Viet" typeface="Times New Roman"/>
+        <a:font script="Uigh" typeface="Microsoft Uighur"/>
+        <a:font script="Geor" typeface="Sylfaen"/>
+        <a:font script="Armn" typeface="Arial"/>
+        <a:font script="Bugi" typeface="Leelawadee UI"/>
+        <a:font script="Bopo" typeface="Microsoft JhengHei"/>
+        <a:font script="Java" typeface="Javanese Text"/>
+        <a:font script="Lisu" typeface="Segoe UI"/>
+        <a:font script="Mymr" typeface="Myanmar Text"/>
+        <a:font script="Nkoo" typeface="Ebrima"/>
+        <a:font script="Olck" typeface="Nirmala UI"/>
+        <a:font script="Osma" typeface="Ebrima"/>
+        <a:font script="Phag" typeface="Phagspa"/>
+        <a:font script="Syrn" typeface="Estrangelo Edessa"/>
+        <a:font script="Syrj" typeface="Estrangelo Edessa"/>
+        <a:font script="Syre" typeface="Estrangelo Edessa"/>
+        <a:font script="Sora" typeface="Nirmala UI"/>
+        <a:font script="Tale" typeface="Microsoft Tai Le"/>
+        <a:font script="Talu" typeface="Microsoft New Tai Lue"/>
+        <a:font script="Tfng" typeface="Ebrima"/>
+      </a:majorFont>
+      <a:minorFont>
+        <a:latin typeface="Calibri" panose="020F0502020204030204"/>
+        <a:ea typeface=""/>
+        <a:cs typeface=""/>
+        <a:font script="Jpan" typeface="游ゴシック"/>
+        <a:font script="Hang" typeface="맑은 고딕"/>
+        <a:font script="Hans" typeface="等线"/>
+        <a:font script="Hant" typeface="新細明體"/>
+        <a:font script="Arab" typeface="Arial"/>
+        <a:font script="Hebr" typeface="Arial"/>
+        <a:font script="Thai" typeface="Cordia New"/>
+        <a:font script="Ethi" typeface="Nyala"/>
+        <a:font script="Beng" typeface="Vrinda"/>
+        <a:font script="Gujr" typeface="Shruti"/>
+        <a:font script="Khmr" typeface="DaunPenh"/>
+        <a:font script="Knda" typeface="Tunga"/>
+        <a:font script="Guru" typeface="Raavi"/>
+        <a:font script="Cans" typeface="Euphemia"/>
+        <a:font script="Cher" typeface="Plantagenet Cherokee"/>
+        <a:font script="Yiii" typeface="Microsoft Yi Baiti"/>
+        <a:font script="Tibt" typeface="Microsoft Himalaya"/>
+        <a:font script="Thaa" typeface="MV Boli"/>
+        <a:font script="Deva" typeface="Mangal"/>
+        <a:font script="Telu" typeface="Gautami"/>
+        <a:font script="Taml" typeface="Latha"/>
+        <a:font script="Syrc" typeface="Estrangelo Edessa"/>
+        <a:font script="Orya" typeface="Kalinga"/>
+        <a:font script="Mlym" typeface="Kartika"/>
+        <a:font script="Laoo" typeface="DokChampa"/>
+        <a:font script="Sinh" typeface="Iskoola Pota"/>
+        <a:font script="Mong" typeface="Mongolian Baiti"/>
+        <a:font script="Viet" typeface="Arial"/>
+        <a:font script="Uigh" typeface="Microsoft Uighur"/>
+        <a:font script="Geor" typeface="Sylfaen"/>
+        <a:font script="Armn" typeface="Arial"/>
+        <a:font script="Bugi" typeface="Leelawadee UI"/>
+        <a:font script="Bopo" typeface="Microsoft JhengHei"/>
+        <a:font script="Java" typeface="Javanese Text"/>
+        <a:font script="Lisu" typeface="Segoe UI"/>
+        <a:font script="Mymr" typeface="Myanmar Text"/>
+        <a:font script="Nkoo" typeface="Ebrima"/>
+        <a:font script="Olck" typeface="Nirmala UI"/>
+        <a:font script="Osma" typeface="Ebrima"/>
+        <a:font script="Phag" typeface="Phagspa"/>
+        <a:font script="Syrn" typeface="Estrangelo Edessa"/>
+        <a:font script="Syrj" typeface="Estrangelo Edessa"/>
+        <a:font script="Syre" typeface="Estrangelo Edessa"/>
+        <a:font script="Sora" typeface="Nirmala UI"/>
+        <a:font script="Tale" typeface="Microsoft Tai Le"/>
+        <a:font script="Talu" typeface="Microsoft New Tai Lue"/>
+        <a:font script="Tfng" typeface="Ebrima"/>
+      </a:minorFont>
+    </a:fontScheme>
+    <a:fmtScheme name="Office">
+      <a:fillStyleLst>
+        <a:solidFill>
+          <a:schemeClr val="phClr"/>
+        </a:solidFill>
+        <a:gradFill rotWithShape="1">
+          <a:gsLst>
+            <a:gs pos="0">
+              <a:schemeClr val="phClr">
+                <a:lumMod val="110000"/>
+                <a:satMod val="105000"/>
+                <a:tint val="67000"/>
+              </a:schemeClr>
+            </a:gs>
+            <a:gs pos="50000">
+              <a:schemeClr val="phClr">
+                <a:lumMod val="105000"/>
+                <a:satMod val="103000"/>
+                <a:tint val="73000"/>
+              </a:schemeClr>
+            </a:gs>
+            <a:gs pos="100000">
+              <a:schemeClr val="phClr">
+                <a:lumMod val="105000"/>
+                <a:satMod val="109000"/>
+                <a:tint val="81000"/>
+              </a:schemeClr>
+            </a:gs>
+          </a:gsLst>
+          <a:lin ang="5400000" scaled="0"/>
+        </a:gradFill>
+        <a:gradFill rotWithShape="1">
+          <a:gsLst>
+            <a:gs pos="0">
+              <a:schemeClr val="phClr">
+                <a:satMod val="103000"/>
+                <a:lumMod val="102000"/>
+                <a:tint val="94000"/>
+              </a:schemeClr>
+            </a:gs>
+            <a:gs pos="50000">
+              <a:schemeClr val="phClr">
+                <a:satMod val="110000"/>
+                <a:lumMod val="100000"/>
+                <a:shade val="100000"/>
+              </a:schemeClr>
+            </a:gs>
+            <a:gs pos="100000">
+              <a:schemeClr val="phClr">
+                <a:lumMod val="99000"/>
+                <a:satMod val="120000"/>
+                <a:shade val="78000"/>
+              </a:schemeClr>
+            </a:gs>
+          </a:gsLst>
+          <a:lin ang="5400000" scaled="0"/>
+        </a:gradFill>
+      </a:fillStyleLst>
+      <a:lnStyleLst>
+        <a:ln w="6350" cap="flat" cmpd="sng" algn="ctr">
+          <a:solidFill>
+            <a:schemeClr val="phClr"/>
+          </a:solidFill>
+          <a:prstDash val="solid"/>
+          <a:miter lim="800000"/>
+        </a:ln>
+        <a:ln w="12700" cap="flat" cmpd="sng" algn="ctr">
+          <a:solidFill>
+            <a:schemeClr val="phClr"/>
+          </a:solidFill>
+          <a:prstDash val="solid"/>
+          <a:miter lim="800000"/>
+        </a:ln>
+        <a:ln w="19050" cap="flat" cmpd="sng" algn="ctr">
+          <a:solidFill>
+            <a:schemeClr val="phClr"/>
+          </a:solidFill>
+          <a:prstDash val="solid"/>
+          <a:miter lim="800000"/>
+        </a:ln>
+      </a:lnStyleLst>
+      <a:effectStyleLst>
+        <a:effectStyle>
+          <a:effectLst/>
+        </a:effectStyle>
+        <a:effectStyle>
+          <a:effectLst/>
+        </a:effectStyle>
+        <a:effectStyle>
+          <a:effectLst>
+            <a:outerShdw blurRad="57150" dist="19050" dir="5400000" algn="ctr" rotWithShape="0">
+              <a:srgbClr val="000000">
+                <a:alpha val="63000"/>
+              </a:srgbClr>
+            </a:outerShdw>
+          </a:effectLst>
+        </a:effectStyle>
+      </a:effectStyleLst>
+      <a:bgFillStyleLst>
+        <a:solidFill>
+          <a:schemeClr val="phClr"/>
+        </a:solidFill>
+        <a:solidFill>
+          <a:schemeClr val="phClr">
+            <a:tint val="95000"/>
+            <a:satMod val="170000"/>
+          </a:schemeClr>
+        </a:solidFill>
+        <a:gradFill rotWithShape="1">
+          <a:gsLst>
+            <a:gs pos="0">
+              <a:schemeClr val="phClr">
+                <a:tint val="93000"/>
+                <a:satMod val="150000"/>
+                <a:shade val="98000"/>
+                <a:lumMod val="102000"/>
+              </a:schemeClr>
+            </a:gs>
+            <a:gs pos="50000">
+              <a:schemeClr val="phClr">
+                <a:tint val="98000"/>
+                <a:satMod val="130000"/>
+                <a:shade val="90000"/>
+                <a:lumMod val="103000"/>
+              </a:schemeClr>
+            </a:gs>
+            <a:gs pos="100000">
+              <a:schemeClr val="phClr">
+                <a:shade val="63000"/>
+                <a:satMod val="120000"/>
+              </a:schemeClr>
+            </a:gs>
+          </a:gsLst>
+          <a:lin ang="5400000" scaled="0"/>
+        </a:gradFill>
+      </a:bgFillStyleLst>
+    </a:fmtScheme>
+  </a:themeElements>
+  <a:objectDefaults/>
+  <a:extraClrSchemeLst/>
+  <a:extLst>
+    <a:ext uri="{05A4C25C-085E-4340-85A3-A5531E510DB2}">
+      <thm15:themeFamily xmlns:thm15="http://schemas.microsoft.com/office/thememl/2012/main" name="Office Theme" id="{62F939B6-93AF-4DB8-9C6B-D6C7DFDC589F}" vid="{4A3C46E8-61CC-4603-A589-7422A47A8E4A}"/>
+    </a:ext>
+  </a:extLst>
+</a:theme>
 </file>
--- a/fuzzing.pptx
+++ b/fuzzing.pptx
@@ -205,7 +205,7 @@
           <a:p>
             <a:fld id="{681946D7-9ACD-5741-9A93-6BC3A876858B}" type="datetimeFigureOut">
               <a:rPr lang="en-US" smtClean="0"/>
-              <a:t>2/10/20</a:t>
+              <a:t>2/12/20</a:t>
             </a:fld>
             <a:endParaRPr lang="en-US"/>
           </a:p>
@@ -703,7 +703,7 @@
           <a:p>
             <a:fld id="{F7C34817-32A6-8B49-A0F9-E5B31E458402}" type="datetimeFigureOut">
               <a:rPr lang="en-US" smtClean="0"/>
-              <a:t>2/10/20</a:t>
+              <a:t>2/12/20</a:t>
             </a:fld>
             <a:endParaRPr lang="en-US"/>
           </a:p>
@@ -901,7 +901,7 @@
           <a:p>
             <a:fld id="{F7C34817-32A6-8B49-A0F9-E5B31E458402}" type="datetimeFigureOut">
               <a:rPr lang="en-US" smtClean="0"/>
-              <a:t>2/10/20</a:t>
+              <a:t>2/12/20</a:t>
             </a:fld>
             <a:endParaRPr lang="en-US"/>
           </a:p>
@@ -1109,7 +1109,7 @@
           <a:p>
             <a:fld id="{F7C34817-32A6-8B49-A0F9-E5B31E458402}" type="datetimeFigureOut">
               <a:rPr lang="en-US" smtClean="0"/>
-              <a:t>2/10/20</a:t>
+              <a:t>2/12/20</a:t>
             </a:fld>
             <a:endParaRPr lang="en-US"/>
           </a:p>
@@ -1307,7 +1307,7 @@
           <a:p>
             <a:fld id="{F7C34817-32A6-8B49-A0F9-E5B31E458402}" type="datetimeFigureOut">
               <a:rPr lang="en-US" smtClean="0"/>
-              <a:t>2/10/20</a:t>
+              <a:t>2/12/20</a:t>
             </a:fld>
             <a:endParaRPr lang="en-US"/>
           </a:p>
@@ -1582,7 +1582,7 @@
           <a:p>
             <a:fld id="{F7C34817-32A6-8B49-A0F9-E5B31E458402}" type="datetimeFigureOut">
               <a:rPr lang="en-US" smtClean="0"/>
-              <a:t>2/10/20</a:t>
+              <a:t>2/12/20</a:t>
             </a:fld>
             <a:endParaRPr lang="en-US"/>
           </a:p>
@@ -1847,7 +1847,7 @@
           <a:p>
             <a:fld id="{F7C34817-32A6-8B49-A0F9-E5B31E458402}" type="datetimeFigureOut">
               <a:rPr lang="en-US" smtClean="0"/>
-              <a:t>2/10/20</a:t>
+              <a:t>2/12/20</a:t>
             </a:fld>
             <a:endParaRPr lang="en-US"/>
           </a:p>
@@ -2259,7 +2259,7 @@
           <a:p>
             <a:fld id="{F7C34817-32A6-8B49-A0F9-E5B31E458402}" type="datetimeFigureOut">
               <a:rPr lang="en-US" smtClean="0"/>
-              <a:t>2/10/20</a:t>
+              <a:t>2/12/20</a:t>
             </a:fld>
             <a:endParaRPr lang="en-US"/>
           </a:p>
@@ -2400,7 +2400,7 @@
           <a:p>
             <a:fld id="{F7C34817-32A6-8B49-A0F9-E5B31E458402}" type="datetimeFigureOut">
               <a:rPr lang="en-US" smtClean="0"/>
-              <a:t>2/10/20</a:t>
+              <a:t>2/12/20</a:t>
             </a:fld>
             <a:endParaRPr lang="en-US"/>
           </a:p>
@@ -2513,7 +2513,7 @@
           <a:p>
             <a:fld id="{F7C34817-32A6-8B49-A0F9-E5B31E458402}" type="datetimeFigureOut">
               <a:rPr lang="en-US" smtClean="0"/>
-              <a:t>2/10/20</a:t>
+              <a:t>2/12/20</a:t>
             </a:fld>
             <a:endParaRPr lang="en-US"/>
           </a:p>
@@ -2824,7 +2824,7 @@
           <a:p>
             <a:fld id="{F7C34817-32A6-8B49-A0F9-E5B31E458402}" type="datetimeFigureOut">
               <a:rPr lang="en-US" smtClean="0"/>
-              <a:t>2/10/20</a:t>
+              <a:t>2/12/20</a:t>
             </a:fld>
             <a:endParaRPr lang="en-US"/>
           </a:p>
@@ -3112,7 +3112,7 @@
           <a:p>
             <a:fld id="{F7C34817-32A6-8B49-A0F9-E5B31E458402}" type="datetimeFigureOut">
               <a:rPr lang="en-US" smtClean="0"/>
-              <a:t>2/10/20</a:t>
+              <a:t>2/12/20</a:t>
             </a:fld>
             <a:endParaRPr lang="en-US"/>
           </a:p>
@@ -3353,7 +3353,7 @@
           <a:p>
             <a:fld id="{F7C34817-32A6-8B49-A0F9-E5B31E458402}" type="datetimeFigureOut">
               <a:rPr lang="en-US" smtClean="0"/>
-              <a:t>2/10/20</a:t>
+              <a:t>2/12/20</a:t>
             </a:fld>
             <a:endParaRPr lang="en-US"/>
           </a:p>
@@ -7133,8 +7133,8 @@
         </p:nvSpPr>
         <p:spPr>
           <a:xfrm>
-            <a:off x="96460" y="652527"/>
-            <a:ext cx="11992304" cy="5755422"/>
+            <a:off x="199696" y="106837"/>
+            <a:ext cx="11992304" cy="3539430"/>
           </a:xfrm>
           <a:prstGeom prst="rect">
             <a:avLst/>
@@ -7148,389 +7148,419 @@
           <a:lstStyle/>
           <a:p>
             <a:r>
-              <a:rPr lang="en-US" sz="1600" dirty="0"/>
-              <a:t>A systematic review of fuzzing based on machine learning techniques – by Yan </a:t>
-            </a:r>
-            <a:r>
-              <a:rPr lang="en-US" sz="1600" dirty="0" err="1"/>
+              <a:rPr lang="en-US" sz="1400" dirty="0"/>
+              <a:t>* A systematic review of fuzzing based on machine learning techniques – by Yan </a:t>
+            </a:r>
+            <a:r>
+              <a:rPr lang="en-US" sz="1400" dirty="0" err="1"/>
               <a:t>Wanga</a:t>
             </a:r>
             <a:r>
-              <a:rPr lang="en-US" sz="1600" dirty="0"/>
+              <a:rPr lang="en-US" sz="1400" dirty="0"/>
               <a:t>, Peng </a:t>
             </a:r>
             <a:r>
-              <a:rPr lang="en-US" sz="1600" dirty="0" err="1"/>
+              <a:rPr lang="en-US" sz="1400" dirty="0" err="1"/>
               <a:t>Jiaa</a:t>
             </a:r>
             <a:r>
-              <a:rPr lang="en-US" sz="1600" dirty="0"/>
+              <a:rPr lang="en-US" sz="1400" dirty="0"/>
               <a:t>, </a:t>
             </a:r>
             <a:r>
-              <a:rPr lang="en-US" sz="1600" dirty="0" err="1"/>
+              <a:rPr lang="en-US" sz="1400" dirty="0" err="1"/>
               <a:t>Luping</a:t>
             </a:r>
             <a:r>
-              <a:rPr lang="en-US" sz="1600" dirty="0"/>
+              <a:rPr lang="en-US" sz="1400" dirty="0"/>
               <a:t> </a:t>
             </a:r>
             <a:r>
-              <a:rPr lang="en-US" sz="1600" dirty="0" err="1"/>
+              <a:rPr lang="en-US" sz="1400" dirty="0" err="1"/>
               <a:t>Liub</a:t>
             </a:r>
             <a:r>
-              <a:rPr lang="en-US" sz="1600" dirty="0"/>
+              <a:rPr lang="en-US" sz="1400" dirty="0"/>
               <a:t>, </a:t>
             </a:r>
             <a:r>
-              <a:rPr lang="en-US" sz="1600" dirty="0" err="1"/>
+              <a:rPr lang="en-US" sz="1400" dirty="0" err="1"/>
               <a:t>Jiayong</a:t>
             </a:r>
             <a:r>
-              <a:rPr lang="en-US" sz="1600" dirty="0"/>
-              <a:t> Liua1</a:t>
-            </a:r>
-            <a:endParaRPr lang="en-US" sz="1600" dirty="0">
-              <a:hlinkClick r:id="rId2"/>
-            </a:endParaRPr>
-          </a:p>
-          <a:p>
-            <a:r>
-              <a:rPr lang="en-US" sz="1600" dirty="0"/>
+              <a:rPr lang="en-US" sz="1400" dirty="0"/>
+              <a:t> </a:t>
+            </a:r>
+            <a:r>
+              <a:rPr lang="en-US" sz="1400" dirty="0" err="1"/>
+              <a:t>Liua</a:t>
+            </a:r>
+            <a:r>
+              <a:rPr lang="en-US" sz="1400" dirty="0"/>
+              <a:t>  - </a:t>
+            </a:r>
+            <a:r>
+              <a:rPr lang="en-US" sz="1400" dirty="0">
+                <a:hlinkClick r:id="rId2"/>
+              </a:rPr>
+              <a:t>https://arxiv.org/pdf/1908.01262.pdf</a:t>
+            </a:r>
+            <a:endParaRPr lang="en-US" sz="1400" dirty="0"/>
+          </a:p>
+          <a:p>
+            <a:r>
+              <a:rPr lang="en-US" sz="1400" dirty="0"/>
+              <a:t>* </a:t>
+            </a:r>
+            <a:r>
+              <a:rPr lang="en-US" sz="1400" dirty="0" err="1"/>
+              <a:t>NeuFuzz</a:t>
+            </a:r>
+            <a:r>
+              <a:rPr lang="en-US" sz="1400" dirty="0"/>
+              <a:t>: Efficient Fuzzing With Deep Neural Network – by </a:t>
+            </a:r>
+            <a:r>
+              <a:rPr lang="en-US" sz="1400" dirty="0" err="1"/>
+              <a:t>Yunchao</a:t>
+            </a:r>
+            <a:r>
+              <a:rPr lang="en-US" sz="1400" dirty="0"/>
+              <a:t> Wang; </a:t>
+            </a:r>
+            <a:r>
+              <a:rPr lang="en-US" sz="1400" dirty="0" err="1"/>
+              <a:t>Zehui</a:t>
+            </a:r>
+            <a:r>
+              <a:rPr lang="en-US" sz="1400" dirty="0"/>
+              <a:t> Wu; </a:t>
+            </a:r>
+            <a:r>
+              <a:rPr lang="en-US" sz="1400" dirty="0" err="1"/>
+              <a:t>Qiang</a:t>
+            </a:r>
+            <a:r>
+              <a:rPr lang="en-US" sz="1400" dirty="0"/>
+              <a:t> Wei; </a:t>
+            </a:r>
+            <a:r>
+              <a:rPr lang="en-US" sz="1400" dirty="0" err="1"/>
+              <a:t>Qingxian</a:t>
+            </a:r>
+            <a:r>
+              <a:rPr lang="en-US" sz="1400" dirty="0"/>
+              <a:t> Wang - </a:t>
+            </a:r>
+            <a:r>
+              <a:rPr lang="en-US" sz="1400" dirty="0">
+                <a:hlinkClick r:id="rId3"/>
+              </a:rPr>
+              <a:t>https://ieeexplore.ieee.org/document/8672949</a:t>
+            </a:r>
+            <a:endParaRPr lang="en-US" sz="1400" dirty="0"/>
+          </a:p>
+          <a:p>
+            <a:r>
+              <a:rPr lang="en-US" sz="1400" dirty="0"/>
+              <a:t>* Microsoft - Neural fuzzing: applying Deep Neural Network (DNN) to software security testing … Overall, using neural fuzzing outperformed traditional AFL in most cases.  - </a:t>
+            </a:r>
+            <a:r>
+              <a:rPr lang="en-US" sz="1400" dirty="0">
+                <a:hlinkClick r:id="rId4"/>
+              </a:rPr>
+              <a:t>https://www.microsoft.com/en-us/research/blog/neural-fuzzing/</a:t>
+            </a:r>
+            <a:endParaRPr lang="en-US" sz="1400" dirty="0"/>
+          </a:p>
+          <a:p>
+            <a:r>
+              <a:rPr lang="en-US" sz="1400" dirty="0"/>
+              <a:t>* Coverage-guided Fuzzing for Feedforward Neural Networks – by </a:t>
+            </a:r>
+            <a:r>
+              <a:rPr lang="en-US" sz="1400" dirty="0" err="1"/>
+              <a:t>Xiaofei</a:t>
+            </a:r>
+            <a:r>
+              <a:rPr lang="en-US" sz="1400" dirty="0"/>
+              <a:t> </a:t>
+            </a:r>
+            <a:r>
+              <a:rPr lang="en-US" sz="1400" dirty="0" err="1"/>
+              <a:t>Xie</a:t>
+            </a:r>
+            <a:r>
+              <a:rPr lang="en-US" sz="1400" dirty="0"/>
+              <a:t>; </a:t>
+            </a:r>
+            <a:r>
+              <a:rPr lang="en-US" sz="1400" dirty="0" err="1"/>
+              <a:t>Hongxu</a:t>
+            </a:r>
+            <a:r>
+              <a:rPr lang="en-US" sz="1400" dirty="0"/>
+              <a:t> Chen; Yi Li; Lei Ma; Yang Liu; </a:t>
+            </a:r>
+            <a:r>
+              <a:rPr lang="en-US" sz="1400" dirty="0" err="1"/>
+              <a:t>Jianjun</a:t>
+            </a:r>
+            <a:r>
+              <a:rPr lang="en-US" sz="1400" dirty="0"/>
+              <a:t> Zhao - Singapore &amp; Japan  - </a:t>
+            </a:r>
+            <a:r>
+              <a:rPr lang="en-US" sz="1400" dirty="0">
+                <a:hlinkClick r:id="rId5"/>
+              </a:rPr>
+              <a:t>https://www.ntu.edu.sg/home/yi_li/files/ase19-deephunter.pdf</a:t>
+            </a:r>
+            <a:endParaRPr lang="en-US" sz="1400" dirty="0"/>
+          </a:p>
+          <a:p>
+            <a:r>
+              <a:rPr lang="en-US" sz="1400" dirty="0"/>
+              <a:t>* </a:t>
+            </a:r>
+            <a:r>
+              <a:rPr lang="en-US" sz="1400" dirty="0" err="1"/>
+              <a:t>ReluDiff</a:t>
+            </a:r>
+            <a:r>
+              <a:rPr lang="en-US" sz="1400" dirty="0"/>
+              <a:t>: Differential Verification of Deep Neural Networks – by Brandon Paulsen; </a:t>
+            </a:r>
+            <a:r>
+              <a:rPr lang="en-US" sz="1400" dirty="0" err="1"/>
+              <a:t>Jingbo</a:t>
+            </a:r>
+            <a:r>
+              <a:rPr lang="en-US" sz="1400" dirty="0"/>
+              <a:t> Wang; Chao Wang - </a:t>
+            </a:r>
+            <a:r>
+              <a:rPr lang="en-US" sz="1400" dirty="0">
+                <a:hlinkClick r:id="rId6"/>
+              </a:rPr>
+              <a:t>https://arxiv.org/pdf/2001.03662.pdf</a:t>
+            </a:r>
+            <a:r>
+              <a:rPr lang="en-US" sz="1400" dirty="0"/>
+              <a:t>.      </a:t>
+            </a:r>
+          </a:p>
+          <a:p>
+            <a:r>
+              <a:rPr lang="en-US" sz="1400" dirty="0"/>
+              <a:t>* </a:t>
+            </a:r>
+            <a:r>
+              <a:rPr lang="en-US" sz="1400" dirty="0" err="1"/>
+              <a:t>FuzzerGym</a:t>
+            </a:r>
+            <a:r>
+              <a:rPr lang="en-US" sz="1400" dirty="0"/>
+              <a:t>: A Competitive Framework for Fuzzing and Learning – by William </a:t>
+            </a:r>
+            <a:r>
+              <a:rPr lang="en-US" sz="1400" dirty="0" err="1"/>
+              <a:t>Drozd</a:t>
+            </a:r>
+            <a:r>
+              <a:rPr lang="en-US" sz="1400" dirty="0"/>
+              <a:t> &amp; Michael D. Wagner, CMU - </a:t>
+            </a:r>
+            <a:r>
+              <a:rPr lang="en-US" sz="1400" dirty="0">
+                <a:hlinkClick r:id="rId7"/>
+              </a:rPr>
+              <a:t>https://arxiv.org/pdf/1807.07490.pdf</a:t>
+            </a:r>
+            <a:endParaRPr lang="en-US" sz="1400" dirty="0"/>
+          </a:p>
+          <a:p>
+            <a:r>
+              <a:rPr lang="en-US" sz="1400" dirty="0"/>
+              <a:t>* A systematic review of fuzzing based on machine learning techniques – by Yan </a:t>
+            </a:r>
+            <a:r>
+              <a:rPr lang="en-US" sz="1400" dirty="0" err="1"/>
+              <a:t>Wanga</a:t>
+            </a:r>
+            <a:r>
+              <a:rPr lang="en-US" sz="1400" dirty="0"/>
+              <a:t>, Peng </a:t>
+            </a:r>
+            <a:r>
+              <a:rPr lang="en-US" sz="1400" dirty="0" err="1"/>
+              <a:t>Jiaa</a:t>
+            </a:r>
+            <a:r>
+              <a:rPr lang="en-US" sz="1400" dirty="0"/>
+              <a:t>, </a:t>
+            </a:r>
+            <a:r>
+              <a:rPr lang="en-US" sz="1400" dirty="0" err="1"/>
+              <a:t>Luping</a:t>
+            </a:r>
+            <a:r>
+              <a:rPr lang="en-US" sz="1400" dirty="0"/>
+              <a:t> </a:t>
+            </a:r>
+            <a:r>
+              <a:rPr lang="en-US" sz="1400" dirty="0" err="1"/>
+              <a:t>Liub</a:t>
+            </a:r>
+            <a:r>
+              <a:rPr lang="en-US" sz="1400" dirty="0"/>
+              <a:t>, </a:t>
+            </a:r>
+            <a:r>
+              <a:rPr lang="en-US" sz="1400" dirty="0" err="1"/>
+              <a:t>Jiayong</a:t>
+            </a:r>
+            <a:r>
+              <a:rPr lang="en-US" sz="1400" dirty="0"/>
+              <a:t> </a:t>
+            </a:r>
+            <a:r>
+              <a:rPr lang="en-US" sz="1400" dirty="0" err="1"/>
+              <a:t>Liua</a:t>
+            </a:r>
+            <a:r>
+              <a:rPr lang="en-US" sz="1400" dirty="0"/>
+              <a:t>, China - </a:t>
+            </a:r>
+            <a:r>
+              <a:rPr lang="en-US" sz="1400" dirty="0">
+                <a:hlinkClick r:id="rId2"/>
+              </a:rPr>
+              <a:t>https://arxiv.org/pdf/1908.01262.pdf</a:t>
+            </a:r>
+            <a:r>
+              <a:rPr lang="en-US" sz="1400" dirty="0"/>
+              <a:t>  </a:t>
+            </a:r>
+          </a:p>
+          <a:p>
+            <a:r>
+              <a:rPr lang="en-US" sz="1400" dirty="0"/>
+              <a:t>* The Art, Science, and Engineering of Fuzzing: A Survey (2019) – by Valentin J.M. </a:t>
+            </a:r>
+            <a:r>
+              <a:rPr lang="en-US" sz="1400" dirty="0" err="1"/>
+              <a:t>Man`es</a:t>
+            </a:r>
+            <a:r>
+              <a:rPr lang="en-US" sz="1400" dirty="0"/>
+              <a:t>, </a:t>
+            </a:r>
+            <a:r>
+              <a:rPr lang="en-US" sz="1400" dirty="0" err="1"/>
+              <a:t>HyungSeok</a:t>
+            </a:r>
+            <a:r>
+              <a:rPr lang="en-US" sz="1400" dirty="0"/>
+              <a:t> Han, </a:t>
+            </a:r>
+            <a:r>
+              <a:rPr lang="en-US" sz="1400" dirty="0" err="1"/>
+              <a:t>Choongwoo</a:t>
+            </a:r>
+            <a:r>
+              <a:rPr lang="en-US" sz="1400" dirty="0"/>
+              <a:t> Han, Sang </a:t>
+            </a:r>
+            <a:r>
+              <a:rPr lang="en-US" sz="1400" dirty="0" err="1"/>
+              <a:t>Kil</a:t>
+            </a:r>
+            <a:r>
+              <a:rPr lang="en-US" sz="1400" dirty="0"/>
+              <a:t> Cha, Manuel </a:t>
+            </a:r>
+            <a:r>
+              <a:rPr lang="en-US" sz="1400" dirty="0" err="1"/>
+              <a:t>Egele</a:t>
+            </a:r>
+            <a:r>
+              <a:rPr lang="en-US" sz="1400" dirty="0"/>
+              <a:t>, Edward J. Schwartz, and Maverick Woo - </a:t>
+            </a:r>
+            <a:r>
+              <a:rPr lang="en-US" sz="1400" dirty="0">
+                <a:hlinkClick r:id="rId8"/>
+              </a:rPr>
+              <a:t>https://arxiv.org/pdf/1812.00140.pdf</a:t>
+            </a:r>
+            <a:r>
+              <a:rPr lang="en-US" sz="1400" dirty="0"/>
+              <a:t>  </a:t>
+            </a:r>
+          </a:p>
+          <a:p>
+            <a:r>
+              <a:rPr lang="en-US" sz="1400" dirty="0"/>
+              <a:t>* </a:t>
+            </a:r>
+            <a:r>
+              <a:rPr lang="en-US" sz="1400" dirty="0" err="1"/>
+              <a:t>EnFuzz</a:t>
+            </a:r>
+            <a:r>
+              <a:rPr lang="en-US" sz="1400" dirty="0"/>
+              <a:t>: Ensemble Fuzzing with Seed Synchronization among Diverse </a:t>
+            </a:r>
+            <a:r>
+              <a:rPr lang="en-US" sz="1400" dirty="0" err="1"/>
+              <a:t>Fuzzers</a:t>
+            </a:r>
+            <a:r>
+              <a:rPr lang="en-US" sz="1400" dirty="0"/>
               <a:t> - </a:t>
             </a:r>
             <a:r>
-              <a:rPr lang="en-US" sz="1600" dirty="0">
-                <a:hlinkClick r:id="rId2"/>
-              </a:rPr>
-              <a:t>https://arxiv.org/pdf/1908.01262.pdf</a:t>
-            </a:r>
-            <a:endParaRPr lang="en-US" sz="1600" dirty="0"/>
-          </a:p>
-          <a:p>
-            <a:endParaRPr lang="en-US" sz="1600" dirty="0"/>
-          </a:p>
-          <a:p>
-            <a:r>
-              <a:rPr lang="en-US" sz="1600" dirty="0" err="1"/>
-              <a:t>NeuFuzz</a:t>
-            </a:r>
-            <a:r>
-              <a:rPr lang="en-US" sz="1600" dirty="0"/>
-              <a:t>: Efficient Fuzzing With Deep Neural Network – by </a:t>
-            </a:r>
-            <a:r>
-              <a:rPr lang="en-US" sz="1600" dirty="0" err="1"/>
-              <a:t>Yunchao</a:t>
-            </a:r>
-            <a:r>
-              <a:rPr lang="en-US" sz="1600" dirty="0"/>
-              <a:t> Wang; </a:t>
-            </a:r>
-            <a:r>
-              <a:rPr lang="en-US" sz="1600" dirty="0" err="1"/>
-              <a:t>Zehui</a:t>
-            </a:r>
-            <a:r>
-              <a:rPr lang="en-US" sz="1600" dirty="0"/>
-              <a:t> Wu; </a:t>
-            </a:r>
-            <a:r>
-              <a:rPr lang="en-US" sz="1600" dirty="0" err="1"/>
-              <a:t>Qiang</a:t>
-            </a:r>
-            <a:r>
-              <a:rPr lang="en-US" sz="1600" dirty="0"/>
-              <a:t> Wei; </a:t>
-            </a:r>
-            <a:r>
-              <a:rPr lang="en-US" sz="1600" dirty="0" err="1"/>
-              <a:t>Qingxian</a:t>
-            </a:r>
-            <a:r>
-              <a:rPr lang="en-US" sz="1600" dirty="0"/>
-              <a:t> Wang</a:t>
-            </a:r>
-          </a:p>
-          <a:p>
-            <a:r>
-              <a:rPr lang="en-US" sz="1600" dirty="0"/>
-              <a:t> - </a:t>
-            </a:r>
-            <a:r>
-              <a:rPr lang="en-US" sz="1600" dirty="0">
-                <a:hlinkClick r:id="rId3"/>
-              </a:rPr>
-              <a:t>https://ieeexplore.ieee.org/document/8672949</a:t>
-            </a:r>
-            <a:endParaRPr lang="en-US" sz="1600" dirty="0"/>
-          </a:p>
-          <a:p>
-            <a:endParaRPr lang="en-US" sz="1600" dirty="0"/>
-          </a:p>
-          <a:p>
-            <a:r>
-              <a:rPr lang="en-US" sz="1600" dirty="0"/>
-              <a:t>Microsoft - Neural fuzzing: applying Deep Neural Network (DNN) to software security testing … Overall, using neural fuzzing outperformed traditional AFL in most cases.  - </a:t>
-            </a:r>
-            <a:r>
-              <a:rPr lang="en-US" sz="1600" dirty="0">
-                <a:hlinkClick r:id="rId4"/>
-              </a:rPr>
-              <a:t>https://www.microsoft.com/en-us/research/blog/neural-fuzzing/</a:t>
-            </a:r>
-            <a:endParaRPr lang="en-US" sz="1600" dirty="0"/>
-          </a:p>
-          <a:p>
-            <a:endParaRPr lang="en-US" sz="1600" dirty="0"/>
-          </a:p>
-          <a:p>
-            <a:r>
-              <a:rPr lang="en-US" sz="1600" dirty="0"/>
-              <a:t>Coverage-guided Fuzzing for Feedforward Neural Networks – by </a:t>
-            </a:r>
-            <a:r>
-              <a:rPr lang="en-US" sz="1600" dirty="0" err="1"/>
-              <a:t>Xiaofei</a:t>
-            </a:r>
-            <a:r>
-              <a:rPr lang="en-US" sz="1600" dirty="0"/>
+              <a:rPr lang="en-US" sz="1400" dirty="0">
+                <a:hlinkClick r:id="rId9"/>
+              </a:rPr>
+              <a:t>https://arxiv.org/pdf/1807.00182.pdf</a:t>
+            </a:r>
+            <a:r>
+              <a:rPr lang="en-US" sz="1400" dirty="0"/>
               <a:t> </a:t>
             </a:r>
-            <a:r>
-              <a:rPr lang="en-US" sz="1600" dirty="0" err="1"/>
-              <a:t>Xie</a:t>
-            </a:r>
-            <a:r>
-              <a:rPr lang="en-US" sz="1600" dirty="0"/>
-              <a:t>; </a:t>
-            </a:r>
-            <a:r>
-              <a:rPr lang="en-US" sz="1600" dirty="0" err="1"/>
-              <a:t>Hongxu</a:t>
-            </a:r>
-            <a:r>
-              <a:rPr lang="en-US" sz="1600" dirty="0"/>
-              <a:t> Chen; Yi Li; Lei Ma; Yang Liu; </a:t>
-            </a:r>
-            <a:r>
-              <a:rPr lang="en-US" sz="1600" dirty="0" err="1"/>
-              <a:t>Jianjun</a:t>
-            </a:r>
-            <a:r>
-              <a:rPr lang="en-US" sz="1600" dirty="0"/>
-              <a:t> Zhao - Singapore &amp; Japan  - </a:t>
-            </a:r>
-            <a:r>
-              <a:rPr lang="en-US" sz="1600" dirty="0">
-                <a:hlinkClick r:id="rId5"/>
-              </a:rPr>
-              <a:t>https://www.ntu.edu.sg/home/yi_li/files/ase19-deephunter.pdf</a:t>
-            </a:r>
-            <a:endParaRPr lang="en-US" sz="1600" dirty="0"/>
-          </a:p>
-          <a:p>
-            <a:endParaRPr lang="en-US" sz="1600" dirty="0"/>
-          </a:p>
-          <a:p>
-            <a:r>
-              <a:rPr lang="en-US" sz="1600" dirty="0" err="1"/>
-              <a:t>ReluDiff</a:t>
-            </a:r>
-            <a:r>
-              <a:rPr lang="en-US" sz="1600" dirty="0"/>
-              <a:t>: Differential Verification of Deep Neural Networks – by Brandon Paulsen; </a:t>
-            </a:r>
-            <a:r>
-              <a:rPr lang="en-US" sz="1600" dirty="0" err="1"/>
-              <a:t>Jingbo</a:t>
-            </a:r>
-            <a:r>
-              <a:rPr lang="en-US" sz="1600" dirty="0"/>
-              <a:t> Wang; Chao Wang</a:t>
-            </a:r>
-          </a:p>
-          <a:p>
-            <a:r>
-              <a:rPr lang="en-US" sz="1600" dirty="0"/>
-              <a:t> - </a:t>
-            </a:r>
-            <a:r>
-              <a:rPr lang="en-US" sz="1600" dirty="0">
-                <a:hlinkClick r:id="rId6"/>
-              </a:rPr>
-              <a:t>https://arxiv.org/pdf/2001.03662.pdf</a:t>
-            </a:r>
-            <a:r>
-              <a:rPr lang="en-US" sz="1600" dirty="0"/>
-              <a:t>.      </a:t>
-            </a:r>
-          </a:p>
-          <a:p>
-            <a:endParaRPr lang="en-US" sz="1600" dirty="0"/>
-          </a:p>
-          <a:p>
-            <a:r>
-              <a:rPr lang="en-US" sz="1600" dirty="0" err="1"/>
-              <a:t>FuzzerGym</a:t>
-            </a:r>
-            <a:r>
-              <a:rPr lang="en-US" sz="1600" dirty="0"/>
-              <a:t>: A Competitive Framework for Fuzzing and Learning – by William </a:t>
-            </a:r>
-            <a:r>
-              <a:rPr lang="en-US" sz="1600" dirty="0" err="1"/>
-              <a:t>Drozd</a:t>
-            </a:r>
-            <a:r>
-              <a:rPr lang="en-US" sz="1600" dirty="0"/>
-              <a:t> &amp; Michael D. Wagner, CMU</a:t>
-            </a:r>
-          </a:p>
-          <a:p>
-            <a:r>
-              <a:rPr lang="en-US" sz="1600" dirty="0"/>
-              <a:t> - </a:t>
-            </a:r>
-            <a:r>
-              <a:rPr lang="en-US" sz="1600" dirty="0">
-                <a:hlinkClick r:id="rId7"/>
-              </a:rPr>
-              <a:t>https://arxiv.org/pdf/1807.07490.pdf</a:t>
-            </a:r>
-            <a:endParaRPr lang="en-US" sz="1600" dirty="0"/>
-          </a:p>
-          <a:p>
-            <a:endParaRPr lang="en-US" sz="1600" dirty="0"/>
-          </a:p>
-          <a:p>
-            <a:r>
-              <a:rPr lang="en-US" sz="1600" dirty="0"/>
-              <a:t>A systematic review of fuzzing based on machine learning techniques – by Yan </a:t>
-            </a:r>
-            <a:r>
-              <a:rPr lang="en-US" sz="1600" dirty="0" err="1"/>
-              <a:t>Wanga</a:t>
-            </a:r>
-            <a:r>
-              <a:rPr lang="en-US" sz="1600" dirty="0"/>
-              <a:t>, Peng </a:t>
-            </a:r>
-            <a:r>
-              <a:rPr lang="en-US" sz="1600" dirty="0" err="1"/>
-              <a:t>Jiaa</a:t>
-            </a:r>
-            <a:r>
-              <a:rPr lang="en-US" sz="1600" dirty="0"/>
-              <a:t>, </a:t>
-            </a:r>
-            <a:r>
-              <a:rPr lang="en-US" sz="1600" dirty="0" err="1"/>
-              <a:t>Luping</a:t>
-            </a:r>
-            <a:r>
-              <a:rPr lang="en-US" sz="1600" dirty="0"/>
+          </a:p>
+          <a:p>
+            <a:r>
+              <a:rPr lang="en-US" sz="1400" dirty="0"/>
+              <a:t>* Klee LLVM Execution Engine - </a:t>
+            </a:r>
+            <a:r>
+              <a:rPr lang="en-US" sz="1400" dirty="0">
+                <a:hlinkClick r:id="rId10"/>
+              </a:rPr>
+              <a:t>http://klee.github.io/</a:t>
+            </a:r>
+            <a:r>
+              <a:rPr lang="en-US" sz="1400" dirty="0"/>
               <a:t> </a:t>
             </a:r>
-            <a:r>
-              <a:rPr lang="en-US" sz="1600" dirty="0" err="1"/>
-              <a:t>Liub</a:t>
-            </a:r>
-            <a:r>
-              <a:rPr lang="en-US" sz="1600" dirty="0"/>
-              <a:t>, </a:t>
-            </a:r>
-            <a:r>
-              <a:rPr lang="en-US" sz="1600" dirty="0" err="1"/>
-              <a:t>Jiayong</a:t>
-            </a:r>
-            <a:r>
-              <a:rPr lang="en-US" sz="1600" dirty="0"/>
-              <a:t> </a:t>
-            </a:r>
-            <a:r>
-              <a:rPr lang="en-US" sz="1600" dirty="0" err="1"/>
-              <a:t>Liua</a:t>
-            </a:r>
-            <a:r>
-              <a:rPr lang="en-US" sz="1600" dirty="0"/>
-              <a:t>, China</a:t>
-            </a:r>
-          </a:p>
-          <a:p>
-            <a:r>
-              <a:rPr lang="en-US" sz="1600" dirty="0"/>
-              <a:t> - </a:t>
-            </a:r>
-            <a:r>
-              <a:rPr lang="en-US" sz="1600" dirty="0">
-                <a:hlinkClick r:id="rId2"/>
-              </a:rPr>
-              <a:t>https://arxiv.org/pdf/1908.01262.pdf</a:t>
-            </a:r>
-            <a:r>
-              <a:rPr lang="en-US" sz="1600" dirty="0"/>
+          </a:p>
+          <a:p>
+            <a:r>
+              <a:rPr lang="en-US" sz="1400" dirty="0"/>
+              <a:t>* Microsoft Fuzzing as a service - </a:t>
+            </a:r>
+            <a:r>
+              <a:rPr lang="en-US" sz="1400" dirty="0">
+                <a:hlinkClick r:id="rId11"/>
+              </a:rPr>
+              <a:t>https://www.microsoft.com/en-us/security-risk-detection/</a:t>
+            </a:r>
+            <a:r>
+              <a:rPr lang="en-US" sz="1400" dirty="0"/>
               <a:t>  </a:t>
-            </a:r>
-          </a:p>
-          <a:p>
-            <a:endParaRPr lang="en-US" sz="1600" dirty="0"/>
-          </a:p>
-          <a:p>
-            <a:r>
-              <a:rPr lang="en-US" sz="1600" dirty="0"/>
-              <a:t>The Art, Science, and Engineering of Fuzzing: A Survey (2019) – by Valentin J.M. </a:t>
-            </a:r>
-            <a:r>
-              <a:rPr lang="en-US" sz="1600" dirty="0" err="1"/>
-              <a:t>Man`es</a:t>
-            </a:r>
-            <a:r>
-              <a:rPr lang="en-US" sz="1600" dirty="0"/>
-              <a:t>, </a:t>
-            </a:r>
-            <a:r>
-              <a:rPr lang="en-US" sz="1600" dirty="0" err="1"/>
-              <a:t>HyungSeok</a:t>
-            </a:r>
-            <a:r>
-              <a:rPr lang="en-US" sz="1600" dirty="0"/>
-              <a:t> Han, </a:t>
-            </a:r>
-            <a:r>
-              <a:rPr lang="en-US" sz="1600" dirty="0" err="1"/>
-              <a:t>Choongwoo</a:t>
-            </a:r>
-            <a:r>
-              <a:rPr lang="en-US" sz="1600" dirty="0"/>
-              <a:t> Han, Sang </a:t>
-            </a:r>
-            <a:r>
-              <a:rPr lang="en-US" sz="1600" dirty="0" err="1"/>
-              <a:t>Kil</a:t>
-            </a:r>
-            <a:r>
-              <a:rPr lang="en-US" sz="1600" dirty="0"/>
-              <a:t> Cha, Manuel </a:t>
-            </a:r>
-            <a:r>
-              <a:rPr lang="en-US" sz="1600" dirty="0" err="1"/>
-              <a:t>Egele</a:t>
-            </a:r>
-            <a:r>
-              <a:rPr lang="en-US" sz="1600" dirty="0"/>
-              <a:t>, Edward J. Schwartz, and Maverick Woo - </a:t>
-            </a:r>
-            <a:r>
-              <a:rPr lang="en-US" sz="1600" dirty="0">
-                <a:hlinkClick r:id="rId8"/>
-              </a:rPr>
-              <a:t>https://arxiv.org/pdf/1812.00140.pdf</a:t>
-            </a:r>
-            <a:r>
-              <a:rPr lang="en-US" sz="1600" dirty="0"/>
-              <a:t> </a:t>
             </a:r>
           </a:p>
         </p:txBody>

--- a/fuzzing.pptx
+++ b/fuzzing.pptx
@@ -205,7 +205,7 @@
           <a:p>
             <a:fld id="{681946D7-9ACD-5741-9A93-6BC3A876858B}" type="datetimeFigureOut">
               <a:rPr lang="en-US" smtClean="0"/>
-              <a:t>2/12/20</a:t>
+              <a:t>6/12/21</a:t>
             </a:fld>
             <a:endParaRPr lang="en-US"/>
           </a:p>
@@ -537,6 +537,90 @@
           <a:p>
             <a:fld id="{CA11E873-B224-394B-B916-6479B7FB4561}" type="slidenum">
               <a:rPr lang="en-US" smtClean="0"/>
+              <a:t>3</a:t>
+            </a:fld>
+            <a:endParaRPr lang="en-US"/>
+          </a:p>
+        </p:txBody>
+      </p:sp>
+    </p:spTree>
+    <p:extLst>
+      <p:ext uri="{BB962C8B-B14F-4D97-AF65-F5344CB8AC3E}">
+        <p14:creationId xmlns:p14="http://schemas.microsoft.com/office/powerpoint/2010/main" val="892153596"/>
+      </p:ext>
+    </p:extLst>
+  </p:cSld>
+  <p:clrMapOvr>
+    <a:masterClrMapping/>
+  </p:clrMapOvr>
+</p:notes>
+</file>
+
+<file path=ppt/notesSlides/notesSlide2.xml><?xml version="1.0" encoding="utf-8"?>
+<p:notes xmlns:a="http://schemas.openxmlformats.org/drawingml/2006/main" xmlns:r="http://schemas.openxmlformats.org/officeDocument/2006/relationships" xmlns:p="http://schemas.openxmlformats.org/presentationml/2006/main">
+  <p:cSld>
+    <p:spTree>
+      <p:nvGrpSpPr>
+        <p:cNvPr id="1" name=""/>
+        <p:cNvGrpSpPr/>
+        <p:nvPr/>
+      </p:nvGrpSpPr>
+      <p:grpSpPr>
+        <a:xfrm>
+          <a:off x="0" y="0"/>
+          <a:ext cx="0" cy="0"/>
+          <a:chOff x="0" y="0"/>
+          <a:chExt cx="0" cy="0"/>
+        </a:xfrm>
+      </p:grpSpPr>
+      <p:sp>
+        <p:nvSpPr>
+          <p:cNvPr id="2" name="Slide Image Placeholder 1"/>
+          <p:cNvSpPr>
+            <a:spLocks noGrp="1" noRot="1" noChangeAspect="1"/>
+          </p:cNvSpPr>
+          <p:nvPr>
+            <p:ph type="sldImg"/>
+          </p:nvPr>
+        </p:nvSpPr>
+        <p:spPr/>
+      </p:sp>
+      <p:sp>
+        <p:nvSpPr>
+          <p:cNvPr id="3" name="Notes Placeholder 2"/>
+          <p:cNvSpPr>
+            <a:spLocks noGrp="1"/>
+          </p:cNvSpPr>
+          <p:nvPr>
+            <p:ph type="body" idx="1"/>
+          </p:nvPr>
+        </p:nvSpPr>
+        <p:spPr/>
+        <p:txBody>
+          <a:bodyPr/>
+          <a:lstStyle/>
+          <a:p>
+            <a:endParaRPr lang="en-US" dirty="0"/>
+          </a:p>
+        </p:txBody>
+      </p:sp>
+      <p:sp>
+        <p:nvSpPr>
+          <p:cNvPr id="4" name="Slide Number Placeholder 3"/>
+          <p:cNvSpPr>
+            <a:spLocks noGrp="1"/>
+          </p:cNvSpPr>
+          <p:nvPr>
+            <p:ph type="sldNum" sz="quarter" idx="5"/>
+          </p:nvPr>
+        </p:nvSpPr>
+        <p:spPr/>
+        <p:txBody>
+          <a:bodyPr/>
+          <a:lstStyle/>
+          <a:p>
+            <a:fld id="{CA11E873-B224-394B-B916-6479B7FB4561}" type="slidenum">
+              <a:rPr lang="en-US" smtClean="0"/>
               <a:t>7</a:t>
             </a:fld>
             <a:endParaRPr lang="en-US"/>
@@ -703,7 +787,7 @@
           <a:p>
             <a:fld id="{F7C34817-32A6-8B49-A0F9-E5B31E458402}" type="datetimeFigureOut">
               <a:rPr lang="en-US" smtClean="0"/>
-              <a:t>2/12/20</a:t>
+              <a:t>6/12/21</a:t>
             </a:fld>
             <a:endParaRPr lang="en-US"/>
           </a:p>
@@ -901,7 +985,7 @@
           <a:p>
             <a:fld id="{F7C34817-32A6-8B49-A0F9-E5B31E458402}" type="datetimeFigureOut">
               <a:rPr lang="en-US" smtClean="0"/>
-              <a:t>2/12/20</a:t>
+              <a:t>6/12/21</a:t>
             </a:fld>
             <a:endParaRPr lang="en-US"/>
           </a:p>
@@ -1109,7 +1193,7 @@
           <a:p>
             <a:fld id="{F7C34817-32A6-8B49-A0F9-E5B31E458402}" type="datetimeFigureOut">
               <a:rPr lang="en-US" smtClean="0"/>
-              <a:t>2/12/20</a:t>
+              <a:t>6/12/21</a:t>
             </a:fld>
             <a:endParaRPr lang="en-US"/>
           </a:p>
@@ -1307,7 +1391,7 @@
           <a:p>
             <a:fld id="{F7C34817-32A6-8B49-A0F9-E5B31E458402}" type="datetimeFigureOut">
               <a:rPr lang="en-US" smtClean="0"/>
-              <a:t>2/12/20</a:t>
+              <a:t>6/12/21</a:t>
             </a:fld>
             <a:endParaRPr lang="en-US"/>
           </a:p>
@@ -1582,7 +1666,7 @@
           <a:p>
             <a:fld id="{F7C34817-32A6-8B49-A0F9-E5B31E458402}" type="datetimeFigureOut">
               <a:rPr lang="en-US" smtClean="0"/>
-              <a:t>2/12/20</a:t>
+              <a:t>6/12/21</a:t>
             </a:fld>
             <a:endParaRPr lang="en-US"/>
           </a:p>
@@ -1847,7 +1931,7 @@
           <a:p>
             <a:fld id="{F7C34817-32A6-8B49-A0F9-E5B31E458402}" type="datetimeFigureOut">
               <a:rPr lang="en-US" smtClean="0"/>
-              <a:t>2/12/20</a:t>
+              <a:t>6/12/21</a:t>
             </a:fld>
             <a:endParaRPr lang="en-US"/>
           </a:p>
@@ -2259,7 +2343,7 @@
           <a:p>
             <a:fld id="{F7C34817-32A6-8B49-A0F9-E5B31E458402}" type="datetimeFigureOut">
               <a:rPr lang="en-US" smtClean="0"/>
-              <a:t>2/12/20</a:t>
+              <a:t>6/12/21</a:t>
             </a:fld>
             <a:endParaRPr lang="en-US"/>
           </a:p>
@@ -2400,7 +2484,7 @@
           <a:p>
             <a:fld id="{F7C34817-32A6-8B49-A0F9-E5B31E458402}" type="datetimeFigureOut">
               <a:rPr lang="en-US" smtClean="0"/>
-              <a:t>2/12/20</a:t>
+              <a:t>6/12/21</a:t>
             </a:fld>
             <a:endParaRPr lang="en-US"/>
           </a:p>
@@ -2513,7 +2597,7 @@
           <a:p>
             <a:fld id="{F7C34817-32A6-8B49-A0F9-E5B31E458402}" type="datetimeFigureOut">
               <a:rPr lang="en-US" smtClean="0"/>
-              <a:t>2/12/20</a:t>
+              <a:t>6/12/21</a:t>
             </a:fld>
             <a:endParaRPr lang="en-US"/>
           </a:p>
@@ -2824,7 +2908,7 @@
           <a:p>
             <a:fld id="{F7C34817-32A6-8B49-A0F9-E5B31E458402}" type="datetimeFigureOut">
               <a:rPr lang="en-US" smtClean="0"/>
-              <a:t>2/12/20</a:t>
+              <a:t>6/12/21</a:t>
             </a:fld>
             <a:endParaRPr lang="en-US"/>
           </a:p>
@@ -3112,7 +3196,7 @@
           <a:p>
             <a:fld id="{F7C34817-32A6-8B49-A0F9-E5B31E458402}" type="datetimeFigureOut">
               <a:rPr lang="en-US" smtClean="0"/>
-              <a:t>2/12/20</a:t>
+              <a:t>6/12/21</a:t>
             </a:fld>
             <a:endParaRPr lang="en-US"/>
           </a:p>
@@ -3353,7 +3437,7 @@
           <a:p>
             <a:fld id="{F7C34817-32A6-8B49-A0F9-E5B31E458402}" type="datetimeFigureOut">
               <a:rPr lang="en-US" smtClean="0"/>
-              <a:t>2/12/20</a:t>
+              <a:t>6/12/21</a:t>
             </a:fld>
             <a:endParaRPr lang="en-US"/>
           </a:p>
@@ -3819,7 +3903,7 @@
         </p:nvSpPr>
         <p:spPr>
           <a:xfrm>
-            <a:off x="4970204" y="685599"/>
+            <a:off x="5176707" y="392578"/>
             <a:ext cx="4247539" cy="2308324"/>
           </a:xfrm>
           <a:prstGeom prst="rect">
@@ -3885,8 +3969,8 @@
         </p:blipFill>
         <p:spPr>
           <a:xfrm>
-            <a:off x="9494466" y="109741"/>
-            <a:ext cx="2668037" cy="2884182"/>
+            <a:off x="10011366" y="109741"/>
+            <a:ext cx="2151137" cy="2325407"/>
           </a:xfrm>
           <a:prstGeom prst="rect">
             <a:avLst/>
@@ -3907,7 +3991,7 @@
         </p:nvSpPr>
         <p:spPr>
           <a:xfrm>
-            <a:off x="9900059" y="3085244"/>
+            <a:off x="10011366" y="2424894"/>
             <a:ext cx="2149373" cy="646331"/>
           </a:xfrm>
           <a:prstGeom prst="rect">
@@ -3921,12 +4005,14 @@
           </a:bodyPr>
           <a:lstStyle/>
           <a:p>
+            <a:pPr algn="ctr"/>
             <a:r>
               <a:rPr lang="en-US" dirty="0"/>
               <a:t>Prof. Barton P. Miller</a:t>
             </a:r>
           </a:p>
           <a:p>
+            <a:pPr algn="ctr"/>
             <a:r>
               <a:rPr lang="en-US" dirty="0"/>
               <a:t>Univ. of Wisconsin</a:t>
@@ -3948,8 +4034,8 @@
         </p:nvSpPr>
         <p:spPr>
           <a:xfrm>
-            <a:off x="44244" y="3392128"/>
-            <a:ext cx="8878529" cy="3416320"/>
+            <a:off x="20954" y="3049102"/>
+            <a:ext cx="8187626" cy="3785652"/>
           </a:xfrm>
           <a:prstGeom prst="rect">
             <a:avLst/>
@@ -3967,16 +4053,14 @@
               <a:buChar char="•"/>
             </a:pPr>
             <a:r>
-              <a:rPr lang="en-US" dirty="0"/>
-              <a:t>2012 – </a:t>
-            </a:r>
-            <a:r>
-              <a:rPr lang="en-US" dirty="0" err="1"/>
-              <a:t>ClusterFuzz</a:t>
-            </a:r>
-            <a:r>
-              <a:rPr lang="en-US" dirty="0"/>
-              <a:t> (Google cloud-based fuzzing infrastructure)</a:t>
+              <a:rPr lang="en-US" sz="1600" dirty="0">
+                <a:hlinkClick r:id="rId3"/>
+              </a:rPr>
+              <a:t>https://en.wikipedia.org/wiki/Fuzzing</a:t>
+            </a:r>
+            <a:r>
+              <a:rPr lang="en-US" sz="1600" dirty="0"/>
+              <a:t> </a:t>
             </a:r>
           </a:p>
           <a:p>
@@ -3985,25 +4069,18 @@
               <a:buChar char="•"/>
             </a:pPr>
             <a:r>
-              <a:rPr lang="en-US" dirty="0"/>
-              <a:t>2014 – </a:t>
-            </a:r>
-            <a:r>
-              <a:rPr lang="en-US" dirty="0" err="1"/>
-              <a:t>fuzzer</a:t>
-            </a:r>
-            <a:r>
-              <a:rPr lang="en-US" dirty="0"/>
-              <a:t> AFL success in disclosing </a:t>
-            </a:r>
-            <a:r>
-              <a:rPr lang="en-US" dirty="0" err="1"/>
-              <a:t>Sellchock</a:t>
-            </a:r>
-            <a:r>
-              <a:rPr lang="en-US" dirty="0"/>
-              <a:t> bugs in Unix Bash shell</a:t>
-            </a:r>
+              <a:rPr lang="en-US" sz="1600" dirty="0">
+                <a:hlinkClick r:id="rId4"/>
+              </a:rPr>
+              <a:t>https://www.guru99.com/fuzz-testing.html</a:t>
+            </a:r>
+            <a:r>
+              <a:rPr lang="en-US" sz="1600" dirty="0"/>
+              <a:t> </a:t>
+            </a:r>
+          </a:p>
+          <a:p>
+            <a:endParaRPr lang="en-US" sz="1600" dirty="0"/>
           </a:p>
           <a:p>
             <a:pPr marL="285750" indent="-285750">
@@ -4011,16 +4088,20 @@
               <a:buChar char="•"/>
             </a:pPr>
             <a:r>
-              <a:rPr lang="en-US" dirty="0"/>
-              <a:t>2014-15 – </a:t>
-            </a:r>
-            <a:r>
-              <a:rPr lang="en-US" dirty="0" err="1"/>
-              <a:t>fuzzer</a:t>
-            </a:r>
-            <a:r>
-              <a:rPr lang="en-US" dirty="0"/>
-              <a:t> AFL disclosed the Heartbleed vulnerability in OpenSSL</a:t>
+              <a:rPr lang="en-US" sz="1600" dirty="0"/>
+              <a:t>2012 – </a:t>
+            </a:r>
+            <a:r>
+              <a:rPr lang="en-US" sz="1600" b="1" dirty="0" err="1">
+                <a:solidFill>
+                  <a:srgbClr val="FF0000"/>
+                </a:solidFill>
+              </a:rPr>
+              <a:t>ClusterFuzz</a:t>
+            </a:r>
+            <a:r>
+              <a:rPr lang="en-US" sz="1600" dirty="0"/>
+              <a:t> (Google cloud-based fuzzing infrastructure)</a:t>
             </a:r>
           </a:p>
           <a:p>
@@ -4029,8 +4110,44 @@
               <a:buChar char="•"/>
             </a:pPr>
             <a:r>
-              <a:rPr lang="en-US" dirty="0"/>
-              <a:t>2016 – DARPA (Defense Advanced Research Projects Agency) competition for developing automatic defense systems that can discover, exploit, and correct software flaws in real-time – used fuzzing as offense strategy to discover flaws in the software of the opponents.</a:t>
+              <a:rPr lang="en-US" sz="1600" dirty="0"/>
+              <a:t>2014 – </a:t>
+            </a:r>
+            <a:r>
+              <a:rPr lang="en-US" sz="1600" b="1" dirty="0" err="1">
+                <a:solidFill>
+                  <a:srgbClr val="FF0000"/>
+                </a:solidFill>
+              </a:rPr>
+              <a:t>fuzzer</a:t>
+            </a:r>
+            <a:r>
+              <a:rPr lang="en-US" sz="1600" b="1" dirty="0">
+                <a:solidFill>
+                  <a:srgbClr val="FF0000"/>
+                </a:solidFill>
+              </a:rPr>
+              <a:t> AFL success</a:t>
+            </a:r>
+            <a:r>
+              <a:rPr lang="en-US" sz="1600" dirty="0"/>
+              <a:t> in disclosing </a:t>
+            </a:r>
+            <a:r>
+              <a:rPr lang="en-US" sz="1600" b="1" dirty="0" err="1">
+                <a:solidFill>
+                  <a:srgbClr val="00B050"/>
+                </a:solidFill>
+              </a:rPr>
+              <a:t>Sellchock</a:t>
+            </a:r>
+            <a:r>
+              <a:rPr lang="en-US" sz="1600" b="1" dirty="0">
+                <a:solidFill>
+                  <a:srgbClr val="00B050"/>
+                </a:solidFill>
+              </a:rPr>
+              <a:t> bugs in Unix Bash shell</a:t>
             </a:r>
           </a:p>
           <a:p>
@@ -4039,16 +4156,24 @@
               <a:buChar char="•"/>
             </a:pPr>
             <a:r>
-              <a:rPr lang="en-US" dirty="0"/>
-              <a:t>2016 - Project Springfield (</a:t>
-            </a:r>
-            <a:r>
-              <a:rPr lang="en-US" dirty="0" err="1"/>
-              <a:t>Mocrosoft</a:t>
-            </a:r>
-            <a:r>
-              <a:rPr lang="en-US" dirty="0"/>
-              <a:t> cloud-based fuzz testing service for finding security critical bugs in software.</a:t>
+              <a:rPr lang="en-US" sz="1600" dirty="0"/>
+              <a:t>2014-15 – </a:t>
+            </a:r>
+            <a:r>
+              <a:rPr lang="en-US" sz="1600" dirty="0" err="1"/>
+              <a:t>fuzzer</a:t>
+            </a:r>
+            <a:r>
+              <a:rPr lang="en-US" sz="1600" dirty="0"/>
+              <a:t> AFL disclosed the </a:t>
+            </a:r>
+            <a:r>
+              <a:rPr lang="en-US" sz="1600" b="1" dirty="0">
+                <a:solidFill>
+                  <a:srgbClr val="00B050"/>
+                </a:solidFill>
+              </a:rPr>
+              <a:t>Heartbleed vulnerability in OpenSSL</a:t>
             </a:r>
           </a:p>
           <a:p>
@@ -4057,8 +4182,20 @@
               <a:buChar char="•"/>
             </a:pPr>
             <a:r>
-              <a:rPr lang="en-US" dirty="0"/>
-              <a:t>2016 - OSS-Fuzz (Google) - continuous fuzzing of security-critical open-source projects.</a:t>
+              <a:rPr lang="en-US" sz="1600" dirty="0"/>
+              <a:t>2016 – </a:t>
+            </a:r>
+            <a:r>
+              <a:rPr lang="en-US" sz="1600" b="1" dirty="0">
+                <a:solidFill>
+                  <a:srgbClr val="FF0000"/>
+                </a:solidFill>
+              </a:rPr>
+              <a:t>DARPA (Defense Advanced Research Projects Agency)</a:t>
+            </a:r>
+            <a:r>
+              <a:rPr lang="en-US" sz="1600" dirty="0"/>
+              <a:t> competition for developing automatic defense systems that can discover, exploit, and correct software flaws in real-time – used fuzzing as offense strategy to discover flaws in the software of the opponents.</a:t>
             </a:r>
           </a:p>
           <a:p>
@@ -4067,24 +4204,84 @@
               <a:buChar char="•"/>
             </a:pPr>
             <a:r>
-              <a:rPr lang="en-US" dirty="0"/>
-              <a:t>2018 - At Black Hat 2018, Christopher </a:t>
-            </a:r>
-            <a:r>
-              <a:rPr lang="en-US" dirty="0" err="1"/>
+              <a:rPr lang="en-US" sz="1600" dirty="0"/>
+              <a:t>2016 - Project Springfield - </a:t>
+            </a:r>
+            <a:r>
+              <a:rPr lang="en-US" sz="1600" b="1" dirty="0">
+                <a:solidFill>
+                  <a:srgbClr val="00B050"/>
+                </a:solidFill>
+              </a:rPr>
+              <a:t>Microsoft cloud-based fuzz testing service</a:t>
+            </a:r>
+            <a:r>
+              <a:rPr lang="en-US" sz="1600" dirty="0"/>
+              <a:t> for finding security critical bugs in software.</a:t>
+            </a:r>
+          </a:p>
+          <a:p>
+            <a:pPr marL="285750" indent="-285750">
+              <a:buFont typeface="Arial" panose="020B0604020202020204" pitchFamily="34" charset="0"/>
+              <a:buChar char="•"/>
+            </a:pPr>
+            <a:r>
+              <a:rPr lang="en-US" sz="1600" dirty="0"/>
+              <a:t>2016 - </a:t>
+            </a:r>
+            <a:r>
+              <a:rPr lang="en-US" sz="1600" b="1" dirty="0">
+                <a:solidFill>
+                  <a:srgbClr val="FF0000"/>
+                </a:solidFill>
+              </a:rPr>
+              <a:t>OSS-Fuzz (Google)</a:t>
+            </a:r>
+            <a:r>
+              <a:rPr lang="en-US" sz="1600" dirty="0"/>
+              <a:t> - continuous fuzzing of security-critical open-source projects.</a:t>
+            </a:r>
+          </a:p>
+          <a:p>
+            <a:pPr marL="285750" indent="-285750">
+              <a:buFont typeface="Arial" panose="020B0604020202020204" pitchFamily="34" charset="0"/>
+              <a:buChar char="•"/>
+            </a:pPr>
+            <a:r>
+              <a:rPr lang="en-US" sz="1600" dirty="0"/>
+              <a:t>2018 - </a:t>
+            </a:r>
+            <a:r>
+              <a:rPr lang="en-US" sz="1600" b="1" dirty="0">
+                <a:solidFill>
+                  <a:srgbClr val="FF0000"/>
+                </a:solidFill>
+              </a:rPr>
+              <a:t>At Black Hat 2018</a:t>
+            </a:r>
+            <a:r>
+              <a:rPr lang="en-US" sz="1600" dirty="0"/>
+              <a:t>, Christopher </a:t>
+            </a:r>
+            <a:r>
+              <a:rPr lang="en-US" sz="1600" dirty="0" err="1"/>
               <a:t>Domas</a:t>
             </a:r>
             <a:r>
-              <a:rPr lang="en-US" dirty="0"/>
-              <a:t> demonstrated the use of fuzzing to expose the existence of a hidden RISC core in a </a:t>
-            </a:r>
-            <a:r>
-              <a:rPr lang="en-US" dirty="0" err="1"/>
-              <a:t>processor.This</a:t>
-            </a:r>
-            <a:r>
-              <a:rPr lang="en-US" dirty="0"/>
-              <a:t> core was able to bypass existing security checks to execute Ring 0 commands from Ring 3.</a:t>
+              <a:rPr lang="en-US" sz="1600" dirty="0"/>
+              <a:t> demonstrated the use of fuzzing to expose the existence of a </a:t>
+            </a:r>
+            <a:r>
+              <a:rPr lang="en-US" sz="1600" b="1" dirty="0">
+                <a:solidFill>
+                  <a:srgbClr val="00B050"/>
+                </a:solidFill>
+              </a:rPr>
+              <a:t>hidden RISC core in a processo</a:t>
+            </a:r>
+            <a:r>
+              <a:rPr lang="en-US" sz="1600" dirty="0"/>
+              <a:t>r. This core was able to bypass existing security checks to execute Ring 0 commands from Ring 3.</a:t>
             </a:r>
           </a:p>
         </p:txBody>
@@ -4447,6 +4644,58 @@
           </a:p>
         </p:txBody>
       </p:sp>
+      <p:sp>
+        <p:nvSpPr>
+          <p:cNvPr id="2" name="TextBox 1">
+            <a:extLst>
+              <a:ext uri="{FF2B5EF4-FFF2-40B4-BE49-F238E27FC236}">
+                <a16:creationId xmlns:a16="http://schemas.microsoft.com/office/drawing/2014/main" id="{71DE4A89-2F12-A140-ABC9-8EA7590E027A}"/>
+              </a:ext>
+            </a:extLst>
+          </p:cNvPr>
+          <p:cNvSpPr txBox="1"/>
+          <p:nvPr/>
+        </p:nvSpPr>
+        <p:spPr>
+          <a:xfrm>
+            <a:off x="8553387" y="3558009"/>
+            <a:ext cx="3638613" cy="1569660"/>
+          </a:xfrm>
+          <a:prstGeom prst="rect">
+            <a:avLst/>
+          </a:prstGeom>
+          <a:noFill/>
+        </p:spPr>
+        <p:txBody>
+          <a:bodyPr wrap="square" rtlCol="0">
+            <a:spAutoFit/>
+          </a:bodyPr>
+          <a:lstStyle/>
+          <a:p>
+            <a:pPr marL="285750" indent="-285750">
+              <a:buFont typeface="Arial" panose="020B0604020202020204" pitchFamily="34" charset="0"/>
+              <a:buChar char="•"/>
+            </a:pPr>
+            <a:r>
+              <a:rPr lang="en-US" sz="1600" dirty="0"/>
+              <a:t>Fuzzy testing known to find the most serious security faults or defects. </a:t>
+            </a:r>
+          </a:p>
+          <a:p>
+            <a:endParaRPr lang="en-US" sz="1600" dirty="0"/>
+          </a:p>
+          <a:p>
+            <a:pPr marL="285750" indent="-285750">
+              <a:buFont typeface="Arial" panose="020B0604020202020204" pitchFamily="34" charset="0"/>
+              <a:buChar char="•"/>
+            </a:pPr>
+            <a:r>
+              <a:rPr lang="en-US" sz="1600" dirty="0"/>
+              <a:t>Fuzzing is one of the most common method hackers used to find vulnerability of the system.</a:t>
+            </a:r>
+          </a:p>
+        </p:txBody>
+      </p:sp>
     </p:spTree>
     <p:extLst>
       <p:ext uri="{BB962C8B-B14F-4D97-AF65-F5344CB8AC3E}">
@@ -4873,7 +5122,7 @@
         <p:spPr>
           <a:xfrm>
             <a:off x="0" y="813184"/>
-            <a:ext cx="10499832" cy="369332"/>
+            <a:ext cx="7420299" cy="646331"/>
           </a:xfrm>
           <a:prstGeom prst="rect">
             <a:avLst/>
@@ -4888,7 +5137,13 @@
           <a:p>
             <a:r>
               <a:rPr lang="en-US" dirty="0"/>
-              <a:t>Fuzz Testing — A Primer: </a:t>
+              <a:t>Fuzz Testing — A Primer:</a:t>
+            </a:r>
+          </a:p>
+          <a:p>
+            <a:r>
+              <a:rPr lang="en-US" dirty="0"/>
+              <a:t>- </a:t>
             </a:r>
             <a:r>
               <a:rPr lang="en-US" dirty="0">
@@ -5044,8 +5299,8 @@
         </p:nvSpPr>
         <p:spPr>
           <a:xfrm>
-            <a:off x="0" y="103236"/>
-            <a:ext cx="12192000" cy="6124754"/>
+            <a:off x="0" y="29666"/>
+            <a:ext cx="12192000" cy="6740307"/>
           </a:xfrm>
           <a:prstGeom prst="rect">
             <a:avLst/>
@@ -5060,7 +5315,13 @@
           <a:p>
             <a:r>
               <a:rPr lang="en-US" sz="1600" dirty="0"/>
-              <a:t>This page walks you through setting up coverage guided fuzzing using </a:t>
+              <a:t>This page walks you through setting up </a:t>
+            </a:r>
+          </a:p>
+          <a:p>
+            <a:r>
+              <a:rPr lang="en-US" sz="1600" dirty="0"/>
+              <a:t>coverage guided fuzzing using </a:t>
             </a:r>
             <a:r>
               <a:rPr lang="en-US" sz="1600" b="1" dirty="0" err="1">
@@ -5094,16 +5355,43 @@
             </a:r>
             <a:r>
               <a:rPr lang="en-US" sz="1600" dirty="0">
-                <a:hlinkClick r:id="rId2"/>
+                <a:hlinkClick r:id="rId3"/>
               </a:rPr>
               <a:t>https://google.github.io/clusterfuzz/setting-up-fuzzing/libfuzzer-and-afl/</a:t>
             </a:r>
             <a:endParaRPr lang="en-US" sz="1600" dirty="0"/>
           </a:p>
           <a:p>
-            <a:r>
-              <a:rPr lang="en-US" sz="1600" dirty="0"/>
-              <a:t>The idea is to insert hooks into execution. Easiest method to achieve this is to compile source code using provided compiler to insert hooks. But it is also possible to decompile an executable file, or to target the LLVM </a:t>
+            <a:endParaRPr lang="en-US" sz="1600" dirty="0"/>
+          </a:p>
+          <a:p>
+            <a:r>
+              <a:rPr lang="en-US" sz="1600" dirty="0"/>
+              <a:t>The idea is to </a:t>
+            </a:r>
+            <a:r>
+              <a:rPr lang="en-US" sz="1600" b="1" dirty="0">
+                <a:solidFill>
+                  <a:srgbClr val="00B050"/>
+                </a:solidFill>
+              </a:rPr>
+              <a:t>insert hooks into execution</a:t>
+            </a:r>
+            <a:r>
+              <a:rPr lang="en-US" sz="1600" dirty="0"/>
+              <a:t>. </a:t>
+            </a:r>
+          </a:p>
+          <a:p>
+            <a:r>
+              <a:rPr lang="en-US" sz="1600" dirty="0"/>
+              <a:t>Easiest method to achieve this is to compile source code using provided compiler to insert hooks. </a:t>
+            </a:r>
+          </a:p>
+          <a:p>
+            <a:r>
+              <a:rPr lang="en-US" sz="1600" dirty="0"/>
+              <a:t>But it is also possible to decompile an executable file, or to target the LLVM </a:t>
             </a:r>
             <a:r>
               <a:rPr lang="en-US" sz="1600" dirty="0" err="1"/>
@@ -5119,8 +5407,16 @@
           </a:p>
           <a:p>
             <a:r>
-              <a:rPr lang="en-US" sz="2800" b="1" dirty="0"/>
-              <a:t>AFL = American Fuzzy Lop </a:t>
+              <a:rPr lang="en-US" sz="1600" b="1" dirty="0">
+                <a:solidFill>
+                  <a:srgbClr val="00B050"/>
+                </a:solidFill>
+              </a:rPr>
+              <a:t>AFL = American Fuzzy Lop</a:t>
+            </a:r>
+            <a:r>
+              <a:rPr lang="en-US" sz="1600" b="1" dirty="0"/>
+              <a:t> </a:t>
             </a:r>
             <a:r>
               <a:rPr lang="en-US" sz="1600" dirty="0"/>
@@ -5131,21 +5427,21 @@
             <a:r>
               <a:rPr lang="en-US" sz="1600" dirty="0"/>
               <a:t> - </a:t>
-            </a:r>
-            <a:r>
-              <a:rPr lang="en-US" sz="1600" dirty="0">
-                <a:hlinkClick r:id="rId3"/>
-              </a:rPr>
-              <a:t>http://lcamtuf.coredump.cx/afl/</a:t>
-            </a:r>
-            <a:r>
-              <a:rPr lang="en-US" sz="1600" dirty="0"/>
-              <a:t> , read excellent intro here:    - </a:t>
             </a:r>
             <a:r>
               <a:rPr lang="en-US" sz="1600" dirty="0">
                 <a:hlinkClick r:id="rId4"/>
               </a:rPr>
+              <a:t>http://lcamtuf.coredump.cx/afl/</a:t>
+            </a:r>
+            <a:r>
+              <a:rPr lang="en-US" sz="1600" dirty="0"/>
+              <a:t> , read excellent intro here:    - </a:t>
+            </a:r>
+            <a:r>
+              <a:rPr lang="en-US" sz="1600" dirty="0">
+                <a:hlinkClick r:id="rId5"/>
+              </a:rPr>
               <a:t>https://github.com/google/AFL</a:t>
             </a:r>
             <a:r>
@@ -5168,7 +5464,7 @@
             </a:r>
             <a:r>
               <a:rPr lang="en-US" sz="1600" dirty="0">
-                <a:hlinkClick r:id="rId5"/>
+                <a:hlinkClick r:id="rId6"/>
               </a:rPr>
               <a:t>https://github.com/google/AFL/blob/master/docs/QuickStartGuide.txt</a:t>
             </a:r>
@@ -5176,8 +5472,16 @@
           </a:p>
           <a:p>
             <a:r>
-              <a:rPr lang="en-US" sz="1600" dirty="0"/>
-              <a:t>AFL is a security-oriented </a:t>
+              <a:rPr lang="en-US" sz="1600" b="1" dirty="0">
+                <a:solidFill>
+                  <a:srgbClr val="00B050"/>
+                </a:solidFill>
+              </a:rPr>
+              <a:t>AFL</a:t>
+            </a:r>
+            <a:r>
+              <a:rPr lang="en-US" sz="1600" dirty="0"/>
+              <a:t> is a security-oriented </a:t>
             </a:r>
             <a:r>
               <a:rPr lang="en-US" sz="1600" dirty="0" err="1"/>
@@ -5197,7 +5501,7 @@
             </a:r>
             <a:r>
               <a:rPr lang="en-US" sz="1600" dirty="0">
-                <a:hlinkClick r:id="rId6"/>
+                <a:hlinkClick r:id="rId7"/>
               </a:rPr>
               <a:t>lcamtuf@google.com</a:t>
             </a:r>
@@ -5209,7 +5513,19 @@
           <a:p>
             <a:r>
               <a:rPr lang="en-US" sz="1600" dirty="0"/>
-              <a:t>Usage: compile source code of your system using AFL c-compiler (</a:t>
+              <a:t>Usage: compile source code of your system using </a:t>
+            </a:r>
+            <a:r>
+              <a:rPr lang="en-US" sz="1600" b="1" dirty="0">
+                <a:solidFill>
+                  <a:srgbClr val="00B050"/>
+                </a:solidFill>
+              </a:rPr>
+              <a:t>AFL</a:t>
+            </a:r>
+            <a:r>
+              <a:rPr lang="en-US" sz="1600" dirty="0"/>
+              <a:t> c-compiler (</a:t>
             </a:r>
             <a:r>
               <a:rPr lang="en-US" sz="1600" dirty="0" err="1"/>
@@ -5217,7 +5533,21 @@
             </a:r>
             <a:r>
               <a:rPr lang="en-US" sz="1600" dirty="0"/>
-              <a:t> of clang). This inserts hooks into the code, thus allowing  to detect place in the code where things happen, and to do adjustments using feedback.</a:t>
+              <a:t> of clang). </a:t>
+            </a:r>
+          </a:p>
+          <a:p>
+            <a:r>
+              <a:rPr lang="en-US" sz="1600" b="1" dirty="0">
+                <a:solidFill>
+                  <a:srgbClr val="00B050"/>
+                </a:solidFill>
+              </a:rPr>
+              <a:t>This inserts hooks into the code</a:t>
+            </a:r>
+            <a:r>
+              <a:rPr lang="en-US" sz="1600" dirty="0"/>
+              <a:t>, thus allowing  to detect place in the code where things happen, and to do adjustments using feedback.</a:t>
             </a:r>
           </a:p>
           <a:p>
@@ -5225,23 +5555,18 @@
           </a:p>
           <a:p>
             <a:r>
-              <a:rPr lang="en-US" sz="2800" b="1" dirty="0" err="1"/>
+              <a:rPr lang="en-US" sz="1600" b="1" dirty="0" err="1">
+                <a:solidFill>
+                  <a:srgbClr val="00B050"/>
+                </a:solidFill>
+              </a:rPr>
               <a:t>libFuzzer</a:t>
             </a:r>
-            <a:endParaRPr lang="en-US" sz="2800" b="1" dirty="0"/>
-          </a:p>
-          <a:p>
-            <a:r>
-              <a:rPr lang="en-US" sz="1600" dirty="0"/>
-              <a:t> - </a:t>
-            </a:r>
-            <a:r>
-              <a:rPr lang="en-US" sz="1600" dirty="0">
-                <a:hlinkClick r:id="rId7"/>
-              </a:rPr>
-              <a:t>https://llvm.org/docs/LibFuzzer.html</a:t>
-            </a:r>
-            <a:endParaRPr lang="en-US" sz="1600" dirty="0"/>
+            <a:endParaRPr lang="en-US" sz="1600" b="1" dirty="0">
+              <a:solidFill>
+                <a:srgbClr val="00B050"/>
+              </a:solidFill>
+            </a:endParaRPr>
           </a:p>
           <a:p>
             <a:r>
@@ -5252,12 +5577,9 @@
               <a:rPr lang="en-US" sz="1600" dirty="0">
                 <a:hlinkClick r:id="rId8"/>
               </a:rPr>
-              <a:t>https://github.com/google/fuzzing/blob/master/tutorial/libFuzzerTutorial.md</a:t>
-            </a:r>
-            <a:r>
-              <a:rPr lang="en-US" sz="1600" dirty="0"/>
-              <a:t> </a:t>
-            </a:r>
+              <a:t>https://llvm.org/docs/LibFuzzer.html</a:t>
+            </a:r>
+            <a:endParaRPr lang="en-US" sz="1600" dirty="0"/>
           </a:p>
           <a:p>
             <a:r>
@@ -5268,6 +5590,22 @@
               <a:rPr lang="en-US" sz="1600" dirty="0">
                 <a:hlinkClick r:id="rId9"/>
               </a:rPr>
+              <a:t>https://github.com/google/fuzzing/blob/master/tutorial/libFuzzerTutorial.md</a:t>
+            </a:r>
+            <a:r>
+              <a:rPr lang="en-US" sz="1600" dirty="0"/>
+              <a:t> </a:t>
+            </a:r>
+          </a:p>
+          <a:p>
+            <a:r>
+              <a:rPr lang="en-US" sz="1600" dirty="0"/>
+              <a:t> - </a:t>
+            </a:r>
+            <a:r>
+              <a:rPr lang="en-US" sz="1600" dirty="0">
+                <a:hlinkClick r:id="rId10"/>
+              </a:rPr>
               <a:t>https://scholar.google.com/scholar?start=10&amp;q=fuzz+testing+libfuzzer&amp;hl=en&amp;as_sdt=0,33</a:t>
             </a:r>
             <a:endParaRPr lang="en-US" sz="1600" dirty="0"/>
@@ -5288,7 +5626,11 @@
           </a:p>
           <a:p>
             <a:r>
-              <a:rPr lang="en-US" sz="1600" dirty="0" err="1"/>
+              <a:rPr lang="en-US" sz="1600" b="1" dirty="0" err="1">
+                <a:solidFill>
+                  <a:srgbClr val="00B050"/>
+                </a:solidFill>
+              </a:rPr>
               <a:t>libFuzzer</a:t>
             </a:r>
             <a:r>
@@ -5377,12 +5719,22 @@
           </a:p>
           <a:p>
             <a:r>
-              <a:rPr lang="en-US" sz="1600" dirty="0" err="1"/>
+              <a:rPr lang="en-US" sz="1600" b="1" dirty="0" err="1">
+                <a:solidFill>
+                  <a:srgbClr val="00B050"/>
+                </a:solidFill>
+              </a:rPr>
               <a:t>libFuzzer</a:t>
             </a:r>
             <a:r>
               <a:rPr lang="en-US" sz="1600" dirty="0"/>
-              <a:t> requires a bit more work to setup (comparing with AFL), but it is ideal when it comes to fuzzing specific API calls in a library </a:t>
+              <a:t> requires a bit more work to setup (comparing with AFL), </a:t>
+            </a:r>
+          </a:p>
+          <a:p>
+            <a:r>
+              <a:rPr lang="en-US" sz="1600" dirty="0"/>
+              <a:t>but it is ideal when it comes to fuzzing specific API calls in a library </a:t>
             </a:r>
           </a:p>
           <a:p>
@@ -5402,7 +5754,19 @@
           <a:p>
             <a:r>
               <a:rPr lang="en-US" sz="1600" dirty="0"/>
-              <a:t>Also It is possible to use AFL engine while using a target function like in </a:t>
+              <a:t>Also It is possible to use </a:t>
+            </a:r>
+            <a:r>
+              <a:rPr lang="en-US" sz="1600" b="1" dirty="0">
+                <a:solidFill>
+                  <a:srgbClr val="00B050"/>
+                </a:solidFill>
+              </a:rPr>
+              <a:t>AFL</a:t>
+            </a:r>
+            <a:r>
+              <a:rPr lang="en-US" sz="1600" dirty="0"/>
+              <a:t> engine while using a target function like in </a:t>
             </a:r>
             <a:r>
               <a:rPr lang="en-US" sz="1600" dirty="0" err="1"/>
@@ -5925,8 +6289,16 @@
           <a:lstStyle/>
           <a:p>
             <a:r>
+              <a:rPr lang="en-US" b="1" dirty="0">
+                <a:solidFill>
+                  <a:srgbClr val="00B050"/>
+                </a:solidFill>
+              </a:rPr>
+              <a:t>Evolutionary fuzzing</a:t>
+            </a:r>
+            <a:r>
               <a:rPr lang="en-US" dirty="0"/>
-              <a:t>Evolutionary fuzzing - converging towards the discovery of weaknesses. </a:t>
+              <a:t> - converging towards the discovery of weaknesses. </a:t>
             </a:r>
           </a:p>
           <a:p>
@@ -5940,8 +6312,16 @@
           </a:p>
           <a:p>
             <a:r>
+              <a:rPr lang="en-US" b="1" dirty="0">
+                <a:solidFill>
+                  <a:srgbClr val="00B050"/>
+                </a:solidFill>
+              </a:rPr>
+              <a:t>Evolutionary fuzzing</a:t>
+            </a:r>
+            <a:r>
               <a:rPr lang="en-US" dirty="0"/>
-              <a:t>Evolutionary fuzzing - use feedback from each test case to learn the format of the input over time. </a:t>
+              <a:t> - use feedback from each test case to learn the format of the input over time. </a:t>
             </a:r>
             <a:br>
               <a:rPr lang="en-US" dirty="0"/>
@@ -5964,8 +6344,16 @@
           </a:p>
           <a:p>
             <a:r>
+              <a:rPr lang="en-US" b="1" dirty="0">
+                <a:solidFill>
+                  <a:srgbClr val="00B050"/>
+                </a:solidFill>
+              </a:rPr>
+              <a:t>Evolutionary fuzzing</a:t>
+            </a:r>
+            <a:r>
               <a:rPr lang="en-US" dirty="0"/>
-              <a:t>Evolutionary fuzzing often relies on other techniques similar to genetic algorithms and may require some form of binary instrumentation to operate correctly.</a:t>
+              <a:t> often relies on other techniques similar to genetic algorithms and may require some form of binary instrumentation to operate correctly.</a:t>
             </a:r>
           </a:p>
           <a:p>
@@ -5973,7 +6361,11 @@
           </a:p>
           <a:p>
             <a:r>
-              <a:rPr lang="en-US" dirty="0" err="1"/>
+              <a:rPr lang="en-US" b="1" dirty="0" err="1">
+                <a:solidFill>
+                  <a:srgbClr val="00B050"/>
+                </a:solidFill>
+              </a:rPr>
               <a:t>libFuzzer</a:t>
             </a:r>
             <a:r>
@@ -5981,7 +6373,11 @@
               <a:t> – a library for coverage-guided fuzz testing. </a:t>
             </a:r>
             <a:r>
-              <a:rPr lang="en-US" dirty="0" err="1"/>
+              <a:rPr lang="en-US" b="1" dirty="0" err="1">
+                <a:solidFill>
+                  <a:srgbClr val="00B050"/>
+                </a:solidFill>
+              </a:rPr>
               <a:t>LibFuzzer</a:t>
             </a:r>
             <a:r>
@@ -5989,7 +6385,11 @@
               <a:t> is in-process, coverage-guided, evolutionary fuzzing engine. </a:t>
             </a:r>
             <a:r>
-              <a:rPr lang="en-US" dirty="0" err="1"/>
+              <a:rPr lang="en-US" b="1" dirty="0" err="1">
+                <a:solidFill>
+                  <a:srgbClr val="00B050"/>
+                </a:solidFill>
+              </a:rPr>
               <a:t>LibFuzzer</a:t>
             </a:r>
             <a:r>
@@ -6660,8 +7060,8 @@
         </p:nvSpPr>
         <p:spPr>
           <a:xfrm>
-            <a:off x="0" y="738664"/>
-            <a:ext cx="12034684" cy="3785652"/>
+            <a:off x="567559" y="1201119"/>
+            <a:ext cx="10205544" cy="4555093"/>
           </a:xfrm>
           <a:prstGeom prst="rect">
             <a:avLst/>
@@ -6675,6 +7075,9 @@
           <a:lstStyle/>
           <a:p>
             <a:pPr marL="285750" indent="-285750">
+              <a:spcAft>
+                <a:spcPts val="600"/>
+              </a:spcAft>
               <a:buFont typeface="Arial" panose="020B0604020202020204" pitchFamily="34" charset="0"/>
               <a:buChar char="•"/>
             </a:pPr>
@@ -6693,6 +7096,9 @@
           </a:p>
           <a:p>
             <a:pPr marL="285750" indent="-285750">
+              <a:spcAft>
+                <a:spcPts val="600"/>
+              </a:spcAft>
               <a:buFont typeface="Arial" panose="020B0604020202020204" pitchFamily="34" charset="0"/>
               <a:buChar char="•"/>
             </a:pPr>
@@ -6706,11 +7112,14 @@
             </a:r>
             <a:r>
               <a:rPr lang="en-US" sz="1600" dirty="0"/>
-              <a:t> - provides a comprehensive generation framework, allowing structured data to be represented for generation based fuzzing. It also contains components to help with recording test cases and detecting crashes.</a:t>
+              <a:t> - provides a comprehensive generation framework, allowing structured data to be represented for generation-based fuzzing. It also contains components to help with recording test cases and detecting crashes.</a:t>
             </a:r>
           </a:p>
           <a:p>
             <a:pPr marL="285750" indent="-285750">
+              <a:spcAft>
+                <a:spcPts val="600"/>
+              </a:spcAft>
               <a:buFont typeface="Arial" panose="020B0604020202020204" pitchFamily="34" charset="0"/>
               <a:buChar char="•"/>
             </a:pPr>
@@ -6729,6 +7138,9 @@
           </a:p>
           <a:p>
             <a:pPr marL="285750" indent="-285750">
+              <a:spcAft>
+                <a:spcPts val="600"/>
+              </a:spcAft>
               <a:buFont typeface="Arial" panose="020B0604020202020204" pitchFamily="34" charset="0"/>
               <a:buChar char="•"/>
             </a:pPr>
@@ -6755,6 +7167,9 @@
           </a:p>
           <a:p>
             <a:pPr marL="285750" indent="-285750">
+              <a:spcAft>
+                <a:spcPts val="600"/>
+              </a:spcAft>
               <a:buFont typeface="Arial" panose="020B0604020202020204" pitchFamily="34" charset="0"/>
               <a:buChar char="•"/>
             </a:pPr>
@@ -6781,6 +7196,9 @@
           </a:p>
           <a:p>
             <a:pPr marL="285750" indent="-285750">
+              <a:spcAft>
+                <a:spcPts val="600"/>
+              </a:spcAft>
               <a:buFont typeface="Arial" panose="020B0604020202020204" pitchFamily="34" charset="0"/>
               <a:buChar char="•"/>
             </a:pPr>
@@ -6807,6 +7225,9 @@
           </a:p>
           <a:p>
             <a:pPr marL="285750" indent="-285750">
+              <a:spcAft>
+                <a:spcPts val="600"/>
+              </a:spcAft>
               <a:buFont typeface="Arial" panose="020B0604020202020204" pitchFamily="34" charset="0"/>
               <a:buChar char="•"/>
             </a:pPr>
@@ -6825,6 +7246,9 @@
           </a:p>
           <a:p>
             <a:pPr marL="285750" indent="-285750">
+              <a:spcAft>
+                <a:spcPts val="600"/>
+              </a:spcAft>
               <a:buFont typeface="Arial" panose="020B0604020202020204" pitchFamily="34" charset="0"/>
               <a:buChar char="•"/>
             </a:pPr>
@@ -6843,6 +7267,9 @@
           </a:p>
           <a:p>
             <a:pPr marL="285750" indent="-285750">
+              <a:spcAft>
+                <a:spcPts val="600"/>
+              </a:spcAft>
               <a:buFont typeface="Arial" panose="020B0604020202020204" pitchFamily="34" charset="0"/>
               <a:buChar char="•"/>
             </a:pPr>
@@ -6877,6 +7304,9 @@
           </a:p>
           <a:p>
             <a:pPr marL="285750" indent="-285750">
+              <a:spcAft>
+                <a:spcPts val="600"/>
+              </a:spcAft>
               <a:buFont typeface="Arial" panose="020B0604020202020204" pitchFamily="34" charset="0"/>
               <a:buChar char="•"/>
             </a:pPr>
@@ -6896,6 +7326,11 @@
             </a:r>
           </a:p>
           <a:p>
+            <a:pPr>
+              <a:spcAft>
+                <a:spcPts val="600"/>
+              </a:spcAft>
+            </a:pPr>
             <a:endParaRPr lang="en-US" sz="1600" dirty="0"/>
           </a:p>
         </p:txBody>
@@ -6945,7 +7380,7 @@
         <p:spPr>
           <a:xfrm>
             <a:off x="546538" y="430924"/>
-            <a:ext cx="11140965" cy="3970318"/>
+            <a:ext cx="11140965" cy="4154984"/>
           </a:xfrm>
           <a:prstGeom prst="rect">
             <a:avLst/>
@@ -6959,7 +7394,7 @@
           <a:lstStyle/>
           <a:p>
             <a:r>
-              <a:rPr lang="en-US" dirty="0"/>
+              <a:rPr lang="en-US" sz="2800" b="1" dirty="0"/>
               <a:t>Facebook Testing Tools</a:t>
             </a:r>
           </a:p>
@@ -6968,6 +7403,9 @@
           </a:p>
           <a:p>
             <a:pPr marL="285750" indent="-285750">
+              <a:spcAft>
+                <a:spcPts val="600"/>
+              </a:spcAft>
               <a:buFont typeface="Arial" panose="020B0604020202020204" pitchFamily="34" charset="0"/>
               <a:buChar char="•"/>
             </a:pPr>
@@ -6987,10 +7425,10 @@
             </a:r>
           </a:p>
           <a:p>
-            <a:endParaRPr lang="en-US" dirty="0"/>
-          </a:p>
-          <a:p>
             <a:pPr marL="285750" indent="-285750">
+              <a:spcAft>
+                <a:spcPts val="600"/>
+              </a:spcAft>
               <a:buFont typeface="Arial" panose="020B0604020202020204" pitchFamily="34" charset="0"/>
               <a:buChar char="•"/>
             </a:pPr>
@@ -7035,6 +7473,9 @@
           </a:p>
           <a:p>
             <a:pPr marL="285750" indent="-285750">
+              <a:spcAft>
+                <a:spcPts val="600"/>
+              </a:spcAft>
               <a:buFont typeface="Arial" panose="020B0604020202020204" pitchFamily="34" charset="0"/>
               <a:buChar char="•"/>
             </a:pPr>
@@ -7053,6 +7494,9 @@
           </a:p>
           <a:p>
             <a:pPr marL="285750" indent="-285750">
+              <a:spcAft>
+                <a:spcPts val="600"/>
+              </a:spcAft>
               <a:buFont typeface="Arial" panose="020B0604020202020204" pitchFamily="34" charset="0"/>
               <a:buChar char="•"/>
             </a:pPr>
@@ -7071,6 +7515,9 @@
           </a:p>
           <a:p>
             <a:pPr marL="285750" indent="-285750">
+              <a:spcAft>
+                <a:spcPts val="600"/>
+              </a:spcAft>
               <a:buFont typeface="Arial" panose="020B0604020202020204" pitchFamily="34" charset="0"/>
               <a:buChar char="•"/>
             </a:pPr>
@@ -7133,8 +7580,8 @@
         </p:nvSpPr>
         <p:spPr>
           <a:xfrm>
-            <a:off x="199696" y="106837"/>
-            <a:ext cx="11992304" cy="3539430"/>
+            <a:off x="199697" y="720476"/>
+            <a:ext cx="10058400" cy="6032421"/>
           </a:xfrm>
           <a:prstGeom prst="rect">
             <a:avLst/>
@@ -7147,17 +7594,23 @@
           </a:bodyPr>
           <a:lstStyle/>
           <a:p>
+            <a:pPr marL="285750" indent="-285750">
+              <a:spcAft>
+                <a:spcPts val="600"/>
+              </a:spcAft>
+              <a:buFont typeface="Arial" panose="020B0604020202020204" pitchFamily="34" charset="0"/>
+              <a:buChar char="•"/>
+            </a:pPr>
             <a:r>
               <a:rPr lang="en-US" sz="1400" dirty="0"/>
-              <a:t>* A systematic review of fuzzing based on machine learning techniques – by Yan </a:t>
-            </a:r>
-            <a:r>
-              <a:rPr lang="en-US" sz="1400" dirty="0" err="1"/>
-              <a:t>Wanga</a:t>
-            </a:r>
-            <a:r>
+              <a:t>A systematic review of fuzzing based on machine learning techniques </a:t>
+            </a:r>
+            <a:br>
               <a:rPr lang="en-US" sz="1400" dirty="0"/>
-              <a:t>, Peng </a:t>
+            </a:br>
+            <a:r>
+              <a:rPr lang="en-US" sz="1400" dirty="0"/>
+              <a:t>by Yan Wanga, Peng </a:t>
             </a:r>
             <a:r>
               <a:rPr lang="en-US" sz="1400" dirty="0" err="1"/>
@@ -7197,7 +7650,14 @@
             </a:r>
             <a:r>
               <a:rPr lang="en-US" sz="1400" dirty="0"/>
-              <a:t>  - </a:t>
+              <a:t>  </a:t>
+            </a:r>
+            <a:br>
+              <a:rPr lang="en-US" sz="1400" dirty="0"/>
+            </a:br>
+            <a:r>
+              <a:rPr lang="en-US" sz="1400" dirty="0"/>
+              <a:t>- </a:t>
             </a:r>
             <a:r>
               <a:rPr lang="en-US" sz="1400" dirty="0">
@@ -7205,20 +7665,33 @@
               </a:rPr>
               <a:t>https://arxiv.org/pdf/1908.01262.pdf</a:t>
             </a:r>
-            <a:endParaRPr lang="en-US" sz="1400" dirty="0"/>
-          </a:p>
-          <a:p>
             <a:r>
               <a:rPr lang="en-US" sz="1400" dirty="0"/>
-              <a:t>* </a:t>
-            </a:r>
+              <a:t> </a:t>
+            </a:r>
+          </a:p>
+          <a:p>
+            <a:pPr marL="285750" indent="-285750">
+              <a:spcAft>
+                <a:spcPts val="600"/>
+              </a:spcAft>
+              <a:buFont typeface="Arial" panose="020B0604020202020204" pitchFamily="34" charset="0"/>
+              <a:buChar char="•"/>
+            </a:pPr>
             <a:r>
               <a:rPr lang="en-US" sz="1400" dirty="0" err="1"/>
               <a:t>NeuFuzz</a:t>
             </a:r>
             <a:r>
               <a:rPr lang="en-US" sz="1400" dirty="0"/>
-              <a:t>: Efficient Fuzzing With Deep Neural Network – by </a:t>
+              <a:t>: Efficient Fuzzing With Deep Neural Network</a:t>
+            </a:r>
+            <a:br>
+              <a:rPr lang="en-US" sz="1400" dirty="0"/>
+            </a:br>
+            <a:r>
+              <a:rPr lang="en-US" sz="1400" dirty="0"/>
+              <a:t>by </a:t>
             </a:r>
             <a:r>
               <a:rPr lang="en-US" sz="1400" dirty="0" err="1"/>
@@ -7250,7 +7723,14 @@
             </a:r>
             <a:r>
               <a:rPr lang="en-US" sz="1400" dirty="0"/>
-              <a:t> Wang - </a:t>
+              <a:t> Wang </a:t>
+            </a:r>
+            <a:br>
+              <a:rPr lang="en-US" sz="1400" dirty="0"/>
+            </a:br>
+            <a:r>
+              <a:rPr lang="en-US" sz="1400" dirty="0"/>
+              <a:t>- </a:t>
             </a:r>
             <a:r>
               <a:rPr lang="en-US" sz="1400" dirty="0">
@@ -7258,12 +7738,36 @@
               </a:rPr>
               <a:t>https://ieeexplore.ieee.org/document/8672949</a:t>
             </a:r>
-            <a:endParaRPr lang="en-US" sz="1400" dirty="0"/>
-          </a:p>
-          <a:p>
             <a:r>
               <a:rPr lang="en-US" sz="1400" dirty="0"/>
-              <a:t>* Microsoft - Neural fuzzing: applying Deep Neural Network (DNN) to software security testing … Overall, using neural fuzzing outperformed traditional AFL in most cases.  - </a:t>
+              <a:t> </a:t>
+            </a:r>
+          </a:p>
+          <a:p>
+            <a:pPr marL="285750" indent="-285750">
+              <a:spcAft>
+                <a:spcPts val="600"/>
+              </a:spcAft>
+              <a:buFont typeface="Arial" panose="020B0604020202020204" pitchFamily="34" charset="0"/>
+              <a:buChar char="•"/>
+            </a:pPr>
+            <a:r>
+              <a:rPr lang="en-US" sz="1400" dirty="0"/>
+              <a:t>Microsoft - Neural fuzzing: applying Deep Neural Network (DNN) to software security testing</a:t>
+            </a:r>
+            <a:br>
+              <a:rPr lang="en-US" sz="1400" dirty="0"/>
+            </a:br>
+            <a:r>
+              <a:rPr lang="en-US" sz="1400" dirty="0"/>
+              <a:t>… Overall, using neural fuzzing outperformed traditional AFL in most cases.</a:t>
+            </a:r>
+            <a:br>
+              <a:rPr lang="en-US" sz="1400" dirty="0"/>
+            </a:br>
+            <a:r>
+              <a:rPr lang="en-US" sz="1400" dirty="0"/>
+              <a:t>- </a:t>
             </a:r>
             <a:r>
               <a:rPr lang="en-US" sz="1400" dirty="0">
@@ -7271,12 +7775,29 @@
               </a:rPr>
               <a:t>https://www.microsoft.com/en-us/research/blog/neural-fuzzing/</a:t>
             </a:r>
-            <a:endParaRPr lang="en-US" sz="1400" dirty="0"/>
-          </a:p>
-          <a:p>
             <a:r>
               <a:rPr lang="en-US" sz="1400" dirty="0"/>
-              <a:t>* Coverage-guided Fuzzing for Feedforward Neural Networks – by </a:t>
+              <a:t> </a:t>
+            </a:r>
+          </a:p>
+          <a:p>
+            <a:pPr marL="285750" indent="-285750">
+              <a:spcAft>
+                <a:spcPts val="600"/>
+              </a:spcAft>
+              <a:buFont typeface="Arial" panose="020B0604020202020204" pitchFamily="34" charset="0"/>
+              <a:buChar char="•"/>
+            </a:pPr>
+            <a:r>
+              <a:rPr lang="en-US" sz="1400" dirty="0"/>
+              <a:t>Coverage-guided Fuzzing for Feedforward Neural Networks </a:t>
+            </a:r>
+            <a:br>
+              <a:rPr lang="en-US" sz="1400" dirty="0"/>
+            </a:br>
+            <a:r>
+              <a:rPr lang="en-US" sz="1400" dirty="0"/>
+              <a:t>by </a:t>
             </a:r>
             <a:r>
               <a:rPr lang="en-US" sz="1400" dirty="0" err="1"/>
@@ -7308,7 +7829,14 @@
             </a:r>
             <a:r>
               <a:rPr lang="en-US" sz="1400" dirty="0"/>
-              <a:t> Zhao - Singapore &amp; Japan  - </a:t>
+              <a:t> Zhao - Singapore &amp; Japan</a:t>
+            </a:r>
+            <a:br>
+              <a:rPr lang="en-US" sz="1400" dirty="0"/>
+            </a:br>
+            <a:r>
+              <a:rPr lang="en-US" sz="1400" dirty="0"/>
+              <a:t>- </a:t>
             </a:r>
             <a:r>
               <a:rPr lang="en-US" sz="1400" dirty="0">
@@ -7319,17 +7847,27 @@
             <a:endParaRPr lang="en-US" sz="1400" dirty="0"/>
           </a:p>
           <a:p>
-            <a:r>
-              <a:rPr lang="en-US" sz="1400" dirty="0"/>
-              <a:t>* </a:t>
-            </a:r>
+            <a:pPr marL="285750" indent="-285750">
+              <a:spcAft>
+                <a:spcPts val="600"/>
+              </a:spcAft>
+              <a:buFont typeface="Arial" panose="020B0604020202020204" pitchFamily="34" charset="0"/>
+              <a:buChar char="•"/>
+            </a:pPr>
             <a:r>
               <a:rPr lang="en-US" sz="1400" dirty="0" err="1"/>
               <a:t>ReluDiff</a:t>
             </a:r>
             <a:r>
               <a:rPr lang="en-US" sz="1400" dirty="0"/>
-              <a:t>: Differential Verification of Deep Neural Networks – by Brandon Paulsen; </a:t>
+              <a:t>: Differential Verification of Deep Neural Networks </a:t>
+            </a:r>
+            <a:br>
+              <a:rPr lang="en-US" sz="1400" dirty="0"/>
+            </a:br>
+            <a:r>
+              <a:rPr lang="en-US" sz="1400" dirty="0"/>
+              <a:t>- by Brandon Paulsen; </a:t>
             </a:r>
             <a:r>
               <a:rPr lang="en-US" sz="1400" dirty="0" err="1"/>
@@ -7351,17 +7889,27 @@
             </a:r>
           </a:p>
           <a:p>
-            <a:r>
-              <a:rPr lang="en-US" sz="1400" dirty="0"/>
-              <a:t>* </a:t>
-            </a:r>
+            <a:pPr marL="285750" indent="-285750">
+              <a:spcAft>
+                <a:spcPts val="600"/>
+              </a:spcAft>
+              <a:buFont typeface="Arial" panose="020B0604020202020204" pitchFamily="34" charset="0"/>
+              <a:buChar char="•"/>
+            </a:pPr>
             <a:r>
               <a:rPr lang="en-US" sz="1400" dirty="0" err="1"/>
               <a:t>FuzzerGym</a:t>
             </a:r>
             <a:r>
               <a:rPr lang="en-US" sz="1400" dirty="0"/>
-              <a:t>: A Competitive Framework for Fuzzing and Learning – by William </a:t>
+              <a:t>: A Competitive Framework for Fuzzing and Learning</a:t>
+            </a:r>
+            <a:br>
+              <a:rPr lang="en-US" sz="1400" dirty="0"/>
+            </a:br>
+            <a:r>
+              <a:rPr lang="en-US" sz="1400" dirty="0"/>
+              <a:t>- by William </a:t>
             </a:r>
             <a:r>
               <a:rPr lang="en-US" sz="1400" dirty="0" err="1"/>
@@ -7380,17 +7928,23 @@
             <a:endParaRPr lang="en-US" sz="1400" dirty="0"/>
           </a:p>
           <a:p>
+            <a:pPr marL="285750" indent="-285750">
+              <a:spcAft>
+                <a:spcPts val="600"/>
+              </a:spcAft>
+              <a:buFont typeface="Arial" panose="020B0604020202020204" pitchFamily="34" charset="0"/>
+              <a:buChar char="•"/>
+            </a:pPr>
             <a:r>
               <a:rPr lang="en-US" sz="1400" dirty="0"/>
-              <a:t>* A systematic review of fuzzing based on machine learning techniques – by Yan </a:t>
-            </a:r>
-            <a:r>
-              <a:rPr lang="en-US" sz="1400" dirty="0" err="1"/>
-              <a:t>Wanga</a:t>
-            </a:r>
-            <a:r>
+              <a:t>A systematic review of fuzzing based on machine learning techniques</a:t>
+            </a:r>
+            <a:br>
               <a:rPr lang="en-US" sz="1400" dirty="0"/>
-              <a:t>, Peng </a:t>
+            </a:br>
+            <a:r>
+              <a:rPr lang="en-US" sz="1400" dirty="0"/>
+              <a:t>- by Yan Wanga, Peng </a:t>
             </a:r>
             <a:r>
               <a:rPr lang="en-US" sz="1400" dirty="0" err="1"/>
@@ -7444,9 +7998,23 @@
             </a:r>
           </a:p>
           <a:p>
+            <a:pPr marL="285750" indent="-285750">
+              <a:spcAft>
+                <a:spcPts val="600"/>
+              </a:spcAft>
+              <a:buFont typeface="Arial" panose="020B0604020202020204" pitchFamily="34" charset="0"/>
+              <a:buChar char="•"/>
+            </a:pPr>
             <a:r>
               <a:rPr lang="en-US" sz="1400" dirty="0"/>
-              <a:t>* The Art, Science, and Engineering of Fuzzing: A Survey (2019) – by Valentin J.M. </a:t>
+              <a:t>The Art, Science, and Engineering of Fuzzing: A Survey (2019) </a:t>
+            </a:r>
+            <a:br>
+              <a:rPr lang="en-US" sz="1400" dirty="0"/>
+            </a:br>
+            <a:r>
+              <a:rPr lang="en-US" sz="1400" dirty="0"/>
+              <a:t>- by Valentin J.M. </a:t>
             </a:r>
             <a:r>
               <a:rPr lang="en-US" sz="1400" dirty="0" err="1"/>
@@ -7486,7 +8054,14 @@
             </a:r>
             <a:r>
               <a:rPr lang="en-US" sz="1400" dirty="0"/>
-              <a:t>, Edward J. Schwartz, and Maverick Woo - </a:t>
+              <a:t>, Edward J. Schwartz, and Maverick Woo</a:t>
+            </a:r>
+            <a:br>
+              <a:rPr lang="en-US" sz="1400" dirty="0"/>
+            </a:br>
+            <a:r>
+              <a:rPr lang="en-US" sz="1400" dirty="0"/>
+              <a:t>- </a:t>
             </a:r>
             <a:r>
               <a:rPr lang="en-US" sz="1400" dirty="0">
@@ -7500,10 +8075,13 @@
             </a:r>
           </a:p>
           <a:p>
-            <a:r>
-              <a:rPr lang="en-US" sz="1400" dirty="0"/>
-              <a:t>* </a:t>
-            </a:r>
+            <a:pPr marL="285750" indent="-285750">
+              <a:spcAft>
+                <a:spcPts val="600"/>
+              </a:spcAft>
+              <a:buFont typeface="Arial" panose="020B0604020202020204" pitchFamily="34" charset="0"/>
+              <a:buChar char="•"/>
+            </a:pPr>
             <a:r>
               <a:rPr lang="en-US" sz="1400" dirty="0" err="1"/>
               <a:t>EnFuzz</a:t>
@@ -7532,9 +8110,16 @@
             </a:r>
           </a:p>
           <a:p>
+            <a:pPr marL="285750" indent="-285750">
+              <a:spcAft>
+                <a:spcPts val="600"/>
+              </a:spcAft>
+              <a:buFont typeface="Arial" panose="020B0604020202020204" pitchFamily="34" charset="0"/>
+              <a:buChar char="•"/>
+            </a:pPr>
             <a:r>
               <a:rPr lang="en-US" sz="1400" dirty="0"/>
-              <a:t>* Klee LLVM Execution Engine - </a:t>
+              <a:t>Klee LLVM Execution Engine - </a:t>
             </a:r>
             <a:r>
               <a:rPr lang="en-US" sz="1400" dirty="0">
@@ -7548,9 +8133,16 @@
             </a:r>
           </a:p>
           <a:p>
+            <a:pPr marL="285750" indent="-285750">
+              <a:spcAft>
+                <a:spcPts val="600"/>
+              </a:spcAft>
+              <a:buFont typeface="Arial" panose="020B0604020202020204" pitchFamily="34" charset="0"/>
+              <a:buChar char="•"/>
+            </a:pPr>
             <a:r>
               <a:rPr lang="en-US" sz="1400" dirty="0"/>
-              <a:t>* Microsoft Fuzzing as a service - </a:t>
+              <a:t>Microsoft Fuzzing as a service - </a:t>
             </a:r>
             <a:r>
               <a:rPr lang="en-US" sz="1400" dirty="0">
@@ -7561,6 +8153,44 @@
             <a:r>
               <a:rPr lang="en-US" sz="1400" dirty="0"/>
               <a:t>  </a:t>
+            </a:r>
+          </a:p>
+        </p:txBody>
+      </p:sp>
+      <p:sp>
+        <p:nvSpPr>
+          <p:cNvPr id="2" name="TextBox 1">
+            <a:extLst>
+              <a:ext uri="{FF2B5EF4-FFF2-40B4-BE49-F238E27FC236}">
+                <a16:creationId xmlns:a16="http://schemas.microsoft.com/office/drawing/2014/main" id="{63B9A2B9-4D0C-1F40-888A-278D1A53BAAE}"/>
+              </a:ext>
+            </a:extLst>
+          </p:cNvPr>
+          <p:cNvSpPr txBox="1"/>
+          <p:nvPr/>
+        </p:nvSpPr>
+        <p:spPr>
+          <a:xfrm>
+            <a:off x="115614" y="105103"/>
+            <a:ext cx="3216165" cy="523220"/>
+          </a:xfrm>
+          <a:prstGeom prst="rect">
+            <a:avLst/>
+          </a:prstGeom>
+          <a:noFill/>
+        </p:spPr>
+        <p:txBody>
+          <a:bodyPr wrap="square" rtlCol="0">
+            <a:spAutoFit/>
+          </a:bodyPr>
+          <a:lstStyle/>
+          <a:p>
+            <a:r>
+              <a:rPr lang="en-US" sz="2800" b="1" dirty="0">
+                <a:latin typeface="Arial" panose="020B0604020202020204" pitchFamily="34" charset="0"/>
+                <a:cs typeface="Arial" panose="020B0604020202020204" pitchFamily="34" charset="0"/>
+              </a:rPr>
+              <a:t>More Resources</a:t>
             </a:r>
           </a:p>
         </p:txBody>
